--- a/mesh/slides/mesh_ZollerQu.pptx
+++ b/mesh/slides/mesh_ZollerQu.pptx
@@ -14,6 +14,8 @@
     <p:sldId id="262" r:id="rId14"/>
     <p:sldId id="263" r:id="rId15"/>
     <p:sldId id="264" r:id="rId16"/>
+    <p:sldId id="265" r:id="rId17"/>
+    <p:sldId id="266" r:id="rId18"/>
   </p:sldIdLst>
   <p:sldSz cx="12191695" cy="6858000" type="screen4x3"/>
   <p:notesSz cx="6858000" cy="9144000"/>
@@ -535,6 +537,146 @@
 </p:notes>
 </file>
 
+<file path=ppt/notesSlides/notesSlide10.xml><?xml version="1.0" encoding="utf-8"?>
+<p:notes xmlns:a="http://schemas.openxmlformats.org/drawingml/2006/main" xmlns:p="http://schemas.openxmlformats.org/presentationml/2006/main" xmlns:r="http://schemas.openxmlformats.org/officeDocument/2006/relationships">
+  <p:cSld>
+    <p:spTree>
+      <p:nvGrpSpPr>
+        <p:cNvPr id="1" name=""/>
+        <p:cNvGrpSpPr/>
+        <p:nvPr/>
+      </p:nvGrpSpPr>
+      <p:grpSpPr>
+        <a:xfrm>
+          <a:off x="0" y="0"/>
+          <a:ext cx="0" cy="0"/>
+          <a:chOff x="0" y="0"/>
+          <a:chExt cx="0" cy="0"/>
+        </a:xfrm>
+      </p:grpSpPr>
+      <p:sp>
+        <p:nvSpPr>
+          <p:cNvPr id="2" name="Slide Image Placeholder 1"/>
+          <p:cNvSpPr>
+            <a:spLocks noGrp="1"/>
+          </p:cNvSpPr>
+          <p:nvPr>
+            <p:ph type="sldImg" idx="2"/>
+          </p:nvPr>
+        </p:nvSpPr>
+        <p:spPr/>
+      </p:sp>
+      <p:sp>
+        <p:nvSpPr>
+          <p:cNvPr id="3" name="Notes Placeholder 2"/>
+          <p:cNvSpPr>
+            <a:spLocks noGrp="1"/>
+          </p:cNvSpPr>
+          <p:nvPr>
+            <p:ph type="body" idx="3" sz="quarter"/>
+          </p:nvPr>
+        </p:nvSpPr>
+        <p:spPr/>
+        <p:txBody>
+          <a:bodyPr/>
+          <a:lstStyle/>
+          <a:p>
+            <a:r>
+              <a:t>[CUT TO THE LIVE QOLLAB DEMO] On Qollab we press Run and choose IonQ Forte 1. Limits: a noisy simulator, not hardware. For a CPU plus a GPU the varQITE circuit fails, and we proved why. Beyond twelve qubits classical methods win. Next, we repair that circuit. Thank you. This effort is supported by Qollab and IonQ.</a:t>
+            </a:r>
+          </a:p>
+        </p:txBody>
+      </p:sp>
+      <p:sp>
+        <p:nvSpPr>
+          <p:cNvPr id="4" name="Slide Number Placeholder 3"/>
+          <p:cNvSpPr>
+            <a:spLocks noGrp="1"/>
+          </p:cNvSpPr>
+          <p:nvPr>
+            <p:ph type="sldNum" idx="5" sz="quarter"/>
+          </p:nvPr>
+        </p:nvSpPr>
+        <p:spPr/>
+      </p:sp>
+    </p:spTree>
+  </p:cSld>
+  <p:clrMapOvr>
+    <a:masterClrMapping/>
+  </p:clrMapOvr>
+</p:notes>
+</file>
+
+<file path=ppt/notesSlides/notesSlide11.xml><?xml version="1.0" encoding="utf-8"?>
+<p:notes xmlns:a="http://schemas.openxmlformats.org/drawingml/2006/main" xmlns:p="http://schemas.openxmlformats.org/presentationml/2006/main" xmlns:r="http://schemas.openxmlformats.org/officeDocument/2006/relationships">
+  <p:cSld>
+    <p:spTree>
+      <p:nvGrpSpPr>
+        <p:cNvPr id="1" name=""/>
+        <p:cNvGrpSpPr/>
+        <p:nvPr/>
+      </p:nvGrpSpPr>
+      <p:grpSpPr>
+        <a:xfrm>
+          <a:off x="0" y="0"/>
+          <a:ext cx="0" cy="0"/>
+          <a:chOff x="0" y="0"/>
+          <a:chExt cx="0" cy="0"/>
+        </a:xfrm>
+      </p:grpSpPr>
+      <p:sp>
+        <p:nvSpPr>
+          <p:cNvPr id="2" name="Slide Image Placeholder 1"/>
+          <p:cNvSpPr>
+            <a:spLocks noGrp="1"/>
+          </p:cNvSpPr>
+          <p:nvPr>
+            <p:ph type="sldImg" idx="2"/>
+          </p:nvPr>
+        </p:nvSpPr>
+        <p:spPr/>
+      </p:sp>
+      <p:sp>
+        <p:nvSpPr>
+          <p:cNvPr id="3" name="Notes Placeholder 2"/>
+          <p:cNvSpPr>
+            <a:spLocks noGrp="1"/>
+          </p:cNvSpPr>
+          <p:nvPr>
+            <p:ph type="body" idx="3" sz="quarter"/>
+          </p:nvPr>
+        </p:nvSpPr>
+        <p:spPr/>
+        <p:txBody>
+          <a:bodyPr/>
+          <a:lstStyle/>
+          <a:p>
+            <a:r>
+              <a:t>Appendix, not spoken: the two device scenarios side by side. For CPU plus GPU the published varQITE circuit is capped by a qubit that stays fifty-fifty; the best other circuit reaches about half a percent without noise.</a:t>
+            </a:r>
+          </a:p>
+        </p:txBody>
+      </p:sp>
+      <p:sp>
+        <p:nvSpPr>
+          <p:cNvPr id="4" name="Slide Number Placeholder 3"/>
+          <p:cNvSpPr>
+            <a:spLocks noGrp="1"/>
+          </p:cNvSpPr>
+          <p:nvPr>
+            <p:ph type="sldNum" idx="5" sz="quarter"/>
+          </p:nvPr>
+        </p:nvSpPr>
+        <p:spPr/>
+      </p:sp>
+    </p:spTree>
+  </p:cSld>
+  <p:clrMapOvr>
+    <a:masterClrMapping/>
+  </p:clrMapOvr>
+</p:notes>
+</file>
+
 <file path=ppt/notesSlides/notesSlide2.xml><?xml version="1.0" encoding="utf-8"?>
 <p:notes xmlns:a="http://schemas.openxmlformats.org/drawingml/2006/main" xmlns:p="http://schemas.openxmlformats.org/presentationml/2006/main" xmlns:r="http://schemas.openxmlformats.org/officeDocument/2006/relationships">
   <p:cSld>
@@ -720,7 +862,7 @@
           <a:lstStyle/>
           <a:p>
             <a:r>
-              <a:t>The circuit starts from all splits, applies a cost layer with one two-qubit gate per pair of regions, then a mixer. We compared one hundred and four circuits, including IonQ's varQITE. Training is offline and noiseless. On Qollab we send one fixed circuit per job.</a:t>
+              <a:t>We tested nine mesh objects: a plate, L-shaped plates and a plate with a hole, with heat sources, heavy materials, strong coupling and a priority zone.</a:t>
             </a:r>
           </a:p>
         </p:txBody>
@@ -790,7 +932,7 @@
           <a:lstStyle/>
           <a:p>
             <a:r>
-              <a:t>Our balance term couples every pair of regions. IonQ connects every pair of qubits, so one layer needs sixty-six two-qubit gates. Routed on a heavy-hex layout it needs about three times more, counted with the transpiler only.</a:t>
+              <a:t>The circuit starts from all splits, applies a cost layer with one two-qubit gate per pair of regions, then a mixer. We compared one hundred and four circuits, including IonQ's varQITE. Training is offline and noiseless. On Qollab we send one fixed circuit per job.</a:t>
             </a:r>
           </a:p>
         </p:txBody>
@@ -860,7 +1002,7 @@
           <a:lstStyle/>
           <a:p>
             <a:r>
-              <a:t>The main result, for two equal devices. On the IonQ Forte 1 noise model, twenty-eight percent of one thousand shots were the exact best split, and it was the most frequent answer. Random guessing gives five hundredths of a percent. Without noise we reach seventy-five percent: noise costs twice what we estimated.</a:t>
+              <a:t>Our balance term couples every pair of regions. IonQ connects every pair of qubits, so one layer needs sixty-six two-qubit gates. Routed on a heavy-hex layout it needs about three times more, counted with the transpiler only.</a:t>
             </a:r>
           </a:p>
         </p:txBody>
@@ -930,7 +1072,7 @@
           <a:lstStyle/>
           <a:p>
             <a:r>
-              <a:t>Now the honest part. As the mesh grows, classical methods win: at twenty-nine regions, simulated without noise, our best circuit finds a near-best split in under one percent of runs, spectral bisection in half or more. On IonQ's simulator we needed four shots per optimum against eleven hundred classical evaluations. But varQITE first needed seven thousand six hundred training circuits, and a shot is not the same work as a classical evaluation.</a:t>
+              <a:t>The main result, for two equal devices. On the IonQ Forte 1 noise model, twenty-eight percent of one thousand shots were the exact best split, and it was the most frequent answer. Random guessing gives five hundredths of a percent. Without noise we reach seventy-five percent: noise costs twice what we estimated.</a:t>
             </a:r>
           </a:p>
         </p:txBody>
@@ -1000,7 +1142,7 @@
           <a:lstStyle/>
           <a:p>
             <a:r>
-              <a:t>[CUT TO THE LIVE QOLLAB DEMO] On Qollab we press Run and choose IonQ Forte 1. Limits: a noisy simulator, not hardware. For a CPU plus a GPU the varQITE circuit fails, and we proved why. Beyond twelve qubits classical methods win. Next, we repair that circuit. Thank you. This effort is supported by Qollab and IonQ.</a:t>
+              <a:t>Now the honest part. As the mesh grows, classical methods win: at twenty-nine regions, simulated without noise, our best circuit finds a near-best split in under one percent of runs, spectral bisection in half or more. On IonQ's simulator we needed four shots per optimum against eleven hundred classical evaluations. But varQITE first needed seven thousand six hundred training circuits, and a shot is not the same work as a classical evaluation.</a:t>
             </a:r>
           </a:p>
         </p:txBody>
@@ -1070,7 +1212,7 @@
           <a:lstStyle/>
           <a:p>
             <a:r>
-              <a:t>Appendix, not spoken: the two device scenarios side by side. For CPU plus GPU the published varQITE circuit is capped by a qubit that stays fifty-fifty; the best other circuit reaches about half a percent without noise.</a:t>
+              <a:t>Then we tuned QAOA on separate calibration meshes, comparing seven QAOA types. At twelve qubits the best setting gives about twenty times more near-best answers per shot, and it still helps at twenty qubits.</a:t>
             </a:r>
           </a:p>
         </p:txBody>
@@ -4847,6 +4989,1789 @@
 </p:sld>
 </file>
 
+<file path=ppt/slides/slide10.xml><?xml version="1.0" encoding="utf-8"?>
+<p:sld xmlns:a="http://schemas.openxmlformats.org/drawingml/2006/main" xmlns:p="http://schemas.openxmlformats.org/presentationml/2006/main" xmlns:r="http://schemas.openxmlformats.org/officeDocument/2006/relationships">
+  <p:cSld>
+    <p:bg>
+      <p:bgPr>
+        <a:solidFill>
+          <a:srgbClr val="0F161B"/>
+        </a:solidFill>
+        <a:effectLst/>
+      </p:bgPr>
+    </p:bg>
+    <p:spTree>
+      <p:nvGrpSpPr>
+        <p:cNvPr id="1" name=""/>
+        <p:cNvGrpSpPr/>
+        <p:nvPr/>
+      </p:nvGrpSpPr>
+      <p:grpSpPr/>
+      <p:sp>
+        <p:nvSpPr>
+          <p:cNvPr id="2" name="TextBox 1"/>
+          <p:cNvSpPr txBox="1"/>
+          <p:nvPr/>
+        </p:nvSpPr>
+        <p:spPr>
+          <a:xfrm>
+            <a:off x="548640" y="411480"/>
+            <a:ext cx="10972800" cy="320040"/>
+          </a:xfrm>
+          <a:prstGeom prst="rect">
+            <a:avLst/>
+          </a:prstGeom>
+          <a:noFill/>
+        </p:spPr>
+        <p:txBody>
+          <a:bodyPr wrap="none" lIns="0" rIns="0" tIns="0" bIns="0" anchor="t">
+            <a:spAutoFit/>
+          </a:bodyPr>
+          <a:lstStyle/>
+          <a:p>
+            <a:pPr algn="l">
+              <a:lnSpc>
+                <a:spcPts val="2160"/>
+              </a:lnSpc>
+            </a:pPr>
+            <a:r>
+              <a:rPr sz="1800" b="0" i="0">
+                <a:solidFill>
+                  <a:srgbClr val="9FB4D1"/>
+                </a:solidFill>
+                <a:latin typeface="Arial"/>
+              </a:rPr>
+              <a:t>DEMO  ·  LIMITS  ·  NEXT STEPS</a:t>
+            </a:r>
+          </a:p>
+        </p:txBody>
+      </p:sp>
+      <p:sp>
+        <p:nvSpPr>
+          <p:cNvPr id="3" name="TextBox 2"/>
+          <p:cNvSpPr txBox="1"/>
+          <p:nvPr/>
+        </p:nvSpPr>
+        <p:spPr>
+          <a:xfrm>
+            <a:off x="548640" y="777240"/>
+            <a:ext cx="11155680" cy="594360"/>
+          </a:xfrm>
+          <a:prstGeom prst="rect">
+            <a:avLst/>
+          </a:prstGeom>
+          <a:noFill/>
+        </p:spPr>
+        <p:txBody>
+          <a:bodyPr wrap="none" lIns="0" rIns="0" tIns="0" bIns="0" anchor="t">
+            <a:spAutoFit/>
+          </a:bodyPr>
+          <a:lstStyle/>
+          <a:p>
+            <a:pPr algn="l">
+              <a:lnSpc>
+                <a:spcPts val="4320"/>
+              </a:lnSpc>
+            </a:pPr>
+            <a:r>
+              <a:rPr sz="3600" b="1" i="0">
+                <a:solidFill>
+                  <a:srgbClr val="FAFAFA"/>
+                </a:solidFill>
+                <a:latin typeface="Arial"/>
+              </a:rPr>
+              <a:t>Run it on Qollab</a:t>
+            </a:r>
+          </a:p>
+        </p:txBody>
+      </p:sp>
+      <p:pic>
+        <p:nvPicPr>
+          <p:cNvPr id="4" name="Picture 3" descr="Placeholder for a live Qollab screenshot. It shows lines of the recorded console output: running on ionq_simulator, 1,000 shots, measured P(optimum) 0.2780, and the two optimal splits measured 146 and 132 times."/>
+          <p:cNvPicPr>
+            <a:picLocks noChangeAspect="1"/>
+          </p:cNvPicPr>
+          <p:nvPr/>
+        </p:nvPicPr>
+        <p:blipFill>
+          <a:blip r:embed="rId2"/>
+          <a:stretch>
+            <a:fillRect/>
+          </a:stretch>
+        </p:blipFill>
+        <p:spPr>
+          <a:xfrm>
+            <a:off x="457200" y="1463040"/>
+            <a:ext cx="5257800" cy="3200400"/>
+          </a:xfrm>
+          <a:prstGeom prst="rect">
+            <a:avLst/>
+          </a:prstGeom>
+        </p:spPr>
+      </p:pic>
+      <p:sp>
+        <p:nvSpPr>
+          <p:cNvPr id="5" name="TextBox 4"/>
+          <p:cNvSpPr txBox="1"/>
+          <p:nvPr/>
+        </p:nvSpPr>
+        <p:spPr>
+          <a:xfrm>
+            <a:off x="548640" y="4754880"/>
+            <a:ext cx="5303520" cy="320040"/>
+          </a:xfrm>
+          <a:prstGeom prst="rect">
+            <a:avLst/>
+          </a:prstGeom>
+          <a:noFill/>
+        </p:spPr>
+        <p:txBody>
+          <a:bodyPr wrap="none" lIns="0" rIns="0" tIns="0" bIns="0" anchor="t">
+            <a:spAutoFit/>
+          </a:bodyPr>
+          <a:lstStyle/>
+          <a:p>
+            <a:pPr algn="l">
+              <a:lnSpc>
+                <a:spcPts val="2160"/>
+              </a:lnSpc>
+            </a:pPr>
+            <a:r>
+              <a:rPr sz="1800" b="0" i="0">
+                <a:solidFill>
+                  <a:srgbClr val="FAFAFA"/>
+                </a:solidFill>
+                <a:latin typeface="Arial"/>
+              </a:rPr>
+              <a:t>Qollab project: [pending]      Video: [pending]</a:t>
+            </a:r>
+          </a:p>
+        </p:txBody>
+      </p:sp>
+      <p:sp>
+        <p:nvSpPr>
+          <p:cNvPr id="6" name="TextBox 5"/>
+          <p:cNvSpPr txBox="1"/>
+          <p:nvPr/>
+        </p:nvSpPr>
+        <p:spPr>
+          <a:xfrm>
+            <a:off x="548640" y="5138928"/>
+            <a:ext cx="5303520" cy="320040"/>
+          </a:xfrm>
+          <a:prstGeom prst="rect">
+            <a:avLst/>
+          </a:prstGeom>
+          <a:noFill/>
+        </p:spPr>
+        <p:txBody>
+          <a:bodyPr wrap="none" lIns="0" rIns="0" tIns="0" bIns="0" anchor="t">
+            <a:spAutoFit/>
+          </a:bodyPr>
+          <a:lstStyle/>
+          <a:p>
+            <a:pPr algn="l">
+              <a:lnSpc>
+                <a:spcPts val="2160"/>
+              </a:lnSpc>
+            </a:pPr>
+            <a:r>
+              <a:rPr sz="1800" b="0" i="0">
+                <a:solidFill>
+                  <a:srgbClr val="FAFAFA"/>
+                </a:solidFill>
+                <a:latin typeface="Arial"/>
+              </a:rPr>
+              <a:t>GitHub: Oussema-t/zollerqu-qollab (branch mesh)</a:t>
+            </a:r>
+          </a:p>
+        </p:txBody>
+      </p:sp>
+      <p:sp>
+        <p:nvSpPr>
+          <p:cNvPr id="7" name="TextBox 6"/>
+          <p:cNvSpPr txBox="1"/>
+          <p:nvPr/>
+        </p:nvSpPr>
+        <p:spPr>
+          <a:xfrm>
+            <a:off x="6126480" y="1463040"/>
+            <a:ext cx="5669280" cy="411479"/>
+          </a:xfrm>
+          <a:prstGeom prst="rect">
+            <a:avLst/>
+          </a:prstGeom>
+          <a:noFill/>
+        </p:spPr>
+        <p:txBody>
+          <a:bodyPr wrap="none" lIns="0" rIns="0" tIns="0" bIns="0" anchor="t">
+            <a:spAutoFit/>
+          </a:bodyPr>
+          <a:lstStyle/>
+          <a:p>
+            <a:pPr algn="l">
+              <a:lnSpc>
+                <a:spcPts val="2879"/>
+              </a:lnSpc>
+            </a:pPr>
+            <a:r>
+              <a:rPr sz="2400" b="1" i="0">
+                <a:solidFill>
+                  <a:srgbClr val="9FB4D1"/>
+                </a:solidFill>
+                <a:latin typeface="Arial"/>
+              </a:rPr>
+              <a:t>Limits</a:t>
+            </a:r>
+          </a:p>
+        </p:txBody>
+      </p:sp>
+      <p:sp>
+        <p:nvSpPr>
+          <p:cNvPr id="8" name="TextBox 7"/>
+          <p:cNvSpPr txBox="1"/>
+          <p:nvPr/>
+        </p:nvSpPr>
+        <p:spPr>
+          <a:xfrm>
+            <a:off x="6126480" y="1920240"/>
+            <a:ext cx="5669280" cy="1143000"/>
+          </a:xfrm>
+          <a:prstGeom prst="rect">
+            <a:avLst/>
+          </a:prstGeom>
+          <a:noFill/>
+        </p:spPr>
+        <p:txBody>
+          <a:bodyPr wrap="none" lIns="0" rIns="0" tIns="0" bIns="0" anchor="t">
+            <a:spAutoFit/>
+          </a:bodyPr>
+          <a:lstStyle/>
+          <a:p>
+            <a:pPr algn="l">
+              <a:lnSpc>
+                <a:spcPts val="2160"/>
+              </a:lnSpc>
+            </a:pPr>
+            <a:r>
+              <a:rPr sz="1800" b="0" i="0">
+                <a:solidFill>
+                  <a:srgbClr val="FAFAFA"/>
+                </a:solidFill>
+                <a:latin typeface="Arial"/>
+              </a:rPr>
+              <a:t>1. A noisy simulator, not hardware.</a:t>
+            </a:r>
+          </a:p>
+          <a:p>
+            <a:pPr algn="l">
+              <a:lnSpc>
+                <a:spcPts val="2160"/>
+              </a:lnSpc>
+            </a:pPr>
+            <a:r>
+              <a:rPr sz="1800" b="0" i="0">
+                <a:solidFill>
+                  <a:srgbClr val="FAFAFA"/>
+                </a:solidFill>
+                <a:latin typeface="Arial"/>
+              </a:rPr>
+              <a:t>2. CPU + GPU: the varQITE circuit fails. One</a:t>
+            </a:r>
+          </a:p>
+          <a:p>
+            <a:pPr algn="l">
+              <a:lnSpc>
+                <a:spcPts val="2160"/>
+              </a:lnSpc>
+            </a:pPr>
+            <a:r>
+              <a:rPr sz="1800" b="0" i="0">
+                <a:solidFill>
+                  <a:srgbClr val="FAFAFA"/>
+                </a:solidFill>
+                <a:latin typeface="Arial"/>
+              </a:rPr>
+              <a:t>    qubit stays 50/50, and we proved why.</a:t>
+            </a:r>
+          </a:p>
+          <a:p>
+            <a:pPr algn="l">
+              <a:lnSpc>
+                <a:spcPts val="2160"/>
+              </a:lnSpc>
+            </a:pPr>
+            <a:r>
+              <a:rPr sz="1800" b="0" i="0">
+                <a:solidFill>
+                  <a:srgbClr val="FAFAFA"/>
+                </a:solidFill>
+                <a:latin typeface="Arial"/>
+              </a:rPr>
+              <a:t>3. Beyond 12 qubits, classical methods win.</a:t>
+            </a:r>
+          </a:p>
+        </p:txBody>
+      </p:sp>
+      <p:sp>
+        <p:nvSpPr>
+          <p:cNvPr id="9" name="TextBox 8"/>
+          <p:cNvSpPr txBox="1"/>
+          <p:nvPr/>
+        </p:nvSpPr>
+        <p:spPr>
+          <a:xfrm>
+            <a:off x="6126480" y="3611880"/>
+            <a:ext cx="5669280" cy="411479"/>
+          </a:xfrm>
+          <a:prstGeom prst="rect">
+            <a:avLst/>
+          </a:prstGeom>
+          <a:noFill/>
+        </p:spPr>
+        <p:txBody>
+          <a:bodyPr wrap="none" lIns="0" rIns="0" tIns="0" bIns="0" anchor="t">
+            <a:spAutoFit/>
+          </a:bodyPr>
+          <a:lstStyle/>
+          <a:p>
+            <a:pPr algn="l">
+              <a:lnSpc>
+                <a:spcPts val="2879"/>
+              </a:lnSpc>
+            </a:pPr>
+            <a:r>
+              <a:rPr sz="2400" b="1" i="0">
+                <a:solidFill>
+                  <a:srgbClr val="9FB4D1"/>
+                </a:solidFill>
+                <a:latin typeface="Arial"/>
+              </a:rPr>
+              <a:t>Next steps</a:t>
+            </a:r>
+          </a:p>
+        </p:txBody>
+      </p:sp>
+      <p:sp>
+        <p:nvSpPr>
+          <p:cNvPr id="10" name="TextBox 9"/>
+          <p:cNvSpPr txBox="1"/>
+          <p:nvPr/>
+        </p:nvSpPr>
+        <p:spPr>
+          <a:xfrm>
+            <a:off x="6126480" y="4069080"/>
+            <a:ext cx="5669280" cy="868680"/>
+          </a:xfrm>
+          <a:prstGeom prst="rect">
+            <a:avLst/>
+          </a:prstGeom>
+          <a:noFill/>
+        </p:spPr>
+        <p:txBody>
+          <a:bodyPr wrap="none" lIns="0" rIns="0" tIns="0" bIns="0" anchor="t">
+            <a:spAutoFit/>
+          </a:bodyPr>
+          <a:lstStyle/>
+          <a:p>
+            <a:pPr algn="l">
+              <a:lnSpc>
+                <a:spcPts val="2160"/>
+              </a:lnSpc>
+            </a:pPr>
+            <a:r>
+              <a:rPr sz="1800" b="0" i="0">
+                <a:solidFill>
+                  <a:srgbClr val="FAFAFA"/>
+                </a:solidFill>
+                <a:latin typeface="Arial"/>
+              </a:rPr>
+              <a:t>1. Run the other circuits on the noise model.</a:t>
+            </a:r>
+          </a:p>
+          <a:p>
+            <a:pPr algn="l">
+              <a:lnSpc>
+                <a:spcPts val="2160"/>
+              </a:lnSpc>
+            </a:pPr>
+            <a:r>
+              <a:rPr sz="1800" b="0" i="0">
+                <a:solidFill>
+                  <a:srgbClr val="FAFAFA"/>
+                </a:solidFill>
+                <a:latin typeface="Arial"/>
+              </a:rPr>
+              <a:t>2. Repair the circuit for unequal shares.</a:t>
+            </a:r>
+          </a:p>
+          <a:p>
+            <a:pPr algn="l">
+              <a:lnSpc>
+                <a:spcPts val="2160"/>
+              </a:lnSpc>
+            </a:pPr>
+            <a:r>
+              <a:rPr sz="1800" b="0" i="0">
+                <a:solidFill>
+                  <a:srgbClr val="FAFAFA"/>
+                </a:solidFill>
+                <a:latin typeface="Arial"/>
+              </a:rPr>
+              <a:t>3. Split between more than two devices.</a:t>
+            </a:r>
+          </a:p>
+        </p:txBody>
+      </p:sp>
+      <p:sp>
+        <p:nvSpPr>
+          <p:cNvPr id="11" name="TextBox 10"/>
+          <p:cNvSpPr txBox="1"/>
+          <p:nvPr/>
+        </p:nvSpPr>
+        <p:spPr>
+          <a:xfrm>
+            <a:off x="548640" y="5760720"/>
+            <a:ext cx="10972800" cy="350520"/>
+          </a:xfrm>
+          <a:prstGeom prst="rect">
+            <a:avLst/>
+          </a:prstGeom>
+          <a:noFill/>
+        </p:spPr>
+        <p:txBody>
+          <a:bodyPr wrap="none" lIns="0" rIns="0" tIns="0" bIns="0" anchor="t">
+            <a:spAutoFit/>
+          </a:bodyPr>
+          <a:lstStyle/>
+          <a:p>
+            <a:pPr algn="l">
+              <a:lnSpc>
+                <a:spcPts val="2400"/>
+              </a:lnSpc>
+            </a:pPr>
+            <a:r>
+              <a:rPr sz="2000" b="0" i="0">
+                <a:solidFill>
+                  <a:srgbClr val="FAFAFA"/>
+                </a:solidFill>
+                <a:latin typeface="Arial"/>
+              </a:rPr>
+              <a:t>This effort is supported by Qollab &amp; IonQ</a:t>
+            </a:r>
+          </a:p>
+        </p:txBody>
+      </p:sp>
+      <p:sp>
+        <p:nvSpPr>
+          <p:cNvPr id="12" name="TextBox 11"/>
+          <p:cNvSpPr txBox="1"/>
+          <p:nvPr/>
+        </p:nvSpPr>
+        <p:spPr>
+          <a:xfrm>
+            <a:off x="548640" y="6428232"/>
+            <a:ext cx="7315200" cy="228600"/>
+          </a:xfrm>
+          <a:prstGeom prst="rect">
+            <a:avLst/>
+          </a:prstGeom>
+          <a:noFill/>
+        </p:spPr>
+        <p:txBody>
+          <a:bodyPr wrap="none" lIns="0" rIns="0" tIns="0" bIns="0" anchor="t">
+            <a:spAutoFit/>
+          </a:bodyPr>
+          <a:lstStyle/>
+          <a:p>
+            <a:pPr algn="l">
+              <a:lnSpc>
+                <a:spcPts val="1439"/>
+              </a:lnSpc>
+            </a:pPr>
+            <a:r>
+              <a:rPr sz="1200" b="0" i="0">
+                <a:solidFill>
+                  <a:srgbClr val="9AA3AA"/>
+                </a:solidFill>
+                <a:latin typeface="Arial"/>
+              </a:rPr>
+              <a:t>ZollerQu - Qollab x IonQ Hackathon 2026</a:t>
+            </a:r>
+          </a:p>
+        </p:txBody>
+      </p:sp>
+      <p:sp>
+        <p:nvSpPr>
+          <p:cNvPr id="13" name="TextBox 12"/>
+          <p:cNvSpPr txBox="1"/>
+          <p:nvPr/>
+        </p:nvSpPr>
+        <p:spPr>
+          <a:xfrm>
+            <a:off x="10698480" y="6428232"/>
+            <a:ext cx="941832" cy="228600"/>
+          </a:xfrm>
+          <a:prstGeom prst="rect">
+            <a:avLst/>
+          </a:prstGeom>
+          <a:noFill/>
+        </p:spPr>
+        <p:txBody>
+          <a:bodyPr wrap="none" lIns="0" rIns="0" tIns="0" bIns="0" anchor="t">
+            <a:spAutoFit/>
+          </a:bodyPr>
+          <a:lstStyle/>
+          <a:p>
+            <a:pPr algn="r">
+              <a:lnSpc>
+                <a:spcPts val="1439"/>
+              </a:lnSpc>
+            </a:pPr>
+            <a:r>
+              <a:rPr sz="1200" b="0" i="0">
+                <a:solidFill>
+                  <a:srgbClr val="9AA3AA"/>
+                </a:solidFill>
+                <a:latin typeface="Arial"/>
+              </a:rPr>
+              <a:t>10</a:t>
+            </a:r>
+          </a:p>
+        </p:txBody>
+      </p:sp>
+    </p:spTree>
+  </p:cSld>
+  <p:clrMapOvr>
+    <a:masterClrMapping/>
+  </p:clrMapOvr>
+</p:sld>
+</file>
+
+<file path=ppt/slides/slide11.xml><?xml version="1.0" encoding="utf-8"?>
+<p:sld xmlns:a="http://schemas.openxmlformats.org/drawingml/2006/main" xmlns:p="http://schemas.openxmlformats.org/presentationml/2006/main" xmlns:r="http://schemas.openxmlformats.org/officeDocument/2006/relationships">
+  <p:cSld>
+    <p:bg>
+      <p:bgPr>
+        <a:solidFill>
+          <a:srgbClr val="0F161B"/>
+        </a:solidFill>
+        <a:effectLst/>
+      </p:bgPr>
+    </p:bg>
+    <p:spTree>
+      <p:nvGrpSpPr>
+        <p:cNvPr id="1" name=""/>
+        <p:cNvGrpSpPr/>
+        <p:nvPr/>
+      </p:nvGrpSpPr>
+      <p:grpSpPr/>
+      <p:sp>
+        <p:nvSpPr>
+          <p:cNvPr id="2" name="TextBox 1"/>
+          <p:cNvSpPr txBox="1"/>
+          <p:nvPr/>
+        </p:nvSpPr>
+        <p:spPr>
+          <a:xfrm>
+            <a:off x="548640" y="411480"/>
+            <a:ext cx="10972800" cy="320040"/>
+          </a:xfrm>
+          <a:prstGeom prst="rect">
+            <a:avLst/>
+          </a:prstGeom>
+          <a:noFill/>
+        </p:spPr>
+        <p:txBody>
+          <a:bodyPr wrap="none" lIns="0" rIns="0" tIns="0" bIns="0" anchor="t">
+            <a:spAutoFit/>
+          </a:bodyPr>
+          <a:lstStyle/>
+          <a:p>
+            <a:pPr algn="l">
+              <a:lnSpc>
+                <a:spcPts val="2160"/>
+              </a:lnSpc>
+            </a:pPr>
+            <a:r>
+              <a:rPr sz="1800" b="0" i="0">
+                <a:solidFill>
+                  <a:srgbClr val="9FB4D1"/>
+                </a:solidFill>
+                <a:latin typeface="Arial"/>
+              </a:rPr>
+              <a:t>APPENDIX</a:t>
+            </a:r>
+          </a:p>
+        </p:txBody>
+      </p:sp>
+      <p:sp>
+        <p:nvSpPr>
+          <p:cNvPr id="3" name="TextBox 2"/>
+          <p:cNvSpPr txBox="1"/>
+          <p:nvPr/>
+        </p:nvSpPr>
+        <p:spPr>
+          <a:xfrm>
+            <a:off x="548640" y="777240"/>
+            <a:ext cx="11155680" cy="594360"/>
+          </a:xfrm>
+          <a:prstGeom prst="rect">
+            <a:avLst/>
+          </a:prstGeom>
+          <a:noFill/>
+        </p:spPr>
+        <p:txBody>
+          <a:bodyPr wrap="none" lIns="0" rIns="0" tIns="0" bIns="0" anchor="t">
+            <a:spAutoFit/>
+          </a:bodyPr>
+          <a:lstStyle/>
+          <a:p>
+            <a:pPr algn="l">
+              <a:lnSpc>
+                <a:spcPts val="4320"/>
+              </a:lnSpc>
+            </a:pPr>
+            <a:r>
+              <a:rPr sz="3600" b="1" i="0">
+                <a:solidFill>
+                  <a:srgbClr val="FAFAFA"/>
+                </a:solidFill>
+                <a:latin typeface="Arial"/>
+              </a:rPr>
+              <a:t>Both device scenarios at 12 qubits</a:t>
+            </a:r>
+          </a:p>
+        </p:txBody>
+      </p:sp>
+      <p:sp>
+        <p:nvSpPr>
+          <p:cNvPr id="4" name="Rounded Rectangle 3"/>
+          <p:cNvSpPr/>
+          <p:nvPr/>
+        </p:nvSpPr>
+        <p:spPr>
+          <a:xfrm>
+            <a:off x="548640" y="1572768"/>
+            <a:ext cx="11109960" cy="731520"/>
+          </a:xfrm>
+          <a:prstGeom prst="roundRect">
+            <a:avLst>
+              <a:gd name="adj" fmla="val 15000"/>
+            </a:avLst>
+          </a:prstGeom>
+          <a:solidFill>
+            <a:srgbClr val="1A242B"/>
+          </a:solidFill>
+          <a:ln>
+            <a:noFill/>
+          </a:ln>
+          <a:effectLst/>
+        </p:spPr>
+        <p:style>
+          <a:lnRef idx="1">
+            <a:schemeClr val="accent1"/>
+          </a:lnRef>
+          <a:fillRef idx="3">
+            <a:schemeClr val="accent1"/>
+          </a:fillRef>
+          <a:effectRef idx="2">
+            <a:schemeClr val="accent1"/>
+          </a:effectRef>
+          <a:fontRef idx="minor">
+            <a:schemeClr val="lt1"/>
+          </a:fontRef>
+        </p:style>
+        <p:txBody>
+          <a:bodyPr rtlCol="0" anchor="ctr"/>
+          <a:lstStyle/>
+          <a:p>
+            <a:pPr algn="ctr"/>
+          </a:p>
+        </p:txBody>
+      </p:sp>
+      <p:sp>
+        <p:nvSpPr>
+          <p:cNvPr id="5" name="TextBox 4"/>
+          <p:cNvSpPr txBox="1"/>
+          <p:nvPr/>
+        </p:nvSpPr>
+        <p:spPr>
+          <a:xfrm>
+            <a:off x="777240" y="1737360"/>
+            <a:ext cx="2011680" cy="320040"/>
+          </a:xfrm>
+          <a:prstGeom prst="rect">
+            <a:avLst/>
+          </a:prstGeom>
+          <a:noFill/>
+        </p:spPr>
+        <p:txBody>
+          <a:bodyPr wrap="none" lIns="0" rIns="0" tIns="0" bIns="0" anchor="t">
+            <a:spAutoFit/>
+          </a:bodyPr>
+          <a:lstStyle/>
+          <a:p>
+            <a:pPr algn="l">
+              <a:lnSpc>
+                <a:spcPts val="2160"/>
+              </a:lnSpc>
+            </a:pPr>
+            <a:r>
+              <a:rPr sz="1800" b="1" i="0">
+                <a:solidFill>
+                  <a:srgbClr val="9FB4D1"/>
+                </a:solidFill>
+                <a:latin typeface="Arial"/>
+              </a:rPr>
+              <a:t>Scenario</a:t>
+            </a:r>
+          </a:p>
+        </p:txBody>
+      </p:sp>
+      <p:sp>
+        <p:nvSpPr>
+          <p:cNvPr id="6" name="TextBox 5"/>
+          <p:cNvSpPr txBox="1"/>
+          <p:nvPr/>
+        </p:nvSpPr>
+        <p:spPr>
+          <a:xfrm>
+            <a:off x="2788920" y="1737360"/>
+            <a:ext cx="3291840" cy="320040"/>
+          </a:xfrm>
+          <a:prstGeom prst="rect">
+            <a:avLst/>
+          </a:prstGeom>
+          <a:noFill/>
+        </p:spPr>
+        <p:txBody>
+          <a:bodyPr wrap="none" lIns="0" rIns="0" tIns="0" bIns="0" anchor="t">
+            <a:spAutoFit/>
+          </a:bodyPr>
+          <a:lstStyle/>
+          <a:p>
+            <a:pPr algn="l">
+              <a:lnSpc>
+                <a:spcPts val="2160"/>
+              </a:lnSpc>
+            </a:pPr>
+            <a:r>
+              <a:rPr sz="1800" b="1" i="0">
+                <a:solidFill>
+                  <a:srgbClr val="9FB4D1"/>
+                </a:solidFill>
+                <a:latin typeface="Arial"/>
+              </a:rPr>
+              <a:t>Circuit (two-qubit gates)</a:t>
+            </a:r>
+          </a:p>
+        </p:txBody>
+      </p:sp>
+      <p:sp>
+        <p:nvSpPr>
+          <p:cNvPr id="7" name="TextBox 6"/>
+          <p:cNvSpPr txBox="1"/>
+          <p:nvPr/>
+        </p:nvSpPr>
+        <p:spPr>
+          <a:xfrm>
+            <a:off x="6080760" y="1737360"/>
+            <a:ext cx="1188720" cy="320040"/>
+          </a:xfrm>
+          <a:prstGeom prst="rect">
+            <a:avLst/>
+          </a:prstGeom>
+          <a:noFill/>
+        </p:spPr>
+        <p:txBody>
+          <a:bodyPr wrap="none" lIns="0" rIns="0" tIns="0" bIns="0" anchor="t">
+            <a:spAutoFit/>
+          </a:bodyPr>
+          <a:lstStyle/>
+          <a:p>
+            <a:pPr algn="l">
+              <a:lnSpc>
+                <a:spcPts val="2160"/>
+              </a:lnSpc>
+            </a:pPr>
+            <a:r>
+              <a:rPr sz="1800" b="1" i="0">
+                <a:solidFill>
+                  <a:srgbClr val="9FB4D1"/>
+                </a:solidFill>
+                <a:latin typeface="Arial"/>
+              </a:rPr>
+              <a:t>Random</a:t>
+            </a:r>
+          </a:p>
+        </p:txBody>
+      </p:sp>
+      <p:sp>
+        <p:nvSpPr>
+          <p:cNvPr id="8" name="TextBox 7"/>
+          <p:cNvSpPr txBox="1"/>
+          <p:nvPr/>
+        </p:nvSpPr>
+        <p:spPr>
+          <a:xfrm>
+            <a:off x="7269480" y="1737360"/>
+            <a:ext cx="2331720" cy="320040"/>
+          </a:xfrm>
+          <a:prstGeom prst="rect">
+            <a:avLst/>
+          </a:prstGeom>
+          <a:noFill/>
+        </p:spPr>
+        <p:txBody>
+          <a:bodyPr wrap="none" lIns="0" rIns="0" tIns="0" bIns="0" anchor="t">
+            <a:spAutoFit/>
+          </a:bodyPr>
+          <a:lstStyle/>
+          <a:p>
+            <a:pPr algn="l">
+              <a:lnSpc>
+                <a:spcPts val="2160"/>
+              </a:lnSpc>
+            </a:pPr>
+            <a:r>
+              <a:rPr sz="1800" b="1" i="0">
+                <a:solidFill>
+                  <a:srgbClr val="9FB4D1"/>
+                </a:solidFill>
+                <a:latin typeface="Arial"/>
+              </a:rPr>
+              <a:t>Noiseless</a:t>
+            </a:r>
+          </a:p>
+        </p:txBody>
+      </p:sp>
+      <p:sp>
+        <p:nvSpPr>
+          <p:cNvPr id="9" name="TextBox 8"/>
+          <p:cNvSpPr txBox="1"/>
+          <p:nvPr/>
+        </p:nvSpPr>
+        <p:spPr>
+          <a:xfrm>
+            <a:off x="9646920" y="1737360"/>
+            <a:ext cx="1965960" cy="320040"/>
+          </a:xfrm>
+          <a:prstGeom prst="rect">
+            <a:avLst/>
+          </a:prstGeom>
+          <a:noFill/>
+        </p:spPr>
+        <p:txBody>
+          <a:bodyPr wrap="none" lIns="0" rIns="0" tIns="0" bIns="0" anchor="t">
+            <a:spAutoFit/>
+          </a:bodyPr>
+          <a:lstStyle/>
+          <a:p>
+            <a:pPr algn="l">
+              <a:lnSpc>
+                <a:spcPts val="2160"/>
+              </a:lnSpc>
+            </a:pPr>
+            <a:r>
+              <a:rPr sz="1800" b="1" i="0">
+                <a:solidFill>
+                  <a:srgbClr val="9FB4D1"/>
+                </a:solidFill>
+                <a:latin typeface="Arial"/>
+              </a:rPr>
+              <a:t>IonQ noise model</a:t>
+            </a:r>
+          </a:p>
+        </p:txBody>
+      </p:sp>
+      <p:sp>
+        <p:nvSpPr>
+          <p:cNvPr id="10" name="Rounded Rectangle 9"/>
+          <p:cNvSpPr/>
+          <p:nvPr/>
+        </p:nvSpPr>
+        <p:spPr>
+          <a:xfrm>
+            <a:off x="548640" y="2441447"/>
+            <a:ext cx="11109960" cy="731520"/>
+          </a:xfrm>
+          <a:prstGeom prst="roundRect">
+            <a:avLst>
+              <a:gd name="adj" fmla="val 15000"/>
+            </a:avLst>
+          </a:prstGeom>
+          <a:solidFill>
+            <a:srgbClr val="1A242B"/>
+          </a:solidFill>
+          <a:ln>
+            <a:noFill/>
+          </a:ln>
+          <a:effectLst/>
+        </p:spPr>
+        <p:style>
+          <a:lnRef idx="1">
+            <a:schemeClr val="accent1"/>
+          </a:lnRef>
+          <a:fillRef idx="3">
+            <a:schemeClr val="accent1"/>
+          </a:fillRef>
+          <a:effectRef idx="2">
+            <a:schemeClr val="accent1"/>
+          </a:effectRef>
+          <a:fontRef idx="minor">
+            <a:schemeClr val="lt1"/>
+          </a:fontRef>
+        </p:style>
+        <p:txBody>
+          <a:bodyPr rtlCol="0" anchor="ctr"/>
+          <a:lstStyle/>
+          <a:p>
+            <a:pPr algn="ctr"/>
+          </a:p>
+        </p:txBody>
+      </p:sp>
+      <p:sp>
+        <p:nvSpPr>
+          <p:cNvPr id="11" name="TextBox 10"/>
+          <p:cNvSpPr txBox="1"/>
+          <p:nvPr/>
+        </p:nvSpPr>
+        <p:spPr>
+          <a:xfrm>
+            <a:off x="777240" y="2606039"/>
+            <a:ext cx="2011680" cy="320040"/>
+          </a:xfrm>
+          <a:prstGeom prst="rect">
+            <a:avLst/>
+          </a:prstGeom>
+          <a:noFill/>
+        </p:spPr>
+        <p:txBody>
+          <a:bodyPr wrap="none" lIns="0" rIns="0" tIns="0" bIns="0" anchor="t">
+            <a:spAutoFit/>
+          </a:bodyPr>
+          <a:lstStyle/>
+          <a:p>
+            <a:pPr algn="l">
+              <a:lnSpc>
+                <a:spcPts val="2160"/>
+              </a:lnSpc>
+            </a:pPr>
+            <a:r>
+              <a:rPr sz="1800" b="0" i="0">
+                <a:solidFill>
+                  <a:srgbClr val="FAFAFA"/>
+                </a:solidFill>
+                <a:latin typeface="Arial"/>
+              </a:rPr>
+              <a:t>2 equal devices</a:t>
+            </a:r>
+          </a:p>
+        </p:txBody>
+      </p:sp>
+      <p:sp>
+        <p:nvSpPr>
+          <p:cNvPr id="12" name="TextBox 11"/>
+          <p:cNvSpPr txBox="1"/>
+          <p:nvPr/>
+        </p:nvSpPr>
+        <p:spPr>
+          <a:xfrm>
+            <a:off x="2788920" y="2606039"/>
+            <a:ext cx="3291840" cy="320040"/>
+          </a:xfrm>
+          <a:prstGeom prst="rect">
+            <a:avLst/>
+          </a:prstGeom>
+          <a:noFill/>
+        </p:spPr>
+        <p:txBody>
+          <a:bodyPr wrap="none" lIns="0" rIns="0" tIns="0" bIns="0" anchor="t">
+            <a:spAutoFit/>
+          </a:bodyPr>
+          <a:lstStyle/>
+          <a:p>
+            <a:pPr algn="l">
+              <a:lnSpc>
+                <a:spcPts val="2160"/>
+              </a:lnSpc>
+            </a:pPr>
+            <a:r>
+              <a:rPr sz="1800" b="0" i="0">
+                <a:solidFill>
+                  <a:srgbClr val="FAFAFA"/>
+                </a:solidFill>
+                <a:latin typeface="Arial"/>
+              </a:rPr>
+              <a:t>varQITE ZY (66)</a:t>
+            </a:r>
+          </a:p>
+        </p:txBody>
+      </p:sp>
+      <p:sp>
+        <p:nvSpPr>
+          <p:cNvPr id="13" name="TextBox 12"/>
+          <p:cNvSpPr txBox="1"/>
+          <p:nvPr/>
+        </p:nvSpPr>
+        <p:spPr>
+          <a:xfrm>
+            <a:off x="6080760" y="2606039"/>
+            <a:ext cx="1188720" cy="320040"/>
+          </a:xfrm>
+          <a:prstGeom prst="rect">
+            <a:avLst/>
+          </a:prstGeom>
+          <a:noFill/>
+        </p:spPr>
+        <p:txBody>
+          <a:bodyPr wrap="none" lIns="0" rIns="0" tIns="0" bIns="0" anchor="t">
+            <a:spAutoFit/>
+          </a:bodyPr>
+          <a:lstStyle/>
+          <a:p>
+            <a:pPr algn="l">
+              <a:lnSpc>
+                <a:spcPts val="2160"/>
+              </a:lnSpc>
+            </a:pPr>
+            <a:r>
+              <a:rPr sz="1800" b="0" i="0">
+                <a:solidFill>
+                  <a:srgbClr val="FAFAFA"/>
+                </a:solidFill>
+                <a:latin typeface="Arial"/>
+              </a:rPr>
+              <a:t>0.049 %</a:t>
+            </a:r>
+          </a:p>
+        </p:txBody>
+      </p:sp>
+      <p:sp>
+        <p:nvSpPr>
+          <p:cNvPr id="14" name="TextBox 13"/>
+          <p:cNvSpPr txBox="1"/>
+          <p:nvPr/>
+        </p:nvSpPr>
+        <p:spPr>
+          <a:xfrm>
+            <a:off x="7269480" y="2606039"/>
+            <a:ext cx="2331720" cy="320040"/>
+          </a:xfrm>
+          <a:prstGeom prst="rect">
+            <a:avLst/>
+          </a:prstGeom>
+          <a:noFill/>
+        </p:spPr>
+        <p:txBody>
+          <a:bodyPr wrap="none" lIns="0" rIns="0" tIns="0" bIns="0" anchor="t">
+            <a:spAutoFit/>
+          </a:bodyPr>
+          <a:lstStyle/>
+          <a:p>
+            <a:pPr algn="l">
+              <a:lnSpc>
+                <a:spcPts val="2160"/>
+              </a:lnSpc>
+            </a:pPr>
+            <a:r>
+              <a:rPr sz="1800" b="0" i="0">
+                <a:solidFill>
+                  <a:srgbClr val="FAFAFA"/>
+                </a:solidFill>
+                <a:latin typeface="Arial"/>
+              </a:rPr>
+              <a:t>75.0 %</a:t>
+            </a:r>
+          </a:p>
+        </p:txBody>
+      </p:sp>
+      <p:sp>
+        <p:nvSpPr>
+          <p:cNvPr id="15" name="TextBox 14"/>
+          <p:cNvSpPr txBox="1"/>
+          <p:nvPr/>
+        </p:nvSpPr>
+        <p:spPr>
+          <a:xfrm>
+            <a:off x="9646920" y="2606039"/>
+            <a:ext cx="1965960" cy="320040"/>
+          </a:xfrm>
+          <a:prstGeom prst="rect">
+            <a:avLst/>
+          </a:prstGeom>
+          <a:noFill/>
+        </p:spPr>
+        <p:txBody>
+          <a:bodyPr wrap="none" lIns="0" rIns="0" tIns="0" bIns="0" anchor="t">
+            <a:spAutoFit/>
+          </a:bodyPr>
+          <a:lstStyle/>
+          <a:p>
+            <a:pPr algn="l">
+              <a:lnSpc>
+                <a:spcPts val="2160"/>
+              </a:lnSpc>
+            </a:pPr>
+            <a:r>
+              <a:rPr sz="1800" b="1" i="0">
+                <a:solidFill>
+                  <a:srgbClr val="F89B33"/>
+                </a:solidFill>
+                <a:latin typeface="Arial"/>
+              </a:rPr>
+              <a:t>27.8 %</a:t>
+            </a:r>
+          </a:p>
+        </p:txBody>
+      </p:sp>
+      <p:sp>
+        <p:nvSpPr>
+          <p:cNvPr id="16" name="Rounded Rectangle 15"/>
+          <p:cNvSpPr/>
+          <p:nvPr/>
+        </p:nvSpPr>
+        <p:spPr>
+          <a:xfrm>
+            <a:off x="548640" y="3310127"/>
+            <a:ext cx="11109960" cy="731520"/>
+          </a:xfrm>
+          <a:prstGeom prst="roundRect">
+            <a:avLst>
+              <a:gd name="adj" fmla="val 15000"/>
+            </a:avLst>
+          </a:prstGeom>
+          <a:solidFill>
+            <a:srgbClr val="1A242B"/>
+          </a:solidFill>
+          <a:ln>
+            <a:noFill/>
+          </a:ln>
+          <a:effectLst/>
+        </p:spPr>
+        <p:style>
+          <a:lnRef idx="1">
+            <a:schemeClr val="accent1"/>
+          </a:lnRef>
+          <a:fillRef idx="3">
+            <a:schemeClr val="accent1"/>
+          </a:fillRef>
+          <a:effectRef idx="2">
+            <a:schemeClr val="accent1"/>
+          </a:effectRef>
+          <a:fontRef idx="minor">
+            <a:schemeClr val="lt1"/>
+          </a:fontRef>
+        </p:style>
+        <p:txBody>
+          <a:bodyPr rtlCol="0" anchor="ctr"/>
+          <a:lstStyle/>
+          <a:p>
+            <a:pPr algn="ctr"/>
+          </a:p>
+        </p:txBody>
+      </p:sp>
+      <p:sp>
+        <p:nvSpPr>
+          <p:cNvPr id="17" name="TextBox 16"/>
+          <p:cNvSpPr txBox="1"/>
+          <p:nvPr/>
+        </p:nvSpPr>
+        <p:spPr>
+          <a:xfrm>
+            <a:off x="777240" y="3474720"/>
+            <a:ext cx="2011680" cy="320040"/>
+          </a:xfrm>
+          <a:prstGeom prst="rect">
+            <a:avLst/>
+          </a:prstGeom>
+          <a:noFill/>
+        </p:spPr>
+        <p:txBody>
+          <a:bodyPr wrap="none" lIns="0" rIns="0" tIns="0" bIns="0" anchor="t">
+            <a:spAutoFit/>
+          </a:bodyPr>
+          <a:lstStyle/>
+          <a:p>
+            <a:pPr algn="l">
+              <a:lnSpc>
+                <a:spcPts val="2160"/>
+              </a:lnSpc>
+            </a:pPr>
+            <a:r>
+              <a:rPr sz="1800" b="0" i="0">
+                <a:solidFill>
+                  <a:srgbClr val="FAFAFA"/>
+                </a:solidFill>
+                <a:latin typeface="Arial"/>
+              </a:rPr>
+              <a:t>CPU + GPU</a:t>
+            </a:r>
+          </a:p>
+        </p:txBody>
+      </p:sp>
+      <p:sp>
+        <p:nvSpPr>
+          <p:cNvPr id="18" name="TextBox 17"/>
+          <p:cNvSpPr txBox="1"/>
+          <p:nvPr/>
+        </p:nvSpPr>
+        <p:spPr>
+          <a:xfrm>
+            <a:off x="2788920" y="3474720"/>
+            <a:ext cx="3291840" cy="320040"/>
+          </a:xfrm>
+          <a:prstGeom prst="rect">
+            <a:avLst/>
+          </a:prstGeom>
+          <a:noFill/>
+        </p:spPr>
+        <p:txBody>
+          <a:bodyPr wrap="none" lIns="0" rIns="0" tIns="0" bIns="0" anchor="t">
+            <a:spAutoFit/>
+          </a:bodyPr>
+          <a:lstStyle/>
+          <a:p>
+            <a:pPr algn="l">
+              <a:lnSpc>
+                <a:spcPts val="2160"/>
+              </a:lnSpc>
+            </a:pPr>
+            <a:r>
+              <a:rPr sz="1800" b="0" i="0">
+                <a:solidFill>
+                  <a:srgbClr val="FAFAFA"/>
+                </a:solidFill>
+                <a:latin typeface="Arial"/>
+              </a:rPr>
+              <a:t>CVaR-QAOA, p = 2 (132)</a:t>
+            </a:r>
+          </a:p>
+        </p:txBody>
+      </p:sp>
+      <p:sp>
+        <p:nvSpPr>
+          <p:cNvPr id="19" name="TextBox 18"/>
+          <p:cNvSpPr txBox="1"/>
+          <p:nvPr/>
+        </p:nvSpPr>
+        <p:spPr>
+          <a:xfrm>
+            <a:off x="6080760" y="3474720"/>
+            <a:ext cx="1188720" cy="320040"/>
+          </a:xfrm>
+          <a:prstGeom prst="rect">
+            <a:avLst/>
+          </a:prstGeom>
+          <a:noFill/>
+        </p:spPr>
+        <p:txBody>
+          <a:bodyPr wrap="none" lIns="0" rIns="0" tIns="0" bIns="0" anchor="t">
+            <a:spAutoFit/>
+          </a:bodyPr>
+          <a:lstStyle/>
+          <a:p>
+            <a:pPr algn="l">
+              <a:lnSpc>
+                <a:spcPts val="2160"/>
+              </a:lnSpc>
+            </a:pPr>
+            <a:r>
+              <a:rPr sz="1800" b="0" i="0">
+                <a:solidFill>
+                  <a:srgbClr val="FAFAFA"/>
+                </a:solidFill>
+                <a:latin typeface="Arial"/>
+              </a:rPr>
+              <a:t>0.024 %</a:t>
+            </a:r>
+          </a:p>
+        </p:txBody>
+      </p:sp>
+      <p:sp>
+        <p:nvSpPr>
+          <p:cNvPr id="20" name="TextBox 19"/>
+          <p:cNvSpPr txBox="1"/>
+          <p:nvPr/>
+        </p:nvSpPr>
+        <p:spPr>
+          <a:xfrm>
+            <a:off x="7269480" y="3474720"/>
+            <a:ext cx="2331720" cy="320040"/>
+          </a:xfrm>
+          <a:prstGeom prst="rect">
+            <a:avLst/>
+          </a:prstGeom>
+          <a:noFill/>
+        </p:spPr>
+        <p:txBody>
+          <a:bodyPr wrap="none" lIns="0" rIns="0" tIns="0" bIns="0" anchor="t">
+            <a:spAutoFit/>
+          </a:bodyPr>
+          <a:lstStyle/>
+          <a:p>
+            <a:pPr algn="l">
+              <a:lnSpc>
+                <a:spcPts val="2160"/>
+              </a:lnSpc>
+            </a:pPr>
+            <a:r>
+              <a:rPr sz="1800" b="0" i="0">
+                <a:solidFill>
+                  <a:srgbClr val="FAFAFA"/>
+                </a:solidFill>
+                <a:latin typeface="Arial"/>
+              </a:rPr>
+              <a:t>0.58 %</a:t>
+            </a:r>
+          </a:p>
+        </p:txBody>
+      </p:sp>
+      <p:sp>
+        <p:nvSpPr>
+          <p:cNvPr id="21" name="TextBox 20"/>
+          <p:cNvSpPr txBox="1"/>
+          <p:nvPr/>
+        </p:nvSpPr>
+        <p:spPr>
+          <a:xfrm>
+            <a:off x="9646920" y="3474720"/>
+            <a:ext cx="1965960" cy="320040"/>
+          </a:xfrm>
+          <a:prstGeom prst="rect">
+            <a:avLst/>
+          </a:prstGeom>
+          <a:noFill/>
+        </p:spPr>
+        <p:txBody>
+          <a:bodyPr wrap="none" lIns="0" rIns="0" tIns="0" bIns="0" anchor="t">
+            <a:spAutoFit/>
+          </a:bodyPr>
+          <a:lstStyle/>
+          <a:p>
+            <a:pPr algn="l">
+              <a:lnSpc>
+                <a:spcPts val="2160"/>
+              </a:lnSpc>
+            </a:pPr>
+            <a:r>
+              <a:rPr sz="1800" b="0" i="0">
+                <a:solidFill>
+                  <a:srgbClr val="FAFAFA"/>
+                </a:solidFill>
+                <a:latin typeface="Arial"/>
+              </a:rPr>
+              <a:t>[pending]</a:t>
+            </a:r>
+          </a:p>
+        </p:txBody>
+      </p:sp>
+      <p:sp>
+        <p:nvSpPr>
+          <p:cNvPr id="22" name="Rounded Rectangle 21"/>
+          <p:cNvSpPr/>
+          <p:nvPr/>
+        </p:nvSpPr>
+        <p:spPr>
+          <a:xfrm>
+            <a:off x="548640" y="4178808"/>
+            <a:ext cx="11109960" cy="731520"/>
+          </a:xfrm>
+          <a:prstGeom prst="roundRect">
+            <a:avLst>
+              <a:gd name="adj" fmla="val 15000"/>
+            </a:avLst>
+          </a:prstGeom>
+          <a:solidFill>
+            <a:srgbClr val="1A242B"/>
+          </a:solidFill>
+          <a:ln>
+            <a:noFill/>
+          </a:ln>
+          <a:effectLst/>
+        </p:spPr>
+        <p:style>
+          <a:lnRef idx="1">
+            <a:schemeClr val="accent1"/>
+          </a:lnRef>
+          <a:fillRef idx="3">
+            <a:schemeClr val="accent1"/>
+          </a:fillRef>
+          <a:effectRef idx="2">
+            <a:schemeClr val="accent1"/>
+          </a:effectRef>
+          <a:fontRef idx="minor">
+            <a:schemeClr val="lt1"/>
+          </a:fontRef>
+        </p:style>
+        <p:txBody>
+          <a:bodyPr rtlCol="0" anchor="ctr"/>
+          <a:lstStyle/>
+          <a:p>
+            <a:pPr algn="ctr"/>
+          </a:p>
+        </p:txBody>
+      </p:sp>
+      <p:sp>
+        <p:nvSpPr>
+          <p:cNvPr id="23" name="TextBox 22"/>
+          <p:cNvSpPr txBox="1"/>
+          <p:nvPr/>
+        </p:nvSpPr>
+        <p:spPr>
+          <a:xfrm>
+            <a:off x="777240" y="4343400"/>
+            <a:ext cx="2011680" cy="320040"/>
+          </a:xfrm>
+          <a:prstGeom prst="rect">
+            <a:avLst/>
+          </a:prstGeom>
+          <a:noFill/>
+        </p:spPr>
+        <p:txBody>
+          <a:bodyPr wrap="none" lIns="0" rIns="0" tIns="0" bIns="0" anchor="t">
+            <a:spAutoFit/>
+          </a:bodyPr>
+          <a:lstStyle/>
+          <a:p>
+            <a:pPr algn="l">
+              <a:lnSpc>
+                <a:spcPts val="2160"/>
+              </a:lnSpc>
+            </a:pPr>
+            <a:r>
+              <a:rPr sz="1800" b="0" i="0">
+                <a:solidFill>
+                  <a:srgbClr val="FAFAFA"/>
+                </a:solidFill>
+                <a:latin typeface="Arial"/>
+              </a:rPr>
+              <a:t>CPU + GPU</a:t>
+            </a:r>
+          </a:p>
+        </p:txBody>
+      </p:sp>
+      <p:sp>
+        <p:nvSpPr>
+          <p:cNvPr id="24" name="TextBox 23"/>
+          <p:cNvSpPr txBox="1"/>
+          <p:nvPr/>
+        </p:nvSpPr>
+        <p:spPr>
+          <a:xfrm>
+            <a:off x="2788920" y="4343400"/>
+            <a:ext cx="3291840" cy="320040"/>
+          </a:xfrm>
+          <a:prstGeom prst="rect">
+            <a:avLst/>
+          </a:prstGeom>
+          <a:noFill/>
+        </p:spPr>
+        <p:txBody>
+          <a:bodyPr wrap="none" lIns="0" rIns="0" tIns="0" bIns="0" anchor="t">
+            <a:spAutoFit/>
+          </a:bodyPr>
+          <a:lstStyle/>
+          <a:p>
+            <a:pPr algn="l">
+              <a:lnSpc>
+                <a:spcPts val="2160"/>
+              </a:lnSpc>
+            </a:pPr>
+            <a:r>
+              <a:rPr sz="1800" b="0" i="0">
+                <a:solidFill>
+                  <a:srgbClr val="FAFAFA"/>
+                </a:solidFill>
+                <a:latin typeface="Arial"/>
+              </a:rPr>
+              <a:t>varQITE ZY (66)</a:t>
+            </a:r>
+          </a:p>
+        </p:txBody>
+      </p:sp>
+      <p:sp>
+        <p:nvSpPr>
+          <p:cNvPr id="25" name="TextBox 24"/>
+          <p:cNvSpPr txBox="1"/>
+          <p:nvPr/>
+        </p:nvSpPr>
+        <p:spPr>
+          <a:xfrm>
+            <a:off x="6080760" y="4343400"/>
+            <a:ext cx="1188720" cy="320040"/>
+          </a:xfrm>
+          <a:prstGeom prst="rect">
+            <a:avLst/>
+          </a:prstGeom>
+          <a:noFill/>
+        </p:spPr>
+        <p:txBody>
+          <a:bodyPr wrap="none" lIns="0" rIns="0" tIns="0" bIns="0" anchor="t">
+            <a:spAutoFit/>
+          </a:bodyPr>
+          <a:lstStyle/>
+          <a:p>
+            <a:pPr algn="l">
+              <a:lnSpc>
+                <a:spcPts val="2160"/>
+              </a:lnSpc>
+            </a:pPr>
+            <a:r>
+              <a:rPr sz="1800" b="0" i="0">
+                <a:solidFill>
+                  <a:srgbClr val="FAFAFA"/>
+                </a:solidFill>
+                <a:latin typeface="Arial"/>
+              </a:rPr>
+              <a:t>0.024 %</a:t>
+            </a:r>
+          </a:p>
+        </p:txBody>
+      </p:sp>
+      <p:sp>
+        <p:nvSpPr>
+          <p:cNvPr id="26" name="TextBox 25"/>
+          <p:cNvSpPr txBox="1"/>
+          <p:nvPr/>
+        </p:nvSpPr>
+        <p:spPr>
+          <a:xfrm>
+            <a:off x="7269480" y="4343400"/>
+            <a:ext cx="2331720" cy="320040"/>
+          </a:xfrm>
+          <a:prstGeom prst="rect">
+            <a:avLst/>
+          </a:prstGeom>
+          <a:noFill/>
+        </p:spPr>
+        <p:txBody>
+          <a:bodyPr wrap="none" lIns="0" rIns="0" tIns="0" bIns="0" anchor="t">
+            <a:spAutoFit/>
+          </a:bodyPr>
+          <a:lstStyle/>
+          <a:p>
+            <a:pPr algn="l">
+              <a:lnSpc>
+                <a:spcPts val="2160"/>
+              </a:lnSpc>
+            </a:pPr>
+            <a:r>
+              <a:rPr sz="1800" b="0" i="0">
+                <a:solidFill>
+                  <a:srgbClr val="FAFAFA"/>
+                </a:solidFill>
+                <a:latin typeface="Arial"/>
+              </a:rPr>
+              <a:t>0.00 % (cap proved)</a:t>
+            </a:r>
+          </a:p>
+        </p:txBody>
+      </p:sp>
+      <p:sp>
+        <p:nvSpPr>
+          <p:cNvPr id="27" name="TextBox 26"/>
+          <p:cNvSpPr txBox="1"/>
+          <p:nvPr/>
+        </p:nvSpPr>
+        <p:spPr>
+          <a:xfrm>
+            <a:off x="9646920" y="4343400"/>
+            <a:ext cx="1965960" cy="320040"/>
+          </a:xfrm>
+          <a:prstGeom prst="rect">
+            <a:avLst/>
+          </a:prstGeom>
+          <a:noFill/>
+        </p:spPr>
+        <p:txBody>
+          <a:bodyPr wrap="none" lIns="0" rIns="0" tIns="0" bIns="0" anchor="t">
+            <a:spAutoFit/>
+          </a:bodyPr>
+          <a:lstStyle/>
+          <a:p>
+            <a:pPr algn="l">
+              <a:lnSpc>
+                <a:spcPts val="2160"/>
+              </a:lnSpc>
+            </a:pPr>
+            <a:r>
+              <a:rPr sz="1800" b="0" i="0">
+                <a:solidFill>
+                  <a:srgbClr val="FAFAFA"/>
+                </a:solidFill>
+                <a:latin typeface="Arial"/>
+              </a:rPr>
+              <a:t>[pending]</a:t>
+            </a:r>
+          </a:p>
+        </p:txBody>
+      </p:sp>
+      <p:sp>
+        <p:nvSpPr>
+          <p:cNvPr id="28" name="TextBox 27"/>
+          <p:cNvSpPr txBox="1"/>
+          <p:nvPr/>
+        </p:nvSpPr>
+        <p:spPr>
+          <a:xfrm>
+            <a:off x="548640" y="5349240"/>
+            <a:ext cx="10972800" cy="320040"/>
+          </a:xfrm>
+          <a:prstGeom prst="rect">
+            <a:avLst/>
+          </a:prstGeom>
+          <a:noFill/>
+        </p:spPr>
+        <p:txBody>
+          <a:bodyPr wrap="none" lIns="0" rIns="0" tIns="0" bIns="0" anchor="t">
+            <a:spAutoFit/>
+          </a:bodyPr>
+          <a:lstStyle/>
+          <a:p>
+            <a:pPr algn="l">
+              <a:lnSpc>
+                <a:spcPts val="2160"/>
+              </a:lnSpc>
+            </a:pPr>
+            <a:r>
+              <a:rPr sz="1800" b="0" i="0">
+                <a:solidFill>
+                  <a:srgbClr val="9AA3AA"/>
+                </a:solidFill>
+                <a:latin typeface="Arial"/>
+              </a:rPr>
+              <a:t>Share of shots that are the exact best split. The noisy runs for CPU + GPU are still to be made.</a:t>
+            </a:r>
+          </a:p>
+        </p:txBody>
+      </p:sp>
+      <p:sp>
+        <p:nvSpPr>
+          <p:cNvPr id="29" name="TextBox 28"/>
+          <p:cNvSpPr txBox="1"/>
+          <p:nvPr/>
+        </p:nvSpPr>
+        <p:spPr>
+          <a:xfrm>
+            <a:off x="548640" y="5806440"/>
+            <a:ext cx="10972800" cy="259080"/>
+          </a:xfrm>
+          <a:prstGeom prst="rect">
+            <a:avLst/>
+          </a:prstGeom>
+          <a:noFill/>
+        </p:spPr>
+        <p:txBody>
+          <a:bodyPr wrap="none" lIns="0" rIns="0" tIns="0" bIns="0" anchor="t">
+            <a:spAutoFit/>
+          </a:bodyPr>
+          <a:lstStyle/>
+          <a:p>
+            <a:pPr algn="l">
+              <a:lnSpc>
+                <a:spcPts val="1680"/>
+              </a:lnSpc>
+            </a:pPr>
+            <a:r>
+              <a:rPr sz="1400" b="0" i="1">
+                <a:solidFill>
+                  <a:srgbClr val="9AA3AA"/>
+                </a:solidFill>
+                <a:latin typeface="Arial"/>
+              </a:rPr>
+              <a:t>random, noiseless: noiseless simulation; last column: IonQ Forte 1 noise model (Qollab), 11 Oct 2026</a:t>
+            </a:r>
+          </a:p>
+        </p:txBody>
+      </p:sp>
+      <p:sp>
+        <p:nvSpPr>
+          <p:cNvPr id="30" name="TextBox 29"/>
+          <p:cNvSpPr txBox="1"/>
+          <p:nvPr/>
+        </p:nvSpPr>
+        <p:spPr>
+          <a:xfrm>
+            <a:off x="548640" y="6428232"/>
+            <a:ext cx="7315200" cy="228600"/>
+          </a:xfrm>
+          <a:prstGeom prst="rect">
+            <a:avLst/>
+          </a:prstGeom>
+          <a:noFill/>
+        </p:spPr>
+        <p:txBody>
+          <a:bodyPr wrap="none" lIns="0" rIns="0" tIns="0" bIns="0" anchor="t">
+            <a:spAutoFit/>
+          </a:bodyPr>
+          <a:lstStyle/>
+          <a:p>
+            <a:pPr algn="l">
+              <a:lnSpc>
+                <a:spcPts val="1439"/>
+              </a:lnSpc>
+            </a:pPr>
+            <a:r>
+              <a:rPr sz="1200" b="0" i="0">
+                <a:solidFill>
+                  <a:srgbClr val="9AA3AA"/>
+                </a:solidFill>
+                <a:latin typeface="Arial"/>
+              </a:rPr>
+              <a:t>ZollerQu - Qollab x IonQ Hackathon 2026</a:t>
+            </a:r>
+          </a:p>
+        </p:txBody>
+      </p:sp>
+      <p:sp>
+        <p:nvSpPr>
+          <p:cNvPr id="31" name="TextBox 30"/>
+          <p:cNvSpPr txBox="1"/>
+          <p:nvPr/>
+        </p:nvSpPr>
+        <p:spPr>
+          <a:xfrm>
+            <a:off x="10698480" y="6428232"/>
+            <a:ext cx="941832" cy="228600"/>
+          </a:xfrm>
+          <a:prstGeom prst="rect">
+            <a:avLst/>
+          </a:prstGeom>
+          <a:noFill/>
+        </p:spPr>
+        <p:txBody>
+          <a:bodyPr wrap="none" lIns="0" rIns="0" tIns="0" bIns="0" anchor="t">
+            <a:spAutoFit/>
+          </a:bodyPr>
+          <a:lstStyle/>
+          <a:p>
+            <a:pPr algn="r">
+              <a:lnSpc>
+                <a:spcPts val="1439"/>
+              </a:lnSpc>
+            </a:pPr>
+            <a:r>
+              <a:rPr sz="1200" b="0" i="0">
+                <a:solidFill>
+                  <a:srgbClr val="9AA3AA"/>
+                </a:solidFill>
+                <a:latin typeface="Arial"/>
+              </a:rPr>
+              <a:t>11</a:t>
+            </a:r>
+          </a:p>
+        </p:txBody>
+      </p:sp>
+    </p:spTree>
+  </p:cSld>
+  <p:clrMapOvr>
+    <a:masterClrMapping/>
+  </p:clrMapOvr>
+</p:sld>
+</file>
+
 <file path=ppt/slides/slide2.xml><?xml version="1.0" encoding="utf-8"?>
 <p:sld xmlns:a="http://schemas.openxmlformats.org/drawingml/2006/main" xmlns:p="http://schemas.openxmlformats.org/presentationml/2006/main" xmlns:r="http://schemas.openxmlformats.org/officeDocument/2006/relationships">
   <p:cSld>
@@ -6084,7 +8009,7 @@
                 </a:solidFill>
                 <a:latin typeface="Arial"/>
               </a:rPr>
-              <a:t>QUANTUM METHOD</a:t>
+              <a:t>BENCHMARK</a:t>
             </a:r>
           </a:p>
         </p:txBody>
@@ -6123,14 +8048,14 @@
                 </a:solidFill>
                 <a:latin typeface="Arial"/>
               </a:rPr>
-              <a:t>Fixed circuits, trained offline</a:t>
+              <a:t>9 mesh objects, one method</a:t>
             </a:r>
           </a:p>
         </p:txBody>
       </p:sp>
       <p:pic>
         <p:nvPicPr>
-          <p:cNvPr id="4" name="Picture 3" descr="Circuit sketch with four of the twelve qubit lines: an H gate on every qubit, a cost layer with one two-qubit rzz gate per pair of regions, an rx mixer gate on every qubit, then measurement. The cost layer and the mixer are repeated p times."/>
+          <p:cNvPr id="4" name="Picture 3" descr="Nine small drawings of triangle meshes in a 3 by 3 grid: a rectangle, L-shaped plates and a plate with a round hole. White stars mark heat sources, shaded blocks heavy material, dotted blocks strongly coupled zones, a circle a priority zone. Each drawing is labelled with its case name and triangle count (1,670 to 2,166)."/>
           <p:cNvPicPr>
             <a:picLocks noChangeAspect="1"/>
           </p:cNvPicPr>
@@ -6144,8 +8069,8 @@
         </p:blipFill>
         <p:spPr>
           <a:xfrm>
-            <a:off x="411480" y="1554480"/>
-            <a:ext cx="6400800" cy="3931920"/>
+            <a:off x="503335" y="1417320"/>
+            <a:ext cx="4982648" cy="4443984"/>
           </a:xfrm>
           <a:prstGeom prst="rect">
             <a:avLst/>
@@ -6160,8 +8085,8 @@
         </p:nvSpPr>
         <p:spPr>
           <a:xfrm>
-            <a:off x="7223760" y="1691640"/>
-            <a:ext cx="2011680" cy="1051560"/>
+            <a:off x="6035040" y="1554480"/>
+            <a:ext cx="1828800" cy="1051560"/>
           </a:xfrm>
           <a:prstGeom prst="rect">
             <a:avLst/>
@@ -6186,7 +8111,7 @@
                 </a:solidFill>
                 <a:latin typeface="Arial"/>
               </a:rPr>
-              <a:t>104</a:t>
+              <a:t>9</a:t>
             </a:r>
           </a:p>
         </p:txBody>
@@ -6199,8 +8124,8 @@
         </p:nvSpPr>
         <p:spPr>
           <a:xfrm>
-            <a:off x="9144000" y="1874519"/>
-            <a:ext cx="2651760" cy="655320"/>
+            <a:off x="7498079" y="1737360"/>
+            <a:ext cx="4206240" cy="655320"/>
           </a:xfrm>
           <a:prstGeom prst="rect">
             <a:avLst/>
@@ -6225,7 +8150,7 @@
                 </a:solidFill>
                 <a:latin typeface="Arial"/>
               </a:rPr>
-              <a:t>circuits compared</a:t>
+              <a:t>objects, built from 6 different</a:t>
             </a:r>
           </a:p>
           <a:p>
@@ -6241,7 +8166,7 @@
                 </a:solidFill>
                 <a:latin typeface="Arial"/>
               </a:rPr>
-              <a:t>at 12 qubits</a:t>
+              <a:t>meshes (1,670 to 2,166 triangles)</a:t>
             </a:r>
           </a:p>
         </p:txBody>
@@ -6254,166 +8179,198 @@
         </p:nvSpPr>
         <p:spPr>
           <a:xfrm>
-            <a:off x="7223760" y="3063240"/>
-            <a:ext cx="4572000" cy="594360"/>
-          </a:xfrm>
-          <a:prstGeom prst="rect">
-            <a:avLst/>
-          </a:prstGeom>
-          <a:noFill/>
-        </p:spPr>
-        <p:txBody>
-          <a:bodyPr wrap="none" lIns="0" rIns="0" tIns="0" bIns="0" anchor="t">
-            <a:spAutoFit/>
-          </a:bodyPr>
-          <a:lstStyle/>
-          <a:p>
-            <a:pPr algn="l">
-              <a:lnSpc>
-                <a:spcPts val="2160"/>
-              </a:lnSpc>
-            </a:pPr>
-            <a:r>
-              <a:rPr sz="1800" b="0" i="0">
+            <a:off x="6035040" y="2926080"/>
+            <a:ext cx="5669280" cy="655320"/>
+          </a:xfrm>
+          <a:prstGeom prst="rect">
+            <a:avLst/>
+          </a:prstGeom>
+          <a:noFill/>
+        </p:spPr>
+        <p:txBody>
+          <a:bodyPr wrap="none" lIns="0" rIns="0" tIns="0" bIns="0" anchor="t">
+            <a:spAutoFit/>
+          </a:bodyPr>
+          <a:lstStyle/>
+          <a:p>
+            <a:pPr algn="l">
+              <a:lnSpc>
+                <a:spcPts val="2400"/>
+              </a:lnSpc>
+            </a:pPr>
+            <a:r>
+              <a:rPr sz="2000" b="0" i="0">
+                <a:solidFill>
+                  <a:srgbClr val="FAFAFA"/>
+                </a:solidFill>
+                <a:latin typeface="Arial"/>
+              </a:rPr>
+              <a:t>Shapes: a plate, L-shaped plates and a plate</a:t>
+            </a:r>
+          </a:p>
+          <a:p>
+            <a:pPr algn="l">
+              <a:lnSpc>
+                <a:spcPts val="2400"/>
+              </a:lnSpc>
+            </a:pPr>
+            <a:r>
+              <a:rPr sz="2000" b="0" i="0">
+                <a:solidFill>
+                  <a:srgbClr val="FAFAFA"/>
+                </a:solidFill>
+                <a:latin typeface="Arial"/>
+              </a:rPr>
+              <a:t>with a hole</a:t>
+            </a:r>
+          </a:p>
+        </p:txBody>
+      </p:sp>
+      <p:sp>
+        <p:nvSpPr>
+          <p:cNvPr id="8" name="TextBox 7"/>
+          <p:cNvSpPr txBox="1"/>
+          <p:nvPr/>
+        </p:nvSpPr>
+        <p:spPr>
+          <a:xfrm>
+            <a:off x="6035040" y="3794760"/>
+            <a:ext cx="5669280" cy="655320"/>
+          </a:xfrm>
+          <a:prstGeom prst="rect">
+            <a:avLst/>
+          </a:prstGeom>
+          <a:noFill/>
+        </p:spPr>
+        <p:txBody>
+          <a:bodyPr wrap="none" lIns="0" rIns="0" tIns="0" bIns="0" anchor="t">
+            <a:spAutoFit/>
+          </a:bodyPr>
+          <a:lstStyle/>
+          <a:p>
+            <a:pPr algn="l">
+              <a:lnSpc>
+                <a:spcPts val="2400"/>
+              </a:lnSpc>
+            </a:pPr>
+            <a:r>
+              <a:rPr sz="2000" b="0" i="0">
+                <a:solidFill>
+                  <a:srgbClr val="FAFAFA"/>
+                </a:solidFill>
+                <a:latin typeface="Arial"/>
+              </a:rPr>
+              <a:t>What changes the work: heat sources, heavy</a:t>
+            </a:r>
+          </a:p>
+          <a:p>
+            <a:pPr algn="l">
+              <a:lnSpc>
+                <a:spcPts val="2400"/>
+              </a:lnSpc>
+            </a:pPr>
+            <a:r>
+              <a:rPr sz="2000" b="0" i="0">
+                <a:solidFill>
+                  <a:srgbClr val="FAFAFA"/>
+                </a:solidFill>
+                <a:latin typeface="Arial"/>
+              </a:rPr>
+              <a:t>material, strongly coupled zones, a priority zone</a:t>
+            </a:r>
+          </a:p>
+        </p:txBody>
+      </p:sp>
+      <p:sp>
+        <p:nvSpPr>
+          <p:cNvPr id="9" name="TextBox 8"/>
+          <p:cNvSpPr txBox="1"/>
+          <p:nvPr/>
+        </p:nvSpPr>
+        <p:spPr>
+          <a:xfrm>
+            <a:off x="6035040" y="4663440"/>
+            <a:ext cx="5669280" cy="655320"/>
+          </a:xfrm>
+          <a:prstGeom prst="rect">
+            <a:avLst/>
+          </a:prstGeom>
+          <a:noFill/>
+        </p:spPr>
+        <p:txBody>
+          <a:bodyPr wrap="none" lIns="0" rIns="0" tIns="0" bIns="0" anchor="t">
+            <a:spAutoFit/>
+          </a:bodyPr>
+          <a:lstStyle/>
+          <a:p>
+            <a:pPr algn="l">
+              <a:lnSpc>
+                <a:spcPts val="2400"/>
+              </a:lnSpc>
+            </a:pPr>
+            <a:r>
+              <a:rPr sz="2000" b="0" i="0">
+                <a:solidFill>
+                  <a:srgbClr val="FAFAFA"/>
+                </a:solidFill>
+                <a:latin typeface="Arial"/>
+              </a:rPr>
+              <a:t>Every object: both device scenarios, grouped</a:t>
+            </a:r>
+          </a:p>
+          <a:p>
+            <a:pPr algn="l">
+              <a:lnSpc>
+                <a:spcPts val="2400"/>
+              </a:lnSpc>
+            </a:pPr>
+            <a:r>
+              <a:rPr sz="2000" b="0" i="0">
+                <a:solidFill>
+                  <a:srgbClr val="FAFAFA"/>
+                </a:solidFill>
+                <a:latin typeface="Arial"/>
+              </a:rPr>
+              <a:t>into 12 to 29 regions (one qubit each)</a:t>
+            </a:r>
+          </a:p>
+        </p:txBody>
+      </p:sp>
+      <p:sp>
+        <p:nvSpPr>
+          <p:cNvPr id="10" name="TextBox 9"/>
+          <p:cNvSpPr txBox="1"/>
+          <p:nvPr/>
+        </p:nvSpPr>
+        <p:spPr>
+          <a:xfrm>
+            <a:off x="6035040" y="5532120"/>
+            <a:ext cx="5669280" cy="259080"/>
+          </a:xfrm>
+          <a:prstGeom prst="rect">
+            <a:avLst/>
+          </a:prstGeom>
+          <a:noFill/>
+        </p:spPr>
+        <p:txBody>
+          <a:bodyPr wrap="none" lIns="0" rIns="0" tIns="0" bIns="0" anchor="t">
+            <a:spAutoFit/>
+          </a:bodyPr>
+          <a:lstStyle/>
+          <a:p>
+            <a:pPr algn="l">
+              <a:lnSpc>
+                <a:spcPts val="1680"/>
+              </a:lnSpc>
+            </a:pPr>
+            <a:r>
+              <a:rPr sz="1400" b="0" i="1">
                 <a:solidFill>
                   <a:srgbClr val="9AA3AA"/>
                 </a:solidFill>
                 <a:latin typeface="Arial"/>
               </a:rPr>
-              <a:t>LR-QAOA, optimised QAOA, CVaR-QAOA,</a:t>
-            </a:r>
-          </a:p>
-          <a:p>
-            <a:pPr algn="l">
-              <a:lnSpc>
-                <a:spcPts val="2160"/>
-              </a:lnSpc>
-            </a:pPr>
-            <a:r>
-              <a:rPr sz="1800" b="0" i="0">
-                <a:solidFill>
-                  <a:srgbClr val="9AA3AA"/>
-                </a:solidFill>
-                <a:latin typeface="Arial"/>
-              </a:rPr>
-              <a:t>warm starts, varQITE (IonQ's method)</a:t>
-            </a:r>
-          </a:p>
-        </p:txBody>
-      </p:sp>
-      <p:sp>
-        <p:nvSpPr>
-          <p:cNvPr id="8" name="TextBox 7"/>
-          <p:cNvSpPr txBox="1"/>
-          <p:nvPr/>
-        </p:nvSpPr>
-        <p:spPr>
-          <a:xfrm>
-            <a:off x="7223760" y="3977639"/>
-            <a:ext cx="4572000" cy="380999"/>
-          </a:xfrm>
-          <a:prstGeom prst="rect">
-            <a:avLst/>
-          </a:prstGeom>
-          <a:noFill/>
-        </p:spPr>
-        <p:txBody>
-          <a:bodyPr wrap="none" lIns="0" rIns="0" tIns="0" bIns="0" anchor="t">
-            <a:spAutoFit/>
-          </a:bodyPr>
-          <a:lstStyle/>
-          <a:p>
-            <a:pPr algn="l">
-              <a:lnSpc>
-                <a:spcPts val="2640"/>
-              </a:lnSpc>
-            </a:pPr>
-            <a:r>
-              <a:rPr sz="2200" b="0" i="0">
-                <a:solidFill>
-                  <a:srgbClr val="FAFAFA"/>
-                </a:solidFill>
-                <a:latin typeface="Arial"/>
-              </a:rPr>
-              <a:t>Trained on a noiseless simulator</a:t>
-            </a:r>
-          </a:p>
-        </p:txBody>
-      </p:sp>
-      <p:sp>
-        <p:nvSpPr>
-          <p:cNvPr id="9" name="TextBox 8"/>
-          <p:cNvSpPr txBox="1"/>
-          <p:nvPr/>
-        </p:nvSpPr>
-        <p:spPr>
-          <a:xfrm>
-            <a:off x="7223760" y="4526280"/>
-            <a:ext cx="4572000" cy="380999"/>
-          </a:xfrm>
-          <a:prstGeom prst="rect">
-            <a:avLst/>
-          </a:prstGeom>
-          <a:noFill/>
-        </p:spPr>
-        <p:txBody>
-          <a:bodyPr wrap="none" lIns="0" rIns="0" tIns="0" bIns="0" anchor="t">
-            <a:spAutoFit/>
-          </a:bodyPr>
-          <a:lstStyle/>
-          <a:p>
-            <a:pPr algn="l">
-              <a:lnSpc>
-                <a:spcPts val="2640"/>
-              </a:lnSpc>
-            </a:pPr>
-            <a:r>
-              <a:rPr sz="2200" b="1" i="0">
-                <a:solidFill>
-                  <a:srgbClr val="FAFAFA"/>
-                </a:solidFill>
-                <a:latin typeface="Arial"/>
-              </a:rPr>
-              <a:t>ONE fixed circuit per IonQ job</a:t>
-            </a:r>
-          </a:p>
-        </p:txBody>
-      </p:sp>
-      <p:sp>
-        <p:nvSpPr>
-          <p:cNvPr id="10" name="TextBox 9"/>
-          <p:cNvSpPr txBox="1"/>
-          <p:nvPr/>
-        </p:nvSpPr>
-        <p:spPr>
-          <a:xfrm>
-            <a:off x="7223760" y="5166360"/>
-            <a:ext cx="4572000" cy="259080"/>
-          </a:xfrm>
-          <a:prstGeom prst="rect">
-            <a:avLst/>
-          </a:prstGeom>
-          <a:noFill/>
-        </p:spPr>
-        <p:txBody>
-          <a:bodyPr wrap="none" lIns="0" rIns="0" tIns="0" bIns="0" anchor="t">
-            <a:spAutoFit/>
-          </a:bodyPr>
-          <a:lstStyle/>
-          <a:p>
-            <a:pPr algn="l">
-              <a:lnSpc>
-                <a:spcPts val="1680"/>
-              </a:lnSpc>
-            </a:pPr>
-            <a:r>
-              <a:rPr sz="1400" b="0" i="1">
-                <a:solidFill>
-                  <a:srgbClr val="9AA3AA"/>
-                </a:solidFill>
-                <a:latin typeface="Arial"/>
-              </a:rPr>
-              <a:t>noiseless simulation (results/ionq_selection)</a:t>
+              <a:t>frozen meshes in data/frozen_meshes (identical on every machine)</a:t>
             </a:r>
           </a:p>
         </p:txBody>
@@ -6421,45 +8378,6 @@
       <p:sp>
         <p:nvSpPr>
           <p:cNvPr id="11" name="TextBox 10"/>
-          <p:cNvSpPr txBox="1"/>
-          <p:nvPr/>
-        </p:nvSpPr>
-        <p:spPr>
-          <a:xfrm>
-            <a:off x="411480" y="5577840"/>
-            <a:ext cx="6400800" cy="259080"/>
-          </a:xfrm>
-          <a:prstGeom prst="rect">
-            <a:avLst/>
-          </a:prstGeom>
-          <a:noFill/>
-        </p:spPr>
-        <p:txBody>
-          <a:bodyPr wrap="none" lIns="0" rIns="0" tIns="0" bIns="0" anchor="t">
-            <a:spAutoFit/>
-          </a:bodyPr>
-          <a:lstStyle/>
-          <a:p>
-            <a:pPr algn="l">
-              <a:lnSpc>
-                <a:spcPts val="1680"/>
-              </a:lnSpc>
-            </a:pPr>
-            <a:r>
-              <a:rPr sz="1400" b="0" i="1">
-                <a:solidFill>
-                  <a:srgbClr val="9AA3AA"/>
-                </a:solidFill>
-                <a:latin typeface="Arial"/>
-              </a:rPr>
-              <a:t>sketch of the QAOA circuit; varQITE uses the same start and measurement</a:t>
-            </a:r>
-          </a:p>
-        </p:txBody>
-      </p:sp>
-      <p:sp>
-        <p:nvSpPr>
-          <p:cNvPr id="12" name="TextBox 11"/>
           <p:cNvSpPr txBox="1"/>
           <p:nvPr/>
         </p:nvSpPr>
@@ -6498,7 +8416,7 @@
       </p:sp>
       <p:sp>
         <p:nvSpPr>
-          <p:cNvPr id="13" name="TextBox 12"/>
+          <p:cNvPr id="12" name="TextBox 11"/>
           <p:cNvSpPr txBox="1"/>
           <p:nvPr/>
         </p:nvSpPr>
@@ -6595,7 +8513,7 @@
                 </a:solidFill>
                 <a:latin typeface="Arial"/>
               </a:rPr>
-              <a:t>WHY IONQ</a:t>
+              <a:t>QUANTUM METHOD</a:t>
             </a:r>
           </a:p>
         </p:txBody>
@@ -6634,289 +8552,14 @@
                 </a:solidFill>
                 <a:latin typeface="Arial"/>
               </a:rPr>
-              <a:t>Every region pairs with every other</a:t>
-            </a:r>
-          </a:p>
-        </p:txBody>
-      </p:sp>
-      <p:sp>
-        <p:nvSpPr>
-          <p:cNvPr id="4" name="TextBox 3"/>
-          <p:cNvSpPr txBox="1"/>
-          <p:nvPr/>
-        </p:nvSpPr>
-        <p:spPr>
-          <a:xfrm>
-            <a:off x="548640" y="1783080"/>
-            <a:ext cx="2011680" cy="1051560"/>
-          </a:xfrm>
-          <a:prstGeom prst="rect">
-            <a:avLst/>
-          </a:prstGeom>
-          <a:noFill/>
-        </p:spPr>
-        <p:txBody>
-          <a:bodyPr wrap="none" lIns="0" rIns="0" tIns="0" bIns="0" anchor="t">
-            <a:spAutoFit/>
-          </a:bodyPr>
-          <a:lstStyle/>
-          <a:p>
-            <a:pPr algn="l">
-              <a:lnSpc>
-                <a:spcPts val="7920"/>
-              </a:lnSpc>
-            </a:pPr>
-            <a:r>
-              <a:rPr sz="6600" b="1" i="0">
-                <a:solidFill>
-                  <a:srgbClr val="FAFAFA"/>
-                </a:solidFill>
-                <a:latin typeface="Arial"/>
-              </a:rPr>
-              <a:t>66</a:t>
-            </a:r>
-          </a:p>
-        </p:txBody>
-      </p:sp>
-      <p:sp>
-        <p:nvSpPr>
-          <p:cNvPr id="5" name="TextBox 4"/>
-          <p:cNvSpPr txBox="1"/>
-          <p:nvPr/>
-        </p:nvSpPr>
-        <p:spPr>
-          <a:xfrm>
-            <a:off x="2331720" y="1920240"/>
-            <a:ext cx="3291840" cy="960120"/>
-          </a:xfrm>
-          <a:prstGeom prst="rect">
-            <a:avLst/>
-          </a:prstGeom>
-          <a:noFill/>
-        </p:spPr>
-        <p:txBody>
-          <a:bodyPr wrap="none" lIns="0" rIns="0" tIns="0" bIns="0" anchor="t">
-            <a:spAutoFit/>
-          </a:bodyPr>
-          <a:lstStyle/>
-          <a:p>
-            <a:pPr algn="l">
-              <a:lnSpc>
-                <a:spcPts val="2400"/>
-              </a:lnSpc>
-            </a:pPr>
-            <a:r>
-              <a:rPr sz="2000" b="0" i="0">
-                <a:solidFill>
-                  <a:srgbClr val="FAFAFA"/>
-                </a:solidFill>
-                <a:latin typeface="Arial"/>
-              </a:rPr>
-              <a:t>two-qubit gates for one</a:t>
-            </a:r>
-          </a:p>
-          <a:p>
-            <a:pPr algn="l">
-              <a:lnSpc>
-                <a:spcPts val="2400"/>
-              </a:lnSpc>
-            </a:pPr>
-            <a:r>
-              <a:rPr sz="2000" b="0" i="0">
-                <a:solidFill>
-                  <a:srgbClr val="FAFAFA"/>
-                </a:solidFill>
-                <a:latin typeface="Arial"/>
-              </a:rPr>
-              <a:t>layer at 12 qubits,</a:t>
-            </a:r>
-          </a:p>
-          <a:p>
-            <a:pPr algn="l">
-              <a:lnSpc>
-                <a:spcPts val="2400"/>
-              </a:lnSpc>
-            </a:pPr>
-            <a:r>
-              <a:rPr sz="2000" b="0" i="0">
-                <a:solidFill>
-                  <a:srgbClr val="FAFAFA"/>
-                </a:solidFill>
-                <a:latin typeface="Arial"/>
-              </a:rPr>
-              <a:t>all-to-all connectivity</a:t>
-            </a:r>
-          </a:p>
-        </p:txBody>
-      </p:sp>
-      <p:sp>
-        <p:nvSpPr>
-          <p:cNvPr id="6" name="TextBox 5"/>
-          <p:cNvSpPr txBox="1"/>
-          <p:nvPr/>
-        </p:nvSpPr>
-        <p:spPr>
-          <a:xfrm>
-            <a:off x="548640" y="3291840"/>
-            <a:ext cx="5120640" cy="655320"/>
-          </a:xfrm>
-          <a:prstGeom prst="rect">
-            <a:avLst/>
-          </a:prstGeom>
-          <a:noFill/>
-        </p:spPr>
-        <p:txBody>
-          <a:bodyPr wrap="none" lIns="0" rIns="0" tIns="0" bIns="0" anchor="t">
-            <a:spAutoFit/>
-          </a:bodyPr>
-          <a:lstStyle/>
-          <a:p>
-            <a:pPr algn="l">
-              <a:lnSpc>
-                <a:spcPts val="2400"/>
-              </a:lnSpc>
-            </a:pPr>
-            <a:r>
-              <a:rPr sz="2000" b="0" i="0">
-                <a:solidFill>
-                  <a:srgbClr val="FAFAFA"/>
-                </a:solidFill>
-                <a:latin typeface="Arial"/>
-              </a:rPr>
-              <a:t>216 after routing on a heavy-hex</a:t>
-            </a:r>
-          </a:p>
-          <a:p>
-            <a:pPr algn="l">
-              <a:lnSpc>
-                <a:spcPts val="2400"/>
-              </a:lnSpc>
-            </a:pPr>
-            <a:r>
-              <a:rPr sz="2000" b="0" i="0">
-                <a:solidFill>
-                  <a:srgbClr val="FAFAFA"/>
-                </a:solidFill>
-                <a:latin typeface="Arial"/>
-              </a:rPr>
-              <a:t>layout: 3.3x more</a:t>
-            </a:r>
-          </a:p>
-        </p:txBody>
-      </p:sp>
-      <p:sp>
-        <p:nvSpPr>
-          <p:cNvPr id="7" name="TextBox 6"/>
-          <p:cNvSpPr txBox="1"/>
-          <p:nvPr/>
-        </p:nvSpPr>
-        <p:spPr>
-          <a:xfrm>
-            <a:off x="548640" y="4206240"/>
-            <a:ext cx="5120640" cy="655320"/>
-          </a:xfrm>
-          <a:prstGeom prst="rect">
-            <a:avLst/>
-          </a:prstGeom>
-          <a:noFill/>
-        </p:spPr>
-        <p:txBody>
-          <a:bodyPr wrap="none" lIns="0" rIns="0" tIns="0" bIns="0" anchor="t">
-            <a:spAutoFit/>
-          </a:bodyPr>
-          <a:lstStyle/>
-          <a:p>
-            <a:pPr algn="l">
-              <a:lnSpc>
-                <a:spcPts val="2400"/>
-              </a:lnSpc>
-            </a:pPr>
-            <a:r>
-              <a:rPr sz="2000" b="0" i="0">
-                <a:solidFill>
-                  <a:srgbClr val="FAFAFA"/>
-                </a:solidFill>
-                <a:latin typeface="Arial"/>
-              </a:rPr>
-              <a:t>At 29 qubits: 406 against 1,498</a:t>
-            </a:r>
-          </a:p>
-          <a:p>
-            <a:pPr algn="l">
-              <a:lnSpc>
-                <a:spcPts val="2400"/>
-              </a:lnSpc>
-            </a:pPr>
-            <a:r>
-              <a:rPr sz="2000" b="0" i="0">
-                <a:solidFill>
-                  <a:srgbClr val="FAFAFA"/>
-                </a:solidFill>
-                <a:latin typeface="Arial"/>
-              </a:rPr>
-              <a:t>(3.7x more)</a:t>
-            </a:r>
-          </a:p>
-        </p:txBody>
-      </p:sp>
-      <p:sp>
-        <p:nvSpPr>
-          <p:cNvPr id="8" name="TextBox 7"/>
-          <p:cNvSpPr txBox="1"/>
-          <p:nvPr/>
-        </p:nvSpPr>
-        <p:spPr>
-          <a:xfrm>
-            <a:off x="548640" y="5166360"/>
-            <a:ext cx="5120640" cy="472440"/>
-          </a:xfrm>
-          <a:prstGeom prst="rect">
-            <a:avLst/>
-          </a:prstGeom>
-          <a:noFill/>
-        </p:spPr>
-        <p:txBody>
-          <a:bodyPr wrap="none" lIns="0" rIns="0" tIns="0" bIns="0" anchor="t">
-            <a:spAutoFit/>
-          </a:bodyPr>
-          <a:lstStyle/>
-          <a:p>
-            <a:pPr algn="l">
-              <a:lnSpc>
-                <a:spcPts val="1680"/>
-              </a:lnSpc>
-            </a:pPr>
-            <a:r>
-              <a:rPr sz="1400" b="0" i="1">
-                <a:solidFill>
-                  <a:srgbClr val="9AA3AA"/>
-                </a:solidFill>
-                <a:latin typeface="Arial"/>
-              </a:rPr>
-              <a:t>counted with the Qiskit transpiler only</a:t>
-            </a:r>
-          </a:p>
-          <a:p>
-            <a:pPr algn="l">
-              <a:lnSpc>
-                <a:spcPts val="1680"/>
-              </a:lnSpc>
-            </a:pPr>
-            <a:r>
-              <a:rPr sz="1400" b="0" i="1">
-                <a:solidFill>
-                  <a:srgbClr val="9AA3AA"/>
-                </a:solidFill>
-                <a:latin typeface="Arial"/>
-              </a:rPr>
-              <a:t>(no simulation, no hardware run)</a:t>
+              <a:t>Fixed circuits, trained offline</a:t>
             </a:r>
           </a:p>
         </p:txBody>
       </p:sp>
       <p:pic>
         <p:nvPicPr>
-          <p:cNvPr id="9" name="Picture 8" descr="Bar chart of two-qubit gate counts. One QAOA layer at 12 qubits: 66 on all-to-all connectivity, 216 routed on heavy-hex. The varQITE ZY circuit at 12 qubits: 66 against 237. One QAOA layer at 29 qubits: 406 against 1,498."/>
+          <p:cNvPr id="4" name="Picture 3" descr="Circuit sketch with four of the twelve qubit lines: an H gate on every qubit, a cost layer with one two-qubit rzz gate per pair of regions, an rx mixer gate on every qubit, then measurement. The cost layer and the mixer are repeated p times."/>
           <p:cNvPicPr>
             <a:picLocks noChangeAspect="1"/>
           </p:cNvPicPr>
@@ -6930,8 +8573,8 @@
         </p:blipFill>
         <p:spPr>
           <a:xfrm>
-            <a:off x="5806440" y="1463040"/>
-            <a:ext cx="5943600" cy="4114800"/>
+            <a:off x="411480" y="1554480"/>
+            <a:ext cx="6400800" cy="3931920"/>
           </a:xfrm>
           <a:prstGeom prst="rect">
             <a:avLst/>
@@ -6940,7 +8583,312 @@
       </p:pic>
       <p:sp>
         <p:nvSpPr>
+          <p:cNvPr id="5" name="TextBox 4"/>
+          <p:cNvSpPr txBox="1"/>
+          <p:nvPr/>
+        </p:nvSpPr>
+        <p:spPr>
+          <a:xfrm>
+            <a:off x="7223760" y="1691640"/>
+            <a:ext cx="2011680" cy="1051560"/>
+          </a:xfrm>
+          <a:prstGeom prst="rect">
+            <a:avLst/>
+          </a:prstGeom>
+          <a:noFill/>
+        </p:spPr>
+        <p:txBody>
+          <a:bodyPr wrap="none" lIns="0" rIns="0" tIns="0" bIns="0" anchor="t">
+            <a:spAutoFit/>
+          </a:bodyPr>
+          <a:lstStyle/>
+          <a:p>
+            <a:pPr algn="l">
+              <a:lnSpc>
+                <a:spcPts val="7920"/>
+              </a:lnSpc>
+            </a:pPr>
+            <a:r>
+              <a:rPr sz="6600" b="1" i="0">
+                <a:solidFill>
+                  <a:srgbClr val="FAFAFA"/>
+                </a:solidFill>
+                <a:latin typeface="Arial"/>
+              </a:rPr>
+              <a:t>104</a:t>
+            </a:r>
+          </a:p>
+        </p:txBody>
+      </p:sp>
+      <p:sp>
+        <p:nvSpPr>
+          <p:cNvPr id="6" name="TextBox 5"/>
+          <p:cNvSpPr txBox="1"/>
+          <p:nvPr/>
+        </p:nvSpPr>
+        <p:spPr>
+          <a:xfrm>
+            <a:off x="9144000" y="1874519"/>
+            <a:ext cx="2651760" cy="655320"/>
+          </a:xfrm>
+          <a:prstGeom prst="rect">
+            <a:avLst/>
+          </a:prstGeom>
+          <a:noFill/>
+        </p:spPr>
+        <p:txBody>
+          <a:bodyPr wrap="none" lIns="0" rIns="0" tIns="0" bIns="0" anchor="t">
+            <a:spAutoFit/>
+          </a:bodyPr>
+          <a:lstStyle/>
+          <a:p>
+            <a:pPr algn="l">
+              <a:lnSpc>
+                <a:spcPts val="2400"/>
+              </a:lnSpc>
+            </a:pPr>
+            <a:r>
+              <a:rPr sz="2000" b="0" i="0">
+                <a:solidFill>
+                  <a:srgbClr val="FAFAFA"/>
+                </a:solidFill>
+                <a:latin typeface="Arial"/>
+              </a:rPr>
+              <a:t>circuits compared</a:t>
+            </a:r>
+          </a:p>
+          <a:p>
+            <a:pPr algn="l">
+              <a:lnSpc>
+                <a:spcPts val="2400"/>
+              </a:lnSpc>
+            </a:pPr>
+            <a:r>
+              <a:rPr sz="2000" b="0" i="0">
+                <a:solidFill>
+                  <a:srgbClr val="FAFAFA"/>
+                </a:solidFill>
+                <a:latin typeface="Arial"/>
+              </a:rPr>
+              <a:t>at 12 qubits</a:t>
+            </a:r>
+          </a:p>
+        </p:txBody>
+      </p:sp>
+      <p:sp>
+        <p:nvSpPr>
+          <p:cNvPr id="7" name="TextBox 6"/>
+          <p:cNvSpPr txBox="1"/>
+          <p:nvPr/>
+        </p:nvSpPr>
+        <p:spPr>
+          <a:xfrm>
+            <a:off x="7223760" y="3063240"/>
+            <a:ext cx="4572000" cy="594360"/>
+          </a:xfrm>
+          <a:prstGeom prst="rect">
+            <a:avLst/>
+          </a:prstGeom>
+          <a:noFill/>
+        </p:spPr>
+        <p:txBody>
+          <a:bodyPr wrap="none" lIns="0" rIns="0" tIns="0" bIns="0" anchor="t">
+            <a:spAutoFit/>
+          </a:bodyPr>
+          <a:lstStyle/>
+          <a:p>
+            <a:pPr algn="l">
+              <a:lnSpc>
+                <a:spcPts val="2160"/>
+              </a:lnSpc>
+            </a:pPr>
+            <a:r>
+              <a:rPr sz="1800" b="0" i="0">
+                <a:solidFill>
+                  <a:srgbClr val="9AA3AA"/>
+                </a:solidFill>
+                <a:latin typeface="Arial"/>
+              </a:rPr>
+              <a:t>LR-QAOA, optimised QAOA, CVaR-QAOA,</a:t>
+            </a:r>
+          </a:p>
+          <a:p>
+            <a:pPr algn="l">
+              <a:lnSpc>
+                <a:spcPts val="2160"/>
+              </a:lnSpc>
+            </a:pPr>
+            <a:r>
+              <a:rPr sz="1800" b="0" i="0">
+                <a:solidFill>
+                  <a:srgbClr val="9AA3AA"/>
+                </a:solidFill>
+                <a:latin typeface="Arial"/>
+              </a:rPr>
+              <a:t>warm starts, varQITE (IonQ's method)</a:t>
+            </a:r>
+          </a:p>
+        </p:txBody>
+      </p:sp>
+      <p:sp>
+        <p:nvSpPr>
+          <p:cNvPr id="8" name="TextBox 7"/>
+          <p:cNvSpPr txBox="1"/>
+          <p:nvPr/>
+        </p:nvSpPr>
+        <p:spPr>
+          <a:xfrm>
+            <a:off x="7223760" y="3977639"/>
+            <a:ext cx="4572000" cy="380999"/>
+          </a:xfrm>
+          <a:prstGeom prst="rect">
+            <a:avLst/>
+          </a:prstGeom>
+          <a:noFill/>
+        </p:spPr>
+        <p:txBody>
+          <a:bodyPr wrap="none" lIns="0" rIns="0" tIns="0" bIns="0" anchor="t">
+            <a:spAutoFit/>
+          </a:bodyPr>
+          <a:lstStyle/>
+          <a:p>
+            <a:pPr algn="l">
+              <a:lnSpc>
+                <a:spcPts val="2640"/>
+              </a:lnSpc>
+            </a:pPr>
+            <a:r>
+              <a:rPr sz="2200" b="0" i="0">
+                <a:solidFill>
+                  <a:srgbClr val="FAFAFA"/>
+                </a:solidFill>
+                <a:latin typeface="Arial"/>
+              </a:rPr>
+              <a:t>Trained on a noiseless simulator</a:t>
+            </a:r>
+          </a:p>
+        </p:txBody>
+      </p:sp>
+      <p:sp>
+        <p:nvSpPr>
+          <p:cNvPr id="9" name="TextBox 8"/>
+          <p:cNvSpPr txBox="1"/>
+          <p:nvPr/>
+        </p:nvSpPr>
+        <p:spPr>
+          <a:xfrm>
+            <a:off x="7223760" y="4526280"/>
+            <a:ext cx="4572000" cy="380999"/>
+          </a:xfrm>
+          <a:prstGeom prst="rect">
+            <a:avLst/>
+          </a:prstGeom>
+          <a:noFill/>
+        </p:spPr>
+        <p:txBody>
+          <a:bodyPr wrap="none" lIns="0" rIns="0" tIns="0" bIns="0" anchor="t">
+            <a:spAutoFit/>
+          </a:bodyPr>
+          <a:lstStyle/>
+          <a:p>
+            <a:pPr algn="l">
+              <a:lnSpc>
+                <a:spcPts val="2640"/>
+              </a:lnSpc>
+            </a:pPr>
+            <a:r>
+              <a:rPr sz="2200" b="1" i="0">
+                <a:solidFill>
+                  <a:srgbClr val="FAFAFA"/>
+                </a:solidFill>
+                <a:latin typeface="Arial"/>
+              </a:rPr>
+              <a:t>ONE fixed circuit per IonQ job</a:t>
+            </a:r>
+          </a:p>
+        </p:txBody>
+      </p:sp>
+      <p:sp>
+        <p:nvSpPr>
           <p:cNvPr id="10" name="TextBox 9"/>
+          <p:cNvSpPr txBox="1"/>
+          <p:nvPr/>
+        </p:nvSpPr>
+        <p:spPr>
+          <a:xfrm>
+            <a:off x="7223760" y="5166360"/>
+            <a:ext cx="4572000" cy="259080"/>
+          </a:xfrm>
+          <a:prstGeom prst="rect">
+            <a:avLst/>
+          </a:prstGeom>
+          <a:noFill/>
+        </p:spPr>
+        <p:txBody>
+          <a:bodyPr wrap="none" lIns="0" rIns="0" tIns="0" bIns="0" anchor="t">
+            <a:spAutoFit/>
+          </a:bodyPr>
+          <a:lstStyle/>
+          <a:p>
+            <a:pPr algn="l">
+              <a:lnSpc>
+                <a:spcPts val="1680"/>
+              </a:lnSpc>
+            </a:pPr>
+            <a:r>
+              <a:rPr sz="1400" b="0" i="1">
+                <a:solidFill>
+                  <a:srgbClr val="9AA3AA"/>
+                </a:solidFill>
+                <a:latin typeface="Arial"/>
+              </a:rPr>
+              <a:t>noiseless simulation (results/ionq_selection)</a:t>
+            </a:r>
+          </a:p>
+        </p:txBody>
+      </p:sp>
+      <p:sp>
+        <p:nvSpPr>
+          <p:cNvPr id="11" name="TextBox 10"/>
+          <p:cNvSpPr txBox="1"/>
+          <p:nvPr/>
+        </p:nvSpPr>
+        <p:spPr>
+          <a:xfrm>
+            <a:off x="411480" y="5577840"/>
+            <a:ext cx="6400800" cy="259080"/>
+          </a:xfrm>
+          <a:prstGeom prst="rect">
+            <a:avLst/>
+          </a:prstGeom>
+          <a:noFill/>
+        </p:spPr>
+        <p:txBody>
+          <a:bodyPr wrap="none" lIns="0" rIns="0" tIns="0" bIns="0" anchor="t">
+            <a:spAutoFit/>
+          </a:bodyPr>
+          <a:lstStyle/>
+          <a:p>
+            <a:pPr algn="l">
+              <a:lnSpc>
+                <a:spcPts val="1680"/>
+              </a:lnSpc>
+            </a:pPr>
+            <a:r>
+              <a:rPr sz="1400" b="0" i="1">
+                <a:solidFill>
+                  <a:srgbClr val="9AA3AA"/>
+                </a:solidFill>
+                <a:latin typeface="Arial"/>
+              </a:rPr>
+              <a:t>sketch of the QAOA circuit; varQITE uses the same start and measurement</a:t>
+            </a:r>
+          </a:p>
+        </p:txBody>
+      </p:sp>
+      <p:sp>
+        <p:nvSpPr>
+          <p:cNvPr id="12" name="TextBox 11"/>
           <p:cNvSpPr txBox="1"/>
           <p:nvPr/>
         </p:nvSpPr>
@@ -6979,7 +8927,7 @@
       </p:sp>
       <p:sp>
         <p:nvSpPr>
-          <p:cNvPr id="11" name="TextBox 10"/>
+          <p:cNvPr id="13" name="TextBox 12"/>
           <p:cNvSpPr txBox="1"/>
           <p:nvPr/>
         </p:nvSpPr>
@@ -7076,7 +9024,7 @@
                 </a:solidFill>
                 <a:latin typeface="Arial"/>
               </a:rPr>
-              <a:t>MAIN RESULT  ·  2 EQUAL DEVICES</a:t>
+              <a:t>WHY IONQ</a:t>
             </a:r>
           </a:p>
         </p:txBody>
@@ -7115,7 +9063,7 @@
                 </a:solidFill>
                 <a:latin typeface="Arial"/>
               </a:rPr>
-              <a:t>28 % of shots are the exact best split</a:t>
+              <a:t>Every region pairs with every other</a:t>
             </a:r>
           </a:p>
         </p:txBody>
@@ -7128,33 +9076,33 @@
         </p:nvSpPr>
         <p:spPr>
           <a:xfrm>
-            <a:off x="548640" y="1645920"/>
-            <a:ext cx="5120640" cy="1264920"/>
-          </a:xfrm>
-          <a:prstGeom prst="rect">
-            <a:avLst/>
-          </a:prstGeom>
-          <a:noFill/>
-        </p:spPr>
-        <p:txBody>
-          <a:bodyPr wrap="none" lIns="0" rIns="0" tIns="0" bIns="0" anchor="t">
-            <a:spAutoFit/>
-          </a:bodyPr>
-          <a:lstStyle/>
-          <a:p>
-            <a:pPr algn="l">
-              <a:lnSpc>
-                <a:spcPts val="9600"/>
-              </a:lnSpc>
-            </a:pPr>
-            <a:r>
-              <a:rPr sz="8000" b="1" i="0">
-                <a:solidFill>
-                  <a:srgbClr val="F89B33"/>
-                </a:solidFill>
-                <a:latin typeface="Arial"/>
-              </a:rPr>
-              <a:t>27.8 %</a:t>
+            <a:off x="548640" y="1783080"/>
+            <a:ext cx="2011680" cy="1051560"/>
+          </a:xfrm>
+          <a:prstGeom prst="rect">
+            <a:avLst/>
+          </a:prstGeom>
+          <a:noFill/>
+        </p:spPr>
+        <p:txBody>
+          <a:bodyPr wrap="none" lIns="0" rIns="0" tIns="0" bIns="0" anchor="t">
+            <a:spAutoFit/>
+          </a:bodyPr>
+          <a:lstStyle/>
+          <a:p>
+            <a:pPr algn="l">
+              <a:lnSpc>
+                <a:spcPts val="7920"/>
+              </a:lnSpc>
+            </a:pPr>
+            <a:r>
+              <a:rPr sz="6600" b="1" i="0">
+                <a:solidFill>
+                  <a:srgbClr val="FAFAFA"/>
+                </a:solidFill>
+                <a:latin typeface="Arial"/>
+              </a:rPr>
+              <a:t>66</a:t>
             </a:r>
           </a:p>
         </p:txBody>
@@ -7167,8 +9115,8 @@
         </p:nvSpPr>
         <p:spPr>
           <a:xfrm>
-            <a:off x="548640" y="2926080"/>
-            <a:ext cx="5303520" cy="350520"/>
+            <a:off x="2331720" y="1920240"/>
+            <a:ext cx="3291840" cy="960120"/>
           </a:xfrm>
           <a:prstGeom prst="rect">
             <a:avLst/>
@@ -7193,7 +9141,39 @@
                 </a:solidFill>
                 <a:latin typeface="Arial"/>
               </a:rPr>
-              <a:t>of 1,000 shots, about 570x random guessing</a:t>
+              <a:t>two-qubit gates for one</a:t>
+            </a:r>
+          </a:p>
+          <a:p>
+            <a:pPr algn="l">
+              <a:lnSpc>
+                <a:spcPts val="2400"/>
+              </a:lnSpc>
+            </a:pPr>
+            <a:r>
+              <a:rPr sz="2000" b="0" i="0">
+                <a:solidFill>
+                  <a:srgbClr val="FAFAFA"/>
+                </a:solidFill>
+                <a:latin typeface="Arial"/>
+              </a:rPr>
+              <a:t>layer at 12 qubits,</a:t>
+            </a:r>
+          </a:p>
+          <a:p>
+            <a:pPr algn="l">
+              <a:lnSpc>
+                <a:spcPts val="2400"/>
+              </a:lnSpc>
+            </a:pPr>
+            <a:r>
+              <a:rPr sz="2000" b="0" i="0">
+                <a:solidFill>
+                  <a:srgbClr val="FAFAFA"/>
+                </a:solidFill>
+                <a:latin typeface="Arial"/>
+              </a:rPr>
+              <a:t>all-to-all connectivity</a:t>
             </a:r>
           </a:p>
         </p:txBody>
@@ -7206,8 +9186,8 @@
         </p:nvSpPr>
         <p:spPr>
           <a:xfrm>
-            <a:off x="548640" y="3364992"/>
-            <a:ext cx="5303520" cy="350520"/>
+            <a:off x="548640" y="3291840"/>
+            <a:ext cx="5120640" cy="655320"/>
           </a:xfrm>
           <a:prstGeom prst="rect">
             <a:avLst/>
@@ -7232,7 +9212,23 @@
                 </a:solidFill>
                 <a:latin typeface="Arial"/>
               </a:rPr>
-              <a:t>Most frequent answer: the exact optimum</a:t>
+              <a:t>216 after routing on a heavy-hex</a:t>
+            </a:r>
+          </a:p>
+          <a:p>
+            <a:pPr algn="l">
+              <a:lnSpc>
+                <a:spcPts val="2400"/>
+              </a:lnSpc>
+            </a:pPr>
+            <a:r>
+              <a:rPr sz="2000" b="0" i="0">
+                <a:solidFill>
+                  <a:srgbClr val="FAFAFA"/>
+                </a:solidFill>
+                <a:latin typeface="Arial"/>
+              </a:rPr>
+              <a:t>layout: 3.3x more</a:t>
             </a:r>
           </a:p>
         </p:txBody>
@@ -7245,8 +9241,63 @@
         </p:nvSpPr>
         <p:spPr>
           <a:xfrm>
-            <a:off x="548640" y="3840480"/>
-            <a:ext cx="5303520" cy="472440"/>
+            <a:off x="548640" y="4206240"/>
+            <a:ext cx="5120640" cy="655320"/>
+          </a:xfrm>
+          <a:prstGeom prst="rect">
+            <a:avLst/>
+          </a:prstGeom>
+          <a:noFill/>
+        </p:spPr>
+        <p:txBody>
+          <a:bodyPr wrap="none" lIns="0" rIns="0" tIns="0" bIns="0" anchor="t">
+            <a:spAutoFit/>
+          </a:bodyPr>
+          <a:lstStyle/>
+          <a:p>
+            <a:pPr algn="l">
+              <a:lnSpc>
+                <a:spcPts val="2400"/>
+              </a:lnSpc>
+            </a:pPr>
+            <a:r>
+              <a:rPr sz="2000" b="0" i="0">
+                <a:solidFill>
+                  <a:srgbClr val="FAFAFA"/>
+                </a:solidFill>
+                <a:latin typeface="Arial"/>
+              </a:rPr>
+              <a:t>At 29 qubits: 406 against 1,498</a:t>
+            </a:r>
+          </a:p>
+          <a:p>
+            <a:pPr algn="l">
+              <a:lnSpc>
+                <a:spcPts val="2400"/>
+              </a:lnSpc>
+            </a:pPr>
+            <a:r>
+              <a:rPr sz="2000" b="0" i="0">
+                <a:solidFill>
+                  <a:srgbClr val="FAFAFA"/>
+                </a:solidFill>
+                <a:latin typeface="Arial"/>
+              </a:rPr>
+              <a:t>(3.7x more)</a:t>
+            </a:r>
+          </a:p>
+        </p:txBody>
+      </p:sp>
+      <p:sp>
+        <p:nvSpPr>
+          <p:cNvPr id="8" name="TextBox 7"/>
+          <p:cNvSpPr txBox="1"/>
+          <p:nvPr/>
+        </p:nvSpPr>
+        <p:spPr>
+          <a:xfrm>
+            <a:off x="548640" y="5166360"/>
+            <a:ext cx="5120640" cy="472440"/>
           </a:xfrm>
           <a:prstGeom prst="rect">
             <a:avLst/>
@@ -7271,7 +9322,7 @@
                 </a:solidFill>
                 <a:latin typeface="Arial"/>
               </a:rPr>
-              <a:t>IonQ Forte 1 noise model (Qollab), 11 Oct 2026:</a:t>
+              <a:t>counted with the Qiskit transpiler only</a:t>
             </a:r>
           </a:p>
           <a:p>
@@ -7287,124 +9338,14 @@
                 </a:solidFill>
                 <a:latin typeface="Arial"/>
               </a:rPr>
-              <a:t>varQITE ZY, 12 qubits, 66 two-qubit gates</a:t>
-            </a:r>
-          </a:p>
-        </p:txBody>
-      </p:sp>
-      <p:sp>
-        <p:nvSpPr>
-          <p:cNvPr id="8" name="TextBox 7"/>
-          <p:cNvSpPr txBox="1"/>
-          <p:nvPr/>
-        </p:nvSpPr>
-        <p:spPr>
-          <a:xfrm>
-            <a:off x="548640" y="4526280"/>
-            <a:ext cx="5303520" cy="655320"/>
-          </a:xfrm>
-          <a:prstGeom prst="rect">
-            <a:avLst/>
-          </a:prstGeom>
-          <a:noFill/>
-        </p:spPr>
-        <p:txBody>
-          <a:bodyPr wrap="none" lIns="0" rIns="0" tIns="0" bIns="0" anchor="t">
-            <a:spAutoFit/>
-          </a:bodyPr>
-          <a:lstStyle/>
-          <a:p>
-            <a:pPr algn="l">
-              <a:lnSpc>
-                <a:spcPts val="2400"/>
-              </a:lnSpc>
-            </a:pPr>
-            <a:r>
-              <a:rPr sz="2000" b="0" i="0">
-                <a:solidFill>
-                  <a:srgbClr val="FAFAFA"/>
-                </a:solidFill>
-                <a:latin typeface="Arial"/>
-              </a:rPr>
-              <a:t>Noiseless: 75.0 %. Noise costs 47 points,</a:t>
-            </a:r>
-          </a:p>
-          <a:p>
-            <a:pPr algn="l">
-              <a:lnSpc>
-                <a:spcPts val="2400"/>
-              </a:lnSpc>
-            </a:pPr>
-            <a:r>
-              <a:rPr sz="2000" b="0" i="0">
-                <a:solidFill>
-                  <a:srgbClr val="FAFAFA"/>
-                </a:solidFill>
-                <a:latin typeface="Arial"/>
-              </a:rPr>
-              <a:t>about 2x what we estimated.</a:t>
-            </a:r>
-          </a:p>
-        </p:txBody>
-      </p:sp>
-      <p:sp>
-        <p:nvSpPr>
-          <p:cNvPr id="9" name="TextBox 8"/>
-          <p:cNvSpPr txBox="1"/>
-          <p:nvPr/>
-        </p:nvSpPr>
-        <p:spPr>
-          <a:xfrm>
-            <a:off x="548640" y="5303520"/>
-            <a:ext cx="5303520" cy="594360"/>
-          </a:xfrm>
-          <a:prstGeom prst="rect">
-            <a:avLst/>
-          </a:prstGeom>
-          <a:noFill/>
-        </p:spPr>
-        <p:txBody>
-          <a:bodyPr wrap="none" lIns="0" rIns="0" tIns="0" bIns="0" anchor="t">
-            <a:spAutoFit/>
-          </a:bodyPr>
-          <a:lstStyle/>
-          <a:p>
-            <a:pPr algn="l">
-              <a:lnSpc>
-                <a:spcPts val="2160"/>
-              </a:lnSpc>
-            </a:pPr>
-            <a:r>
-              <a:rPr sz="1800" b="0" i="0">
-                <a:solidFill>
-                  <a:srgbClr val="9AA3AA"/>
-                </a:solidFill>
-                <a:latin typeface="Arial"/>
-              </a:rPr>
-              <a:t>Classical, same 1,000 tries: annealing finds it</a:t>
-            </a:r>
-          </a:p>
-          <a:p>
-            <a:pPr algn="l">
-              <a:lnSpc>
-                <a:spcPts val="2160"/>
-              </a:lnSpc>
-            </a:pPr>
-            <a:r>
-              <a:rPr sz="1800" b="0" i="0">
-                <a:solidFill>
-                  <a:srgbClr val="9AA3AA"/>
-                </a:solidFill>
-                <a:latin typeface="Arial"/>
-              </a:rPr>
-              <a:t>in 50 % of runs, local search in 51 %.</a:t>
+              <a:t>(no simulation, no hardware run)</a:t>
             </a:r>
           </a:p>
         </p:txBody>
       </p:sp>
       <p:pic>
         <p:nvPicPr>
-          <p:cNvPr id="10" name="Picture 9" descr="Bar chart on a log scale of the share of shots that are the exact best split: random guessing 0.049 %, IonQ Forte 1 noise model 27.8 %, noiseless simulation 75.0 %. A dashed line marks our estimate of 54 %."/>
+          <p:cNvPr id="9" name="Picture 8" descr="Bar chart of two-qubit gate counts. One QAOA layer at 12 qubits: 66 on all-to-all connectivity, 216 routed on heavy-hex. The varQITE ZY circuit at 12 qubits: 66 against 237. One QAOA layer at 29 qubits: 406 against 1,498."/>
           <p:cNvPicPr>
             <a:picLocks noChangeAspect="1"/>
           </p:cNvPicPr>
@@ -7418,8 +9359,8 @@
         </p:blipFill>
         <p:spPr>
           <a:xfrm>
-            <a:off x="5989320" y="1417320"/>
-            <a:ext cx="5760720" cy="4297680"/>
+            <a:off x="5806440" y="1463040"/>
+            <a:ext cx="5943600" cy="4114800"/>
           </a:xfrm>
           <a:prstGeom prst="rect">
             <a:avLst/>
@@ -7428,46 +9369,7 @@
       </p:pic>
       <p:sp>
         <p:nvSpPr>
-          <p:cNvPr id="11" name="TextBox 10"/>
-          <p:cNvSpPr txBox="1"/>
-          <p:nvPr/>
-        </p:nvSpPr>
-        <p:spPr>
-          <a:xfrm>
-            <a:off x="5989320" y="5806440"/>
-            <a:ext cx="5760720" cy="259080"/>
-          </a:xfrm>
-          <a:prstGeom prst="rect">
-            <a:avLst/>
-          </a:prstGeom>
-          <a:noFill/>
-        </p:spPr>
-        <p:txBody>
-          <a:bodyPr wrap="none" lIns="0" rIns="0" tIns="0" bIns="0" anchor="t">
-            <a:spAutoFit/>
-          </a:bodyPr>
-          <a:lstStyle/>
-          <a:p>
-            <a:pPr algn="l">
-              <a:lnSpc>
-                <a:spcPts val="1680"/>
-              </a:lnSpc>
-            </a:pPr>
-            <a:r>
-              <a:rPr sz="1400" b="0" i="1">
-                <a:solidFill>
-                  <a:srgbClr val="9AA3AA"/>
-                </a:solidFill>
-                <a:latin typeface="Arial"/>
-              </a:rPr>
-              <a:t>random and noiseless: noiseless simulation; classical: classical</a:t>
-            </a:r>
-          </a:p>
-        </p:txBody>
-      </p:sp>
-      <p:sp>
-        <p:nvSpPr>
-          <p:cNvPr id="12" name="TextBox 11"/>
+          <p:cNvPr id="10" name="TextBox 9"/>
           <p:cNvSpPr txBox="1"/>
           <p:nvPr/>
         </p:nvSpPr>
@@ -7506,7 +9408,7 @@
       </p:sp>
       <p:sp>
         <p:nvSpPr>
-          <p:cNvPr id="13" name="TextBox 12"/>
+          <p:cNvPr id="11" name="TextBox 10"/>
           <p:cNvSpPr txBox="1"/>
           <p:nvPr/>
         </p:nvSpPr>
@@ -7603,7 +9505,7 @@
                 </a:solidFill>
                 <a:latin typeface="Arial"/>
               </a:rPr>
-              <a:t>SCALING  ·  HONEST COMPARISON</a:t>
+              <a:t>MAIN RESULT  ·  2 EQUAL DEVICES</a:t>
             </a:r>
           </a:p>
         </p:txBody>
@@ -7642,14 +9544,296 @@
                 </a:solidFill>
                 <a:latin typeface="Arial"/>
               </a:rPr>
-              <a:t>Bigger meshes: classical methods win</a:t>
+              <a:t>28 % of shots are the exact best split</a:t>
+            </a:r>
+          </a:p>
+        </p:txBody>
+      </p:sp>
+      <p:sp>
+        <p:nvSpPr>
+          <p:cNvPr id="4" name="TextBox 3"/>
+          <p:cNvSpPr txBox="1"/>
+          <p:nvPr/>
+        </p:nvSpPr>
+        <p:spPr>
+          <a:xfrm>
+            <a:off x="548640" y="1645920"/>
+            <a:ext cx="5120640" cy="1264920"/>
+          </a:xfrm>
+          <a:prstGeom prst="rect">
+            <a:avLst/>
+          </a:prstGeom>
+          <a:noFill/>
+        </p:spPr>
+        <p:txBody>
+          <a:bodyPr wrap="none" lIns="0" rIns="0" tIns="0" bIns="0" anchor="t">
+            <a:spAutoFit/>
+          </a:bodyPr>
+          <a:lstStyle/>
+          <a:p>
+            <a:pPr algn="l">
+              <a:lnSpc>
+                <a:spcPts val="9600"/>
+              </a:lnSpc>
+            </a:pPr>
+            <a:r>
+              <a:rPr sz="8000" b="1" i="0">
+                <a:solidFill>
+                  <a:srgbClr val="F89B33"/>
+                </a:solidFill>
+                <a:latin typeface="Arial"/>
+              </a:rPr>
+              <a:t>27.8 %</a:t>
+            </a:r>
+          </a:p>
+        </p:txBody>
+      </p:sp>
+      <p:sp>
+        <p:nvSpPr>
+          <p:cNvPr id="5" name="TextBox 4"/>
+          <p:cNvSpPr txBox="1"/>
+          <p:nvPr/>
+        </p:nvSpPr>
+        <p:spPr>
+          <a:xfrm>
+            <a:off x="548640" y="2926080"/>
+            <a:ext cx="5303520" cy="350520"/>
+          </a:xfrm>
+          <a:prstGeom prst="rect">
+            <a:avLst/>
+          </a:prstGeom>
+          <a:noFill/>
+        </p:spPr>
+        <p:txBody>
+          <a:bodyPr wrap="none" lIns="0" rIns="0" tIns="0" bIns="0" anchor="t">
+            <a:spAutoFit/>
+          </a:bodyPr>
+          <a:lstStyle/>
+          <a:p>
+            <a:pPr algn="l">
+              <a:lnSpc>
+                <a:spcPts val="2400"/>
+              </a:lnSpc>
+            </a:pPr>
+            <a:r>
+              <a:rPr sz="2000" b="0" i="0">
+                <a:solidFill>
+                  <a:srgbClr val="FAFAFA"/>
+                </a:solidFill>
+                <a:latin typeface="Arial"/>
+              </a:rPr>
+              <a:t>of 1,000 shots, about 570x random guessing</a:t>
+            </a:r>
+          </a:p>
+        </p:txBody>
+      </p:sp>
+      <p:sp>
+        <p:nvSpPr>
+          <p:cNvPr id="6" name="TextBox 5"/>
+          <p:cNvSpPr txBox="1"/>
+          <p:nvPr/>
+        </p:nvSpPr>
+        <p:spPr>
+          <a:xfrm>
+            <a:off x="548640" y="3364992"/>
+            <a:ext cx="5303520" cy="350520"/>
+          </a:xfrm>
+          <a:prstGeom prst="rect">
+            <a:avLst/>
+          </a:prstGeom>
+          <a:noFill/>
+        </p:spPr>
+        <p:txBody>
+          <a:bodyPr wrap="none" lIns="0" rIns="0" tIns="0" bIns="0" anchor="t">
+            <a:spAutoFit/>
+          </a:bodyPr>
+          <a:lstStyle/>
+          <a:p>
+            <a:pPr algn="l">
+              <a:lnSpc>
+                <a:spcPts val="2400"/>
+              </a:lnSpc>
+            </a:pPr>
+            <a:r>
+              <a:rPr sz="2000" b="0" i="0">
+                <a:solidFill>
+                  <a:srgbClr val="FAFAFA"/>
+                </a:solidFill>
+                <a:latin typeface="Arial"/>
+              </a:rPr>
+              <a:t>Most frequent answer: the exact optimum</a:t>
+            </a:r>
+          </a:p>
+        </p:txBody>
+      </p:sp>
+      <p:sp>
+        <p:nvSpPr>
+          <p:cNvPr id="7" name="TextBox 6"/>
+          <p:cNvSpPr txBox="1"/>
+          <p:nvPr/>
+        </p:nvSpPr>
+        <p:spPr>
+          <a:xfrm>
+            <a:off x="548640" y="3840480"/>
+            <a:ext cx="5303520" cy="472440"/>
+          </a:xfrm>
+          <a:prstGeom prst="rect">
+            <a:avLst/>
+          </a:prstGeom>
+          <a:noFill/>
+        </p:spPr>
+        <p:txBody>
+          <a:bodyPr wrap="none" lIns="0" rIns="0" tIns="0" bIns="0" anchor="t">
+            <a:spAutoFit/>
+          </a:bodyPr>
+          <a:lstStyle/>
+          <a:p>
+            <a:pPr algn="l">
+              <a:lnSpc>
+                <a:spcPts val="1680"/>
+              </a:lnSpc>
+            </a:pPr>
+            <a:r>
+              <a:rPr sz="1400" b="0" i="1">
+                <a:solidFill>
+                  <a:srgbClr val="9AA3AA"/>
+                </a:solidFill>
+                <a:latin typeface="Arial"/>
+              </a:rPr>
+              <a:t>IonQ Forte 1 noise model (Qollab), 11 Oct 2026:</a:t>
+            </a:r>
+          </a:p>
+          <a:p>
+            <a:pPr algn="l">
+              <a:lnSpc>
+                <a:spcPts val="1680"/>
+              </a:lnSpc>
+            </a:pPr>
+            <a:r>
+              <a:rPr sz="1400" b="0" i="1">
+                <a:solidFill>
+                  <a:srgbClr val="9AA3AA"/>
+                </a:solidFill>
+                <a:latin typeface="Arial"/>
+              </a:rPr>
+              <a:t>varQITE ZY, 12 qubits, 66 two-qubit gates</a:t>
+            </a:r>
+          </a:p>
+        </p:txBody>
+      </p:sp>
+      <p:sp>
+        <p:nvSpPr>
+          <p:cNvPr id="8" name="TextBox 7"/>
+          <p:cNvSpPr txBox="1"/>
+          <p:nvPr/>
+        </p:nvSpPr>
+        <p:spPr>
+          <a:xfrm>
+            <a:off x="548640" y="4526280"/>
+            <a:ext cx="5303520" cy="655320"/>
+          </a:xfrm>
+          <a:prstGeom prst="rect">
+            <a:avLst/>
+          </a:prstGeom>
+          <a:noFill/>
+        </p:spPr>
+        <p:txBody>
+          <a:bodyPr wrap="none" lIns="0" rIns="0" tIns="0" bIns="0" anchor="t">
+            <a:spAutoFit/>
+          </a:bodyPr>
+          <a:lstStyle/>
+          <a:p>
+            <a:pPr algn="l">
+              <a:lnSpc>
+                <a:spcPts val="2400"/>
+              </a:lnSpc>
+            </a:pPr>
+            <a:r>
+              <a:rPr sz="2000" b="0" i="0">
+                <a:solidFill>
+                  <a:srgbClr val="FAFAFA"/>
+                </a:solidFill>
+                <a:latin typeface="Arial"/>
+              </a:rPr>
+              <a:t>Noiseless: 75.0 %. Noise costs 47 points,</a:t>
+            </a:r>
+          </a:p>
+          <a:p>
+            <a:pPr algn="l">
+              <a:lnSpc>
+                <a:spcPts val="2400"/>
+              </a:lnSpc>
+            </a:pPr>
+            <a:r>
+              <a:rPr sz="2000" b="0" i="0">
+                <a:solidFill>
+                  <a:srgbClr val="FAFAFA"/>
+                </a:solidFill>
+                <a:latin typeface="Arial"/>
+              </a:rPr>
+              <a:t>about 2x what we estimated.</a:t>
+            </a:r>
+          </a:p>
+        </p:txBody>
+      </p:sp>
+      <p:sp>
+        <p:nvSpPr>
+          <p:cNvPr id="9" name="TextBox 8"/>
+          <p:cNvSpPr txBox="1"/>
+          <p:nvPr/>
+        </p:nvSpPr>
+        <p:spPr>
+          <a:xfrm>
+            <a:off x="548640" y="5303520"/>
+            <a:ext cx="5303520" cy="594360"/>
+          </a:xfrm>
+          <a:prstGeom prst="rect">
+            <a:avLst/>
+          </a:prstGeom>
+          <a:noFill/>
+        </p:spPr>
+        <p:txBody>
+          <a:bodyPr wrap="none" lIns="0" rIns="0" tIns="0" bIns="0" anchor="t">
+            <a:spAutoFit/>
+          </a:bodyPr>
+          <a:lstStyle/>
+          <a:p>
+            <a:pPr algn="l">
+              <a:lnSpc>
+                <a:spcPts val="2160"/>
+              </a:lnSpc>
+            </a:pPr>
+            <a:r>
+              <a:rPr sz="1800" b="0" i="0">
+                <a:solidFill>
+                  <a:srgbClr val="9AA3AA"/>
+                </a:solidFill>
+                <a:latin typeface="Arial"/>
+              </a:rPr>
+              <a:t>Classical, same 1,000 tries: annealing finds it</a:t>
+            </a:r>
+          </a:p>
+          <a:p>
+            <a:pPr algn="l">
+              <a:lnSpc>
+                <a:spcPts val="2160"/>
+              </a:lnSpc>
+            </a:pPr>
+            <a:r>
+              <a:rPr sz="1800" b="0" i="0">
+                <a:solidFill>
+                  <a:srgbClr val="9AA3AA"/>
+                </a:solidFill>
+                <a:latin typeface="Arial"/>
+              </a:rPr>
+              <a:t>in 50 % of runs, local search in 51 %.</a:t>
             </a:r>
           </a:p>
         </p:txBody>
       </p:sp>
       <p:pic>
         <p:nvPicPr>
-          <p:cNvPr id="4" name="Picture 3" descr="Two line charts, for two equal devices and for CPU plus GPU, of the share of runs with 1,000 tries that find a near-best split, at 12, 16, 20 and 29 qubits. The QAOA line falls from above 90 percent at 12 qubits to below 1 percent at 29 qubits. Local search and simulated annealing also fall but stay higher; spectral bisection stays at 50 percent or more."/>
+          <p:cNvPr id="10" name="Picture 9" descr="Bar chart on a log scale of the share of shots that are the exact best split: random guessing 0.049 %, IonQ Forte 1 noise model 27.8 %, noiseless simulation 75.0 %. A dashed line marks our estimate of 54 %."/>
           <p:cNvPicPr>
             <a:picLocks noChangeAspect="1"/>
           </p:cNvPicPr>
@@ -7663,8 +9847,8 @@
         </p:blipFill>
         <p:spPr>
           <a:xfrm>
-            <a:off x="365760" y="1417320"/>
-            <a:ext cx="7040879" cy="4206240"/>
+            <a:off x="5989320" y="1417320"/>
+            <a:ext cx="5760720" cy="4297680"/>
           </a:xfrm>
           <a:prstGeom prst="rect">
             <a:avLst/>
@@ -7673,14 +9857,14 @@
       </p:pic>
       <p:sp>
         <p:nvSpPr>
-          <p:cNvPr id="5" name="TextBox 4"/>
-          <p:cNvSpPr txBox="1"/>
-          <p:nvPr/>
-        </p:nvSpPr>
-        <p:spPr>
-          <a:xfrm>
-            <a:off x="411480" y="5669280"/>
-            <a:ext cx="7040880" cy="472440"/>
+          <p:cNvPr id="11" name="TextBox 10"/>
+          <p:cNvSpPr txBox="1"/>
+          <p:nvPr/>
+        </p:nvSpPr>
+        <p:spPr>
+          <a:xfrm>
+            <a:off x="5989320" y="5806440"/>
+            <a:ext cx="5760720" cy="259080"/>
           </a:xfrm>
           <a:prstGeom prst="rect">
             <a:avLst/>
@@ -7705,180 +9889,14 @@
                 </a:solidFill>
                 <a:latin typeface="Arial"/>
               </a:rPr>
-              <a:t>server simulation, noiseless, 10 Oct 2026 (cases 2 and 9, seeds 7-9);</a:t>
-            </a:r>
-          </a:p>
-          <a:p>
-            <a:pPr algn="l">
-              <a:lnSpc>
-                <a:spcPts val="1680"/>
-              </a:lnSpc>
-            </a:pPr>
-            <a:r>
-              <a:rPr sz="1400" b="0" i="1">
-                <a:solidFill>
-                  <a:srgbClr val="9AA3AA"/>
-                </a:solidFill>
-                <a:latin typeface="Arial"/>
-              </a:rPr>
-              <a:t>QAOA = our best setting per size; the other lines are classical</a:t>
-            </a:r>
-          </a:p>
-        </p:txBody>
-      </p:sp>
-      <p:pic>
-        <p:nvPicPr>
-          <p:cNvPr id="6" name="Picture 5" descr="Horizontal bar chart on a log scale of tries per optimum: random guessing 2,048, simulated annealing 1,181, local search 1,111, IonQ noise model 3.6, noiseless 1.3."/>
-          <p:cNvPicPr>
-            <a:picLocks noChangeAspect="1"/>
-          </p:cNvPicPr>
-          <p:nvPr/>
-        </p:nvPicPr>
-        <p:blipFill>
-          <a:blip r:embed="rId3"/>
-          <a:stretch>
-            <a:fillRect/>
-          </a:stretch>
-        </p:blipFill>
-        <p:spPr>
-          <a:xfrm>
-            <a:off x="7543800" y="1417320"/>
-            <a:ext cx="4297680" cy="3017520"/>
-          </a:xfrm>
-          <a:prstGeom prst="rect">
-            <a:avLst/>
-          </a:prstGeom>
-        </p:spPr>
-      </p:pic>
-      <p:sp>
-        <p:nvSpPr>
-          <p:cNvPr id="7" name="TextBox 6"/>
-          <p:cNvSpPr txBox="1"/>
-          <p:nvPr/>
-        </p:nvSpPr>
-        <p:spPr>
-          <a:xfrm>
-            <a:off x="7589520" y="4480560"/>
-            <a:ext cx="4297680" cy="472440"/>
-          </a:xfrm>
-          <a:prstGeom prst="rect">
-            <a:avLst/>
-          </a:prstGeom>
-          <a:noFill/>
-        </p:spPr>
-        <p:txBody>
-          <a:bodyPr wrap="none" lIns="0" rIns="0" tIns="0" bIns="0" anchor="t">
-            <a:spAutoFit/>
-          </a:bodyPr>
-          <a:lstStyle/>
-          <a:p>
-            <a:pPr algn="l">
-              <a:lnSpc>
-                <a:spcPts val="1680"/>
-              </a:lnSpc>
-            </a:pPr>
-            <a:r>
-              <a:rPr sz="1400" b="0" i="1">
-                <a:solidFill>
-                  <a:srgbClr val="9AA3AA"/>
-                </a:solidFill>
-                <a:latin typeface="Arial"/>
-              </a:rPr>
-              <a:t>12 qubits: IonQ Forte 1 noise model (Qollab),</a:t>
-            </a:r>
-          </a:p>
-          <a:p>
-            <a:pPr algn="l">
-              <a:lnSpc>
-                <a:spcPts val="1680"/>
-              </a:lnSpc>
-            </a:pPr>
-            <a:r>
-              <a:rPr sz="1400" b="0" i="1">
-                <a:solidFill>
-                  <a:srgbClr val="9AA3AA"/>
-                </a:solidFill>
-                <a:latin typeface="Arial"/>
-              </a:rPr>
-              <a:t>classical</a:t>
-            </a:r>
-          </a:p>
-        </p:txBody>
-      </p:sp>
-      <p:sp>
-        <p:nvSpPr>
-          <p:cNvPr id="8" name="TextBox 7"/>
-          <p:cNvSpPr txBox="1"/>
-          <p:nvPr/>
-        </p:nvSpPr>
-        <p:spPr>
-          <a:xfrm>
-            <a:off x="7589520" y="5029200"/>
-            <a:ext cx="4297680" cy="868680"/>
-          </a:xfrm>
-          <a:prstGeom prst="rect">
-            <a:avLst/>
-          </a:prstGeom>
-          <a:noFill/>
-        </p:spPr>
-        <p:txBody>
-          <a:bodyPr wrap="none" lIns="0" rIns="0" tIns="0" bIns="0" anchor="t">
-            <a:spAutoFit/>
-          </a:bodyPr>
-          <a:lstStyle/>
-          <a:p>
-            <a:pPr algn="l">
-              <a:lnSpc>
-                <a:spcPts val="2160"/>
-              </a:lnSpc>
-            </a:pPr>
-            <a:r>
-              <a:rPr sz="1800" b="0" i="0">
-                <a:solidFill>
-                  <a:srgbClr val="FAFAFA"/>
-                </a:solidFill>
-                <a:latin typeface="Arial"/>
-              </a:rPr>
-              <a:t>Caveats: varQITE first needed 7,581</a:t>
-            </a:r>
-          </a:p>
-          <a:p>
-            <a:pPr algn="l">
-              <a:lnSpc>
-                <a:spcPts val="2160"/>
-              </a:lnSpc>
-            </a:pPr>
-            <a:r>
-              <a:rPr sz="1800" b="0" i="0">
-                <a:solidFill>
-                  <a:srgbClr val="FAFAFA"/>
-                </a:solidFill>
-                <a:latin typeface="Arial"/>
-              </a:rPr>
-              <a:t>noiseless training circuits. A shot is not</a:t>
-            </a:r>
-          </a:p>
-          <a:p>
-            <a:pPr algn="l">
-              <a:lnSpc>
-                <a:spcPts val="2160"/>
-              </a:lnSpc>
-            </a:pPr>
-            <a:r>
-              <a:rPr sz="1800" b="0" i="0">
-                <a:solidFill>
-                  <a:srgbClr val="FAFAFA"/>
-                </a:solidFill>
-                <a:latin typeface="Arial"/>
-              </a:rPr>
-              <a:t>the same work as a classical evaluation.</a:t>
-            </a:r>
-          </a:p>
-        </p:txBody>
-      </p:sp>
-      <p:sp>
-        <p:nvSpPr>
-          <p:cNvPr id="9" name="TextBox 8"/>
+              <a:t>random and noiseless: noiseless simulation; classical: classical</a:t>
+            </a:r>
+          </a:p>
+        </p:txBody>
+      </p:sp>
+      <p:sp>
+        <p:nvSpPr>
+          <p:cNvPr id="12" name="TextBox 11"/>
           <p:cNvSpPr txBox="1"/>
           <p:nvPr/>
         </p:nvSpPr>
@@ -7917,7 +9935,7 @@
       </p:sp>
       <p:sp>
         <p:nvSpPr>
-          <p:cNvPr id="10" name="TextBox 9"/>
+          <p:cNvPr id="13" name="TextBox 12"/>
           <p:cNvSpPr txBox="1"/>
           <p:nvPr/>
         </p:nvSpPr>
@@ -8014,7 +10032,7 @@
                 </a:solidFill>
                 <a:latin typeface="Arial"/>
               </a:rPr>
-              <a:t>DEMO  ·  LIMITS  ·  NEXT STEPS</a:t>
+              <a:t>SCALING  ·  HONEST COMPARISON</a:t>
             </a:r>
           </a:p>
         </p:txBody>
@@ -8053,14 +10071,14 @@
                 </a:solidFill>
                 <a:latin typeface="Arial"/>
               </a:rPr>
-              <a:t>Run it on Qollab</a:t>
+              <a:t>Bigger meshes: classical methods win</a:t>
             </a:r>
           </a:p>
         </p:txBody>
       </p:sp>
       <p:pic>
         <p:nvPicPr>
-          <p:cNvPr id="4" name="Picture 3" descr="Placeholder for a live Qollab screenshot. It shows lines of the recorded console output: running on ionq_simulator, 1,000 shots, measured P(optimum) 0.2780, and the two optimal splits measured 146 and 132 times."/>
+          <p:cNvPr id="4" name="Picture 3" descr="Two line charts, for two equal devices and for CPU plus GPU, of the share of runs with 1,000 tries that find a near-best split, at 12, 16, 20 and 29 qubits. The QAOA line falls from above 90 percent at 12 qubits to below 1 percent at 29 qubits. Local search and simulated annealing also fall but stay higher; spectral bisection stays at 50 percent or more."/>
           <p:cNvPicPr>
             <a:picLocks noChangeAspect="1"/>
           </p:cNvPicPr>
@@ -8074,8 +10092,8 @@
         </p:blipFill>
         <p:spPr>
           <a:xfrm>
-            <a:off x="457200" y="1463040"/>
-            <a:ext cx="5257800" cy="3200400"/>
+            <a:off x="365760" y="1417320"/>
+            <a:ext cx="7040879" cy="4206240"/>
           </a:xfrm>
           <a:prstGeom prst="rect">
             <a:avLst/>
@@ -8090,8 +10108,142 @@
         </p:nvSpPr>
         <p:spPr>
           <a:xfrm>
-            <a:off x="548640" y="4754880"/>
-            <a:ext cx="5303520" cy="320040"/>
+            <a:off x="411480" y="5669280"/>
+            <a:ext cx="7040880" cy="472440"/>
+          </a:xfrm>
+          <a:prstGeom prst="rect">
+            <a:avLst/>
+          </a:prstGeom>
+          <a:noFill/>
+        </p:spPr>
+        <p:txBody>
+          <a:bodyPr wrap="none" lIns="0" rIns="0" tIns="0" bIns="0" anchor="t">
+            <a:spAutoFit/>
+          </a:bodyPr>
+          <a:lstStyle/>
+          <a:p>
+            <a:pPr algn="l">
+              <a:lnSpc>
+                <a:spcPts val="1680"/>
+              </a:lnSpc>
+            </a:pPr>
+            <a:r>
+              <a:rPr sz="1400" b="0" i="1">
+                <a:solidFill>
+                  <a:srgbClr val="9AA3AA"/>
+                </a:solidFill>
+                <a:latin typeface="Arial"/>
+              </a:rPr>
+              <a:t>server simulation, noiseless, 10 Oct 2026 (cases 2 and 9, seeds 7-9);</a:t>
+            </a:r>
+          </a:p>
+          <a:p>
+            <a:pPr algn="l">
+              <a:lnSpc>
+                <a:spcPts val="1680"/>
+              </a:lnSpc>
+            </a:pPr>
+            <a:r>
+              <a:rPr sz="1400" b="0" i="1">
+                <a:solidFill>
+                  <a:srgbClr val="9AA3AA"/>
+                </a:solidFill>
+                <a:latin typeface="Arial"/>
+              </a:rPr>
+              <a:t>QAOA = our best setting per size; the other lines are classical</a:t>
+            </a:r>
+          </a:p>
+        </p:txBody>
+      </p:sp>
+      <p:pic>
+        <p:nvPicPr>
+          <p:cNvPr id="6" name="Picture 5" descr="Horizontal bar chart on a log scale of tries per optimum: random guessing 2,048, simulated annealing 1,181, local search 1,111, IonQ noise model 3.6, noiseless 1.3."/>
+          <p:cNvPicPr>
+            <a:picLocks noChangeAspect="1"/>
+          </p:cNvPicPr>
+          <p:nvPr/>
+        </p:nvPicPr>
+        <p:blipFill>
+          <a:blip r:embed="rId3"/>
+          <a:stretch>
+            <a:fillRect/>
+          </a:stretch>
+        </p:blipFill>
+        <p:spPr>
+          <a:xfrm>
+            <a:off x="7543800" y="1417320"/>
+            <a:ext cx="4297680" cy="3017520"/>
+          </a:xfrm>
+          <a:prstGeom prst="rect">
+            <a:avLst/>
+          </a:prstGeom>
+        </p:spPr>
+      </p:pic>
+      <p:sp>
+        <p:nvSpPr>
+          <p:cNvPr id="7" name="TextBox 6"/>
+          <p:cNvSpPr txBox="1"/>
+          <p:nvPr/>
+        </p:nvSpPr>
+        <p:spPr>
+          <a:xfrm>
+            <a:off x="7589520" y="4480560"/>
+            <a:ext cx="4297680" cy="472440"/>
+          </a:xfrm>
+          <a:prstGeom prst="rect">
+            <a:avLst/>
+          </a:prstGeom>
+          <a:noFill/>
+        </p:spPr>
+        <p:txBody>
+          <a:bodyPr wrap="none" lIns="0" rIns="0" tIns="0" bIns="0" anchor="t">
+            <a:spAutoFit/>
+          </a:bodyPr>
+          <a:lstStyle/>
+          <a:p>
+            <a:pPr algn="l">
+              <a:lnSpc>
+                <a:spcPts val="1680"/>
+              </a:lnSpc>
+            </a:pPr>
+            <a:r>
+              <a:rPr sz="1400" b="0" i="1">
+                <a:solidFill>
+                  <a:srgbClr val="9AA3AA"/>
+                </a:solidFill>
+                <a:latin typeface="Arial"/>
+              </a:rPr>
+              <a:t>12 qubits: IonQ Forte 1 noise model (Qollab),</a:t>
+            </a:r>
+          </a:p>
+          <a:p>
+            <a:pPr algn="l">
+              <a:lnSpc>
+                <a:spcPts val="1680"/>
+              </a:lnSpc>
+            </a:pPr>
+            <a:r>
+              <a:rPr sz="1400" b="0" i="1">
+                <a:solidFill>
+                  <a:srgbClr val="9AA3AA"/>
+                </a:solidFill>
+                <a:latin typeface="Arial"/>
+              </a:rPr>
+              <a:t>classical</a:t>
+            </a:r>
+          </a:p>
+        </p:txBody>
+      </p:sp>
+      <p:sp>
+        <p:nvSpPr>
+          <p:cNvPr id="8" name="TextBox 7"/>
+          <p:cNvSpPr txBox="1"/>
+          <p:nvPr/>
+        </p:nvSpPr>
+        <p:spPr>
+          <a:xfrm>
+            <a:off x="7589520" y="5029200"/>
+            <a:ext cx="4297680" cy="868680"/>
           </a:xfrm>
           <a:prstGeom prst="rect">
             <a:avLst/>
@@ -8116,32 +10268,9 @@
                 </a:solidFill>
                 <a:latin typeface="Arial"/>
               </a:rPr>
-              <a:t>Qollab project: [pending]      Video: [pending]</a:t>
-            </a:r>
-          </a:p>
-        </p:txBody>
-      </p:sp>
-      <p:sp>
-        <p:nvSpPr>
-          <p:cNvPr id="6" name="TextBox 5"/>
-          <p:cNvSpPr txBox="1"/>
-          <p:nvPr/>
-        </p:nvSpPr>
-        <p:spPr>
-          <a:xfrm>
-            <a:off x="548640" y="5138928"/>
-            <a:ext cx="5303520" cy="320040"/>
-          </a:xfrm>
-          <a:prstGeom prst="rect">
-            <a:avLst/>
-          </a:prstGeom>
-          <a:noFill/>
-        </p:spPr>
-        <p:txBody>
-          <a:bodyPr wrap="none" lIns="0" rIns="0" tIns="0" bIns="0" anchor="t">
-            <a:spAutoFit/>
-          </a:bodyPr>
-          <a:lstStyle/>
+              <a:t>Caveats: varQITE first needed 7,581</a:t>
+            </a:r>
+          </a:p>
           <a:p>
             <a:pPr algn="l">
               <a:lnSpc>
@@ -8155,71 +10284,9 @@
                 </a:solidFill>
                 <a:latin typeface="Arial"/>
               </a:rPr>
-              <a:t>GitHub: Oussema-t/zollerqu-qollab (branch mesh)</a:t>
-            </a:r>
-          </a:p>
-        </p:txBody>
-      </p:sp>
-      <p:sp>
-        <p:nvSpPr>
-          <p:cNvPr id="7" name="TextBox 6"/>
-          <p:cNvSpPr txBox="1"/>
-          <p:nvPr/>
-        </p:nvSpPr>
-        <p:spPr>
-          <a:xfrm>
-            <a:off x="6126480" y="1463040"/>
-            <a:ext cx="5669280" cy="411479"/>
-          </a:xfrm>
-          <a:prstGeom prst="rect">
-            <a:avLst/>
-          </a:prstGeom>
-          <a:noFill/>
-        </p:spPr>
-        <p:txBody>
-          <a:bodyPr wrap="none" lIns="0" rIns="0" tIns="0" bIns="0" anchor="t">
-            <a:spAutoFit/>
-          </a:bodyPr>
-          <a:lstStyle/>
-          <a:p>
-            <a:pPr algn="l">
-              <a:lnSpc>
-                <a:spcPts val="2879"/>
-              </a:lnSpc>
-            </a:pPr>
-            <a:r>
-              <a:rPr sz="2400" b="1" i="0">
-                <a:solidFill>
-                  <a:srgbClr val="9FB4D1"/>
-                </a:solidFill>
-                <a:latin typeface="Arial"/>
-              </a:rPr>
-              <a:t>Limits</a:t>
-            </a:r>
-          </a:p>
-        </p:txBody>
-      </p:sp>
-      <p:sp>
-        <p:nvSpPr>
-          <p:cNvPr id="8" name="TextBox 7"/>
-          <p:cNvSpPr txBox="1"/>
-          <p:nvPr/>
-        </p:nvSpPr>
-        <p:spPr>
-          <a:xfrm>
-            <a:off x="6126480" y="1920240"/>
-            <a:ext cx="5669280" cy="1143000"/>
-          </a:xfrm>
-          <a:prstGeom prst="rect">
-            <a:avLst/>
-          </a:prstGeom>
-          <a:noFill/>
-        </p:spPr>
-        <p:txBody>
-          <a:bodyPr wrap="none" lIns="0" rIns="0" tIns="0" bIns="0" anchor="t">
-            <a:spAutoFit/>
-          </a:bodyPr>
-          <a:lstStyle/>
+              <a:t>noiseless training circuits. A shot is not</a:t>
+            </a:r>
+          </a:p>
           <a:p>
             <a:pPr algn="l">
               <a:lnSpc>
@@ -8233,55 +10300,7 @@
                 </a:solidFill>
                 <a:latin typeface="Arial"/>
               </a:rPr>
-              <a:t>1. A noisy simulator, not hardware.</a:t>
-            </a:r>
-          </a:p>
-          <a:p>
-            <a:pPr algn="l">
-              <a:lnSpc>
-                <a:spcPts val="2160"/>
-              </a:lnSpc>
-            </a:pPr>
-            <a:r>
-              <a:rPr sz="1800" b="0" i="0">
-                <a:solidFill>
-                  <a:srgbClr val="FAFAFA"/>
-                </a:solidFill>
-                <a:latin typeface="Arial"/>
-              </a:rPr>
-              <a:t>2. CPU + GPU: the varQITE circuit fails. One</a:t>
-            </a:r>
-          </a:p>
-          <a:p>
-            <a:pPr algn="l">
-              <a:lnSpc>
-                <a:spcPts val="2160"/>
-              </a:lnSpc>
-            </a:pPr>
-            <a:r>
-              <a:rPr sz="1800" b="0" i="0">
-                <a:solidFill>
-                  <a:srgbClr val="FAFAFA"/>
-                </a:solidFill>
-                <a:latin typeface="Arial"/>
-              </a:rPr>
-              <a:t>    qubit stays 50/50, and we proved why.</a:t>
-            </a:r>
-          </a:p>
-          <a:p>
-            <a:pPr algn="l">
-              <a:lnSpc>
-                <a:spcPts val="2160"/>
-              </a:lnSpc>
-            </a:pPr>
-            <a:r>
-              <a:rPr sz="1800" b="0" i="0">
-                <a:solidFill>
-                  <a:srgbClr val="FAFAFA"/>
-                </a:solidFill>
-                <a:latin typeface="Arial"/>
-              </a:rPr>
-              <a:t>3. Beyond 12 qubits, classical methods win.</a:t>
+              <a:t>the same work as a classical evaluation.</a:t>
             </a:r>
           </a:p>
         </p:txBody>
@@ -8289,155 +10308,6 @@
       <p:sp>
         <p:nvSpPr>
           <p:cNvPr id="9" name="TextBox 8"/>
-          <p:cNvSpPr txBox="1"/>
-          <p:nvPr/>
-        </p:nvSpPr>
-        <p:spPr>
-          <a:xfrm>
-            <a:off x="6126480" y="3611880"/>
-            <a:ext cx="5669280" cy="411479"/>
-          </a:xfrm>
-          <a:prstGeom prst="rect">
-            <a:avLst/>
-          </a:prstGeom>
-          <a:noFill/>
-        </p:spPr>
-        <p:txBody>
-          <a:bodyPr wrap="none" lIns="0" rIns="0" tIns="0" bIns="0" anchor="t">
-            <a:spAutoFit/>
-          </a:bodyPr>
-          <a:lstStyle/>
-          <a:p>
-            <a:pPr algn="l">
-              <a:lnSpc>
-                <a:spcPts val="2879"/>
-              </a:lnSpc>
-            </a:pPr>
-            <a:r>
-              <a:rPr sz="2400" b="1" i="0">
-                <a:solidFill>
-                  <a:srgbClr val="9FB4D1"/>
-                </a:solidFill>
-                <a:latin typeface="Arial"/>
-              </a:rPr>
-              <a:t>Next steps</a:t>
-            </a:r>
-          </a:p>
-        </p:txBody>
-      </p:sp>
-      <p:sp>
-        <p:nvSpPr>
-          <p:cNvPr id="10" name="TextBox 9"/>
-          <p:cNvSpPr txBox="1"/>
-          <p:nvPr/>
-        </p:nvSpPr>
-        <p:spPr>
-          <a:xfrm>
-            <a:off x="6126480" y="4069080"/>
-            <a:ext cx="5669280" cy="868680"/>
-          </a:xfrm>
-          <a:prstGeom prst="rect">
-            <a:avLst/>
-          </a:prstGeom>
-          <a:noFill/>
-        </p:spPr>
-        <p:txBody>
-          <a:bodyPr wrap="none" lIns="0" rIns="0" tIns="0" bIns="0" anchor="t">
-            <a:spAutoFit/>
-          </a:bodyPr>
-          <a:lstStyle/>
-          <a:p>
-            <a:pPr algn="l">
-              <a:lnSpc>
-                <a:spcPts val="2160"/>
-              </a:lnSpc>
-            </a:pPr>
-            <a:r>
-              <a:rPr sz="1800" b="0" i="0">
-                <a:solidFill>
-                  <a:srgbClr val="FAFAFA"/>
-                </a:solidFill>
-                <a:latin typeface="Arial"/>
-              </a:rPr>
-              <a:t>1. Run the other circuits on the noise model.</a:t>
-            </a:r>
-          </a:p>
-          <a:p>
-            <a:pPr algn="l">
-              <a:lnSpc>
-                <a:spcPts val="2160"/>
-              </a:lnSpc>
-            </a:pPr>
-            <a:r>
-              <a:rPr sz="1800" b="0" i="0">
-                <a:solidFill>
-                  <a:srgbClr val="FAFAFA"/>
-                </a:solidFill>
-                <a:latin typeface="Arial"/>
-              </a:rPr>
-              <a:t>2. Repair the circuit for unequal shares.</a:t>
-            </a:r>
-          </a:p>
-          <a:p>
-            <a:pPr algn="l">
-              <a:lnSpc>
-                <a:spcPts val="2160"/>
-              </a:lnSpc>
-            </a:pPr>
-            <a:r>
-              <a:rPr sz="1800" b="0" i="0">
-                <a:solidFill>
-                  <a:srgbClr val="FAFAFA"/>
-                </a:solidFill>
-                <a:latin typeface="Arial"/>
-              </a:rPr>
-              <a:t>3. Split between more than two devices.</a:t>
-            </a:r>
-          </a:p>
-        </p:txBody>
-      </p:sp>
-      <p:sp>
-        <p:nvSpPr>
-          <p:cNvPr id="11" name="TextBox 10"/>
-          <p:cNvSpPr txBox="1"/>
-          <p:nvPr/>
-        </p:nvSpPr>
-        <p:spPr>
-          <a:xfrm>
-            <a:off x="548640" y="5760720"/>
-            <a:ext cx="10972800" cy="350520"/>
-          </a:xfrm>
-          <a:prstGeom prst="rect">
-            <a:avLst/>
-          </a:prstGeom>
-          <a:noFill/>
-        </p:spPr>
-        <p:txBody>
-          <a:bodyPr wrap="none" lIns="0" rIns="0" tIns="0" bIns="0" anchor="t">
-            <a:spAutoFit/>
-          </a:bodyPr>
-          <a:lstStyle/>
-          <a:p>
-            <a:pPr algn="l">
-              <a:lnSpc>
-                <a:spcPts val="2400"/>
-              </a:lnSpc>
-            </a:pPr>
-            <a:r>
-              <a:rPr sz="2000" b="0" i="0">
-                <a:solidFill>
-                  <a:srgbClr val="FAFAFA"/>
-                </a:solidFill>
-                <a:latin typeface="Arial"/>
-              </a:rPr>
-              <a:t>This effort is supported by Qollab &amp; IonQ</a:t>
-            </a:r>
-          </a:p>
-        </p:txBody>
-      </p:sp>
-      <p:sp>
-        <p:nvSpPr>
-          <p:cNvPr id="12" name="TextBox 11"/>
           <p:cNvSpPr txBox="1"/>
           <p:nvPr/>
         </p:nvSpPr>
@@ -8476,7 +10346,7 @@
       </p:sp>
       <p:sp>
         <p:nvSpPr>
-          <p:cNvPr id="13" name="TextBox 12"/>
+          <p:cNvPr id="10" name="TextBox 9"/>
           <p:cNvSpPr txBox="1"/>
           <p:nvPr/>
         </p:nvSpPr>
@@ -8573,7 +10443,7 @@
                 </a:solidFill>
                 <a:latin typeface="Arial"/>
               </a:rPr>
-              <a:t>APPENDIX</a:t>
+              <a:t>IMPROVING QAOA  ·  HPC</a:t>
             </a:r>
           </a:p>
         </p:txBody>
@@ -8587,79 +10457,72 @@
         <p:spPr>
           <a:xfrm>
             <a:off x="548640" y="777240"/>
-            <a:ext cx="11155680" cy="594360"/>
-          </a:xfrm>
-          <a:prstGeom prst="rect">
-            <a:avLst/>
-          </a:prstGeom>
-          <a:noFill/>
-        </p:spPr>
-        <p:txBody>
-          <a:bodyPr wrap="none" lIns="0" rIns="0" tIns="0" bIns="0" anchor="t">
-            <a:spAutoFit/>
-          </a:bodyPr>
-          <a:lstStyle/>
-          <a:p>
-            <a:pPr algn="l">
-              <a:lnSpc>
-                <a:spcPts val="4320"/>
-              </a:lnSpc>
-            </a:pPr>
-            <a:r>
-              <a:rPr sz="3600" b="1" i="0">
+            <a:ext cx="11155680" cy="533400"/>
+          </a:xfrm>
+          <a:prstGeom prst="rect">
+            <a:avLst/>
+          </a:prstGeom>
+          <a:noFill/>
+        </p:spPr>
+        <p:txBody>
+          <a:bodyPr wrap="none" lIns="0" rIns="0" tIns="0" bIns="0" anchor="t">
+            <a:spAutoFit/>
+          </a:bodyPr>
+          <a:lstStyle/>
+          <a:p>
+            <a:pPr algn="l">
+              <a:lnSpc>
+                <a:spcPts val="3840"/>
+              </a:lnSpc>
+            </a:pPr>
+            <a:r>
+              <a:rPr sz="3200" b="1" i="0">
                 <a:solidFill>
                   <a:srgbClr val="FAFAFA"/>
                 </a:solidFill>
                 <a:latin typeface="Arial"/>
               </a:rPr>
-              <a:t>Both device scenarios at 12 qubits</a:t>
-            </a:r>
-          </a:p>
-        </p:txBody>
-      </p:sp>
-      <p:sp>
-        <p:nvSpPr>
-          <p:cNvPr id="4" name="Rounded Rectangle 3"/>
-          <p:cNvSpPr/>
-          <p:nvPr/>
-        </p:nvSpPr>
-        <p:spPr>
-          <a:xfrm>
-            <a:off x="548640" y="1572768"/>
-            <a:ext cx="11109960" cy="731520"/>
-          </a:xfrm>
-          <a:prstGeom prst="roundRect">
-            <a:avLst>
-              <a:gd name="adj" fmla="val 15000"/>
-            </a:avLst>
-          </a:prstGeom>
-          <a:solidFill>
-            <a:srgbClr val="1A242B"/>
-          </a:solidFill>
-          <a:ln>
-            <a:noFill/>
-          </a:ln>
-          <a:effectLst/>
-        </p:spPr>
-        <p:style>
-          <a:lnRef idx="1">
-            <a:schemeClr val="accent1"/>
-          </a:lnRef>
-          <a:fillRef idx="3">
-            <a:schemeClr val="accent1"/>
-          </a:fillRef>
-          <a:effectRef idx="2">
-            <a:schemeClr val="accent1"/>
-          </a:effectRef>
-          <a:fontRef idx="minor">
-            <a:schemeClr val="lt1"/>
-          </a:fontRef>
-        </p:style>
-        <p:txBody>
-          <a:bodyPr rtlCol="0" anchor="ctr"/>
-          <a:lstStyle/>
-          <a:p>
-            <a:pPr algn="ctr"/>
+              <a:t>Tuning QAOA itself: about 20x more near-best answers</a:t>
+            </a:r>
+          </a:p>
+        </p:txBody>
+      </p:sp>
+      <p:sp>
+        <p:nvSpPr>
+          <p:cNvPr id="4" name="TextBox 3"/>
+          <p:cNvSpPr txBox="1"/>
+          <p:nvPr/>
+        </p:nvSpPr>
+        <p:spPr>
+          <a:xfrm>
+            <a:off x="548640" y="1463040"/>
+            <a:ext cx="4297680" cy="350520"/>
+          </a:xfrm>
+          <a:prstGeom prst="rect">
+            <a:avLst/>
+          </a:prstGeom>
+          <a:noFill/>
+        </p:spPr>
+        <p:txBody>
+          <a:bodyPr wrap="none" lIns="0" rIns="0" tIns="0" bIns="0" anchor="t">
+            <a:spAutoFit/>
+          </a:bodyPr>
+          <a:lstStyle/>
+          <a:p>
+            <a:pPr algn="l">
+              <a:lnSpc>
+                <a:spcPts val="2400"/>
+              </a:lnSpc>
+            </a:pPr>
+            <a:r>
+              <a:rPr sz="2000" b="1" i="0">
+                <a:solidFill>
+                  <a:srgbClr val="9FB4D1"/>
+                </a:solidFill>
+                <a:latin typeface="Arial"/>
+              </a:rPr>
+              <a:t>QAOA types we built</a:t>
+            </a:r>
           </a:p>
         </p:txBody>
       </p:sp>
@@ -8671,33 +10534,161 @@
         </p:nvSpPr>
         <p:spPr>
           <a:xfrm>
-            <a:off x="777240" y="1737360"/>
-            <a:ext cx="2011680" cy="320040"/>
-          </a:xfrm>
-          <a:prstGeom prst="rect">
-            <a:avLst/>
-          </a:prstGeom>
-          <a:noFill/>
-        </p:spPr>
-        <p:txBody>
-          <a:bodyPr wrap="none" lIns="0" rIns="0" tIns="0" bIns="0" anchor="t">
-            <a:spAutoFit/>
-          </a:bodyPr>
-          <a:lstStyle/>
-          <a:p>
-            <a:pPr algn="l">
-              <a:lnSpc>
-                <a:spcPts val="2160"/>
-              </a:lnSpc>
-            </a:pPr>
-            <a:r>
-              <a:rPr sz="1800" b="1" i="0">
-                <a:solidFill>
-                  <a:srgbClr val="9FB4D1"/>
-                </a:solidFill>
-                <a:latin typeface="Arial"/>
-              </a:rPr>
-              <a:t>Scenario</a:t>
+            <a:off x="548640" y="1874519"/>
+            <a:ext cx="4343400" cy="2240279"/>
+          </a:xfrm>
+          <a:prstGeom prst="rect">
+            <a:avLst/>
+          </a:prstGeom>
+          <a:noFill/>
+        </p:spPr>
+        <p:txBody>
+          <a:bodyPr wrap="none" lIns="0" rIns="0" tIns="0" bIns="0" anchor="t">
+            <a:spAutoFit/>
+          </a:bodyPr>
+          <a:lstStyle/>
+          <a:p>
+            <a:pPr algn="l">
+              <a:lnSpc>
+                <a:spcPts val="1920"/>
+              </a:lnSpc>
+            </a:pPr>
+            <a:r>
+              <a:rPr sz="1600" b="0" i="0">
+                <a:solidFill>
+                  <a:srgbClr val="FAFAFA"/>
+                </a:solidFill>
+                <a:latin typeface="Arial"/>
+              </a:rPr>
+              <a:t>standard QAOA, all angles tuned</a:t>
+            </a:r>
+          </a:p>
+          <a:p>
+            <a:pPr algn="l">
+              <a:lnSpc>
+                <a:spcPts val="1920"/>
+              </a:lnSpc>
+            </a:pPr>
+            <a:r>
+              <a:rPr sz="1600" b="0" i="0">
+                <a:solidFill>
+                  <a:srgbClr val="FAFAFA"/>
+                </a:solidFill>
+                <a:latin typeface="Arial"/>
+              </a:rPr>
+              <a:t>   (5 optimisers: COBYLA, Nelder-Mead,</a:t>
+            </a:r>
+          </a:p>
+          <a:p>
+            <a:pPr algn="l">
+              <a:lnSpc>
+                <a:spcPts val="1920"/>
+              </a:lnSpc>
+            </a:pPr>
+            <a:r>
+              <a:rPr sz="1600" b="0" i="0">
+                <a:solidFill>
+                  <a:srgbClr val="FAFAFA"/>
+                </a:solidFill>
+                <a:latin typeface="Arial"/>
+              </a:rPr>
+              <a:t>   Powell, L-BFGS-B, SPSA)</a:t>
+            </a:r>
+          </a:p>
+          <a:p>
+            <a:pPr algn="l">
+              <a:lnSpc>
+                <a:spcPts val="1920"/>
+              </a:lnSpc>
+            </a:pPr>
+            <a:r>
+              <a:rPr sz="1600" b="0" i="0">
+                <a:solidFill>
+                  <a:srgbClr val="FAFAFA"/>
+                </a:solidFill>
+                <a:latin typeface="Arial"/>
+              </a:rPr>
+              <a:t>LR-QAOA (linear ramp)</a:t>
+            </a:r>
+          </a:p>
+          <a:p>
+            <a:pPr algn="l">
+              <a:lnSpc>
+                <a:spcPts val="1920"/>
+              </a:lnSpc>
+            </a:pPr>
+            <a:r>
+              <a:rPr sz="1600" b="0" i="0">
+                <a:solidFill>
+                  <a:srgbClr val="FAFAFA"/>
+                </a:solidFill>
+                <a:latin typeface="Arial"/>
+              </a:rPr>
+              <a:t>warm-start QAOA (spectral split)</a:t>
+            </a:r>
+          </a:p>
+          <a:p>
+            <a:pPr algn="l">
+              <a:lnSpc>
+                <a:spcPts val="1920"/>
+              </a:lnSpc>
+            </a:pPr>
+            <a:r>
+              <a:rPr sz="1600" b="0" i="0">
+                <a:solidFill>
+                  <a:srgbClr val="FAFAFA"/>
+                </a:solidFill>
+                <a:latin typeface="Arial"/>
+              </a:rPr>
+              <a:t>CVaR-QAOA</a:t>
+            </a:r>
+          </a:p>
+          <a:p>
+            <a:pPr algn="l">
+              <a:lnSpc>
+                <a:spcPts val="1920"/>
+              </a:lnSpc>
+            </a:pPr>
+            <a:r>
+              <a:rPr sz="1600" b="0" i="0">
+                <a:solidFill>
+                  <a:srgbClr val="FAFAFA"/>
+                </a:solidFill>
+                <a:latin typeface="Arial"/>
+              </a:rPr>
+              <a:t>symmetry-reduced QAOA</a:t>
+            </a:r>
+          </a:p>
+          <a:p>
+            <a:pPr algn="l">
+              <a:lnSpc>
+                <a:spcPts val="1920"/>
+              </a:lnSpc>
+            </a:pPr>
+            <a:r>
+              <a:rPr sz="1600" b="0" i="0">
+                <a:solidFill>
+                  <a:srgbClr val="FAFAFA"/>
+                </a:solidFill>
+                <a:latin typeface="Arial"/>
+              </a:rPr>
+              <a:t>Iceberg-protected QAOA (error detection)</a:t>
+            </a:r>
+          </a:p>
+          <a:p>
+            <a:pPr algn="l">
+              <a:lnSpc>
+                <a:spcPts val="1920"/>
+              </a:lnSpc>
+            </a:pPr>
+            <a:r>
+              <a:rPr sz="1600" b="0" i="0">
+                <a:solidFill>
+                  <a:srgbClr val="FAFAFA"/>
+                </a:solidFill>
+                <a:latin typeface="Arial"/>
+              </a:rPr>
+              <a:t>device-choice QAOA (many devices)</a:t>
             </a:r>
           </a:p>
         </p:txBody>
@@ -8710,76 +10701,77 @@
         </p:nvSpPr>
         <p:spPr>
           <a:xfrm>
-            <a:off x="2788920" y="1737360"/>
-            <a:ext cx="3291840" cy="320040"/>
-          </a:xfrm>
-          <a:prstGeom prst="rect">
-            <a:avLst/>
-          </a:prstGeom>
-          <a:noFill/>
-        </p:spPr>
-        <p:txBody>
-          <a:bodyPr wrap="none" lIns="0" rIns="0" tIns="0" bIns="0" anchor="t">
-            <a:spAutoFit/>
-          </a:bodyPr>
-          <a:lstStyle/>
-          <a:p>
-            <a:pPr algn="l">
-              <a:lnSpc>
-                <a:spcPts val="2160"/>
-              </a:lnSpc>
-            </a:pPr>
-            <a:r>
-              <a:rPr sz="1800" b="1" i="0">
-                <a:solidFill>
-                  <a:srgbClr val="9FB4D1"/>
-                </a:solidFill>
-                <a:latin typeface="Arial"/>
-              </a:rPr>
-              <a:t>Circuit (two-qubit gates)</a:t>
-            </a:r>
-          </a:p>
-        </p:txBody>
-      </p:sp>
-      <p:sp>
-        <p:nvSpPr>
-          <p:cNvPr id="7" name="TextBox 6"/>
-          <p:cNvSpPr txBox="1"/>
-          <p:nvPr/>
-        </p:nvSpPr>
-        <p:spPr>
-          <a:xfrm>
-            <a:off x="6080760" y="1737360"/>
-            <a:ext cx="1188720" cy="320040"/>
-          </a:xfrm>
-          <a:prstGeom prst="rect">
-            <a:avLst/>
-          </a:prstGeom>
-          <a:noFill/>
-        </p:spPr>
-        <p:txBody>
-          <a:bodyPr wrap="none" lIns="0" rIns="0" tIns="0" bIns="0" anchor="t">
-            <a:spAutoFit/>
-          </a:bodyPr>
-          <a:lstStyle/>
-          <a:p>
-            <a:pPr algn="l">
-              <a:lnSpc>
-                <a:spcPts val="2160"/>
-              </a:lnSpc>
-            </a:pPr>
-            <a:r>
-              <a:rPr sz="1800" b="1" i="0">
-                <a:solidFill>
-                  <a:srgbClr val="9FB4D1"/>
-                </a:solidFill>
-                <a:latin typeface="Arial"/>
-              </a:rPr>
-              <a:t>Random</a:t>
-            </a:r>
-          </a:p>
-        </p:txBody>
-      </p:sp>
+            <a:off x="548640" y="5257800"/>
+            <a:ext cx="4297680" cy="472440"/>
+          </a:xfrm>
+          <a:prstGeom prst="rect">
+            <a:avLst/>
+          </a:prstGeom>
+          <a:noFill/>
+        </p:spPr>
+        <p:txBody>
+          <a:bodyPr wrap="none" lIns="0" rIns="0" tIns="0" bIns="0" anchor="t">
+            <a:spAutoFit/>
+          </a:bodyPr>
+          <a:lstStyle/>
+          <a:p>
+            <a:pPr algn="l">
+              <a:lnSpc>
+                <a:spcPts val="1680"/>
+              </a:lnSpc>
+            </a:pPr>
+            <a:r>
+              <a:rPr sz="1400" b="0" i="1">
+                <a:solidFill>
+                  <a:srgbClr val="9AA3AA"/>
+                </a:solidFill>
+                <a:latin typeface="Arial"/>
+              </a:rPr>
+              <a:t>settings chosen on 18 separate calibration</a:t>
+            </a:r>
+          </a:p>
+          <a:p>
+            <a:pPr algn="l">
+              <a:lnSpc>
+                <a:spcPts val="1680"/>
+              </a:lnSpc>
+            </a:pPr>
+            <a:r>
+              <a:rPr sz="1400" b="0" i="1">
+                <a:solidFill>
+                  <a:srgbClr val="9AA3AA"/>
+                </a:solidFill>
+                <a:latin typeface="Arial"/>
+              </a:rPr>
+              <a:t>meshes, then frozen; scored on unseen meshes</a:t>
+            </a:r>
+          </a:p>
+        </p:txBody>
+      </p:sp>
+      <p:pic>
+        <p:nvPicPr>
+          <p:cNvPr id="7" name="Picture 6" descr="Two line charts on a log scale. Left: share of near-best shots at 12 qubits against the number of QAOA layers, rising for tuned QAOA to 7.1 percent for equal devices and 19.5 percent for CPU plus GPU at 8 layers, above LR-QAOA, with crosses for the earlier setting at 2 layers. Right: tuned QAOA with 6 layers at 12, 16 and 20 qubits, falling with size but far above crosses for the earlier best setting at 20 qubits and above random guessing."/>
+          <p:cNvPicPr>
+            <a:picLocks noChangeAspect="1"/>
+          </p:cNvPicPr>
+          <p:nvPr/>
+        </p:nvPicPr>
+        <p:blipFill>
+          <a:blip r:embed="rId2"/>
+          <a:stretch>
+            <a:fillRect/>
+          </a:stretch>
+        </p:blipFill>
+        <p:spPr>
+          <a:xfrm>
+            <a:off x="4892040" y="1326078"/>
+            <a:ext cx="6949439" cy="3867514"/>
+          </a:xfrm>
+          <a:prstGeom prst="rect">
+            <a:avLst/>
+          </a:prstGeom>
+        </p:spPr>
+      </p:pic>
       <p:sp>
         <p:nvSpPr>
           <p:cNvPr id="8" name="TextBox 7"/>
@@ -8788,33 +10780,49 @@
         </p:nvSpPr>
         <p:spPr>
           <a:xfrm>
-            <a:off x="7269480" y="1737360"/>
-            <a:ext cx="2331720" cy="320040"/>
-          </a:xfrm>
-          <a:prstGeom prst="rect">
-            <a:avLst/>
-          </a:prstGeom>
-          <a:noFill/>
-        </p:spPr>
-        <p:txBody>
-          <a:bodyPr wrap="none" lIns="0" rIns="0" tIns="0" bIns="0" anchor="t">
-            <a:spAutoFit/>
-          </a:bodyPr>
-          <a:lstStyle/>
-          <a:p>
-            <a:pPr algn="l">
-              <a:lnSpc>
-                <a:spcPts val="2160"/>
-              </a:lnSpc>
-            </a:pPr>
-            <a:r>
-              <a:rPr sz="1800" b="1" i="0">
-                <a:solidFill>
-                  <a:srgbClr val="9FB4D1"/>
-                </a:solidFill>
-                <a:latin typeface="Arial"/>
-              </a:rPr>
-              <a:t>Noiseless</a:t>
+            <a:off x="4983480" y="5230368"/>
+            <a:ext cx="6858000" cy="502920"/>
+          </a:xfrm>
+          <a:prstGeom prst="rect">
+            <a:avLst/>
+          </a:prstGeom>
+          <a:noFill/>
+        </p:spPr>
+        <p:txBody>
+          <a:bodyPr wrap="none" lIns="0" rIns="0" tIns="0" bIns="0" anchor="t">
+            <a:spAutoFit/>
+          </a:bodyPr>
+          <a:lstStyle/>
+          <a:p>
+            <a:pPr algn="l">
+              <a:lnSpc>
+                <a:spcPts val="1800"/>
+              </a:lnSpc>
+            </a:pPr>
+            <a:r>
+              <a:rPr sz="1500" b="0" i="0">
+                <a:solidFill>
+                  <a:srgbClr val="FAFAFA"/>
+                </a:solidFill>
+                <a:latin typeface="Arial"/>
+              </a:rPr>
+              <a:t>12 qubits, 8 layers: 7.1 % / 19.5 % near-best (before 0.36 % / 1.08 %)</a:t>
+            </a:r>
+          </a:p>
+          <a:p>
+            <a:pPr algn="l">
+              <a:lnSpc>
+                <a:spcPts val="1800"/>
+              </a:lnSpc>
+            </a:pPr>
+            <a:r>
+              <a:rPr sz="1500" b="0" i="0">
+                <a:solidFill>
+                  <a:srgbClr val="FAFAFA"/>
+                </a:solidFill>
+                <a:latin typeface="Arial"/>
+              </a:rPr>
+              <a:t>20 qubits, 6 layers: 0.62 % / 1.69 % (before 0.014 % / 0.035 %)</a:t>
             </a:r>
           </a:p>
         </p:txBody>
@@ -8827,820 +10835,35 @@
         </p:nvSpPr>
         <p:spPr>
           <a:xfrm>
-            <a:off x="9646920" y="1737360"/>
-            <a:ext cx="1965960" cy="320040"/>
-          </a:xfrm>
-          <a:prstGeom prst="rect">
-            <a:avLst/>
-          </a:prstGeom>
-          <a:noFill/>
-        </p:spPr>
-        <p:txBody>
-          <a:bodyPr wrap="none" lIns="0" rIns="0" tIns="0" bIns="0" anchor="t">
-            <a:spAutoFit/>
-          </a:bodyPr>
-          <a:lstStyle/>
-          <a:p>
-            <a:pPr algn="l">
-              <a:lnSpc>
-                <a:spcPts val="2160"/>
-              </a:lnSpc>
-            </a:pPr>
-            <a:r>
-              <a:rPr sz="1800" b="1" i="0">
-                <a:solidFill>
-                  <a:srgbClr val="9FB4D1"/>
-                </a:solidFill>
-                <a:latin typeface="Arial"/>
-              </a:rPr>
-              <a:t>IonQ noise model</a:t>
-            </a:r>
-          </a:p>
-        </p:txBody>
-      </p:sp>
-      <p:sp>
-        <p:nvSpPr>
-          <p:cNvPr id="10" name="Rounded Rectangle 9"/>
-          <p:cNvSpPr/>
-          <p:nvPr/>
-        </p:nvSpPr>
-        <p:spPr>
-          <a:xfrm>
-            <a:off x="548640" y="2441447"/>
-            <a:ext cx="11109960" cy="731520"/>
-          </a:xfrm>
-          <a:prstGeom prst="roundRect">
-            <a:avLst>
-              <a:gd name="adj" fmla="val 15000"/>
-            </a:avLst>
-          </a:prstGeom>
-          <a:solidFill>
-            <a:srgbClr val="1A242B"/>
-          </a:solidFill>
-          <a:ln>
-            <a:noFill/>
-          </a:ln>
-          <a:effectLst/>
-        </p:spPr>
-        <p:style>
-          <a:lnRef idx="1">
-            <a:schemeClr val="accent1"/>
-          </a:lnRef>
-          <a:fillRef idx="3">
-            <a:schemeClr val="accent1"/>
-          </a:fillRef>
-          <a:effectRef idx="2">
-            <a:schemeClr val="accent1"/>
-          </a:effectRef>
-          <a:fontRef idx="minor">
-            <a:schemeClr val="lt1"/>
-          </a:fontRef>
-        </p:style>
-        <p:txBody>
-          <a:bodyPr rtlCol="0" anchor="ctr"/>
-          <a:lstStyle/>
-          <a:p>
-            <a:pPr algn="ctr"/>
-          </a:p>
-        </p:txBody>
-      </p:sp>
-      <p:sp>
-        <p:nvSpPr>
-          <p:cNvPr id="11" name="TextBox 10"/>
-          <p:cNvSpPr txBox="1"/>
-          <p:nvPr/>
-        </p:nvSpPr>
-        <p:spPr>
-          <a:xfrm>
-            <a:off x="777240" y="2606039"/>
-            <a:ext cx="2011680" cy="320040"/>
-          </a:xfrm>
-          <a:prstGeom prst="rect">
-            <a:avLst/>
-          </a:prstGeom>
-          <a:noFill/>
-        </p:spPr>
-        <p:txBody>
-          <a:bodyPr wrap="none" lIns="0" rIns="0" tIns="0" bIns="0" anchor="t">
-            <a:spAutoFit/>
-          </a:bodyPr>
-          <a:lstStyle/>
-          <a:p>
-            <a:pPr algn="l">
-              <a:lnSpc>
-                <a:spcPts val="2160"/>
-              </a:lnSpc>
-            </a:pPr>
-            <a:r>
-              <a:rPr sz="1800" b="0" i="0">
-                <a:solidFill>
-                  <a:srgbClr val="FAFAFA"/>
-                </a:solidFill>
-                <a:latin typeface="Arial"/>
-              </a:rPr>
-              <a:t>2 equal devices</a:t>
-            </a:r>
-          </a:p>
-        </p:txBody>
-      </p:sp>
-      <p:sp>
-        <p:nvSpPr>
-          <p:cNvPr id="12" name="TextBox 11"/>
-          <p:cNvSpPr txBox="1"/>
-          <p:nvPr/>
-        </p:nvSpPr>
-        <p:spPr>
-          <a:xfrm>
-            <a:off x="2788920" y="2606039"/>
-            <a:ext cx="3291840" cy="320040"/>
-          </a:xfrm>
-          <a:prstGeom prst="rect">
-            <a:avLst/>
-          </a:prstGeom>
-          <a:noFill/>
-        </p:spPr>
-        <p:txBody>
-          <a:bodyPr wrap="none" lIns="0" rIns="0" tIns="0" bIns="0" anchor="t">
-            <a:spAutoFit/>
-          </a:bodyPr>
-          <a:lstStyle/>
-          <a:p>
-            <a:pPr algn="l">
-              <a:lnSpc>
-                <a:spcPts val="2160"/>
-              </a:lnSpc>
-            </a:pPr>
-            <a:r>
-              <a:rPr sz="1800" b="0" i="0">
-                <a:solidFill>
-                  <a:srgbClr val="FAFAFA"/>
-                </a:solidFill>
-                <a:latin typeface="Arial"/>
-              </a:rPr>
-              <a:t>varQITE ZY (66)</a:t>
-            </a:r>
-          </a:p>
-        </p:txBody>
-      </p:sp>
-      <p:sp>
-        <p:nvSpPr>
-          <p:cNvPr id="13" name="TextBox 12"/>
-          <p:cNvSpPr txBox="1"/>
-          <p:nvPr/>
-        </p:nvSpPr>
-        <p:spPr>
-          <a:xfrm>
-            <a:off x="6080760" y="2606039"/>
-            <a:ext cx="1188720" cy="320040"/>
-          </a:xfrm>
-          <a:prstGeom prst="rect">
-            <a:avLst/>
-          </a:prstGeom>
-          <a:noFill/>
-        </p:spPr>
-        <p:txBody>
-          <a:bodyPr wrap="none" lIns="0" rIns="0" tIns="0" bIns="0" anchor="t">
-            <a:spAutoFit/>
-          </a:bodyPr>
-          <a:lstStyle/>
-          <a:p>
-            <a:pPr algn="l">
-              <a:lnSpc>
-                <a:spcPts val="2160"/>
-              </a:lnSpc>
-            </a:pPr>
-            <a:r>
-              <a:rPr sz="1800" b="0" i="0">
-                <a:solidFill>
-                  <a:srgbClr val="FAFAFA"/>
-                </a:solidFill>
-                <a:latin typeface="Arial"/>
-              </a:rPr>
-              <a:t>0.049 %</a:t>
-            </a:r>
-          </a:p>
-        </p:txBody>
-      </p:sp>
-      <p:sp>
-        <p:nvSpPr>
-          <p:cNvPr id="14" name="TextBox 13"/>
-          <p:cNvSpPr txBox="1"/>
-          <p:nvPr/>
-        </p:nvSpPr>
-        <p:spPr>
-          <a:xfrm>
-            <a:off x="7269480" y="2606039"/>
-            <a:ext cx="2331720" cy="320040"/>
-          </a:xfrm>
-          <a:prstGeom prst="rect">
-            <a:avLst/>
-          </a:prstGeom>
-          <a:noFill/>
-        </p:spPr>
-        <p:txBody>
-          <a:bodyPr wrap="none" lIns="0" rIns="0" tIns="0" bIns="0" anchor="t">
-            <a:spAutoFit/>
-          </a:bodyPr>
-          <a:lstStyle/>
-          <a:p>
-            <a:pPr algn="l">
-              <a:lnSpc>
-                <a:spcPts val="2160"/>
-              </a:lnSpc>
-            </a:pPr>
-            <a:r>
-              <a:rPr sz="1800" b="0" i="0">
-                <a:solidFill>
-                  <a:srgbClr val="FAFAFA"/>
-                </a:solidFill>
-                <a:latin typeface="Arial"/>
-              </a:rPr>
-              <a:t>75.0 %</a:t>
-            </a:r>
-          </a:p>
-        </p:txBody>
-      </p:sp>
-      <p:sp>
-        <p:nvSpPr>
-          <p:cNvPr id="15" name="TextBox 14"/>
-          <p:cNvSpPr txBox="1"/>
-          <p:nvPr/>
-        </p:nvSpPr>
-        <p:spPr>
-          <a:xfrm>
-            <a:off x="9646920" y="2606039"/>
-            <a:ext cx="1965960" cy="320040"/>
-          </a:xfrm>
-          <a:prstGeom prst="rect">
-            <a:avLst/>
-          </a:prstGeom>
-          <a:noFill/>
-        </p:spPr>
-        <p:txBody>
-          <a:bodyPr wrap="none" lIns="0" rIns="0" tIns="0" bIns="0" anchor="t">
-            <a:spAutoFit/>
-          </a:bodyPr>
-          <a:lstStyle/>
-          <a:p>
-            <a:pPr algn="l">
-              <a:lnSpc>
-                <a:spcPts val="2160"/>
-              </a:lnSpc>
-            </a:pPr>
-            <a:r>
-              <a:rPr sz="1800" b="1" i="0">
-                <a:solidFill>
-                  <a:srgbClr val="F89B33"/>
-                </a:solidFill>
-                <a:latin typeface="Arial"/>
-              </a:rPr>
-              <a:t>27.8 %</a:t>
-            </a:r>
-          </a:p>
-        </p:txBody>
-      </p:sp>
-      <p:sp>
-        <p:nvSpPr>
-          <p:cNvPr id="16" name="Rounded Rectangle 15"/>
-          <p:cNvSpPr/>
-          <p:nvPr/>
-        </p:nvSpPr>
-        <p:spPr>
-          <a:xfrm>
-            <a:off x="548640" y="3310127"/>
-            <a:ext cx="11109960" cy="731520"/>
-          </a:xfrm>
-          <a:prstGeom prst="roundRect">
-            <a:avLst>
-              <a:gd name="adj" fmla="val 15000"/>
-            </a:avLst>
-          </a:prstGeom>
-          <a:solidFill>
-            <a:srgbClr val="1A242B"/>
-          </a:solidFill>
-          <a:ln>
-            <a:noFill/>
-          </a:ln>
-          <a:effectLst/>
-        </p:spPr>
-        <p:style>
-          <a:lnRef idx="1">
-            <a:schemeClr val="accent1"/>
-          </a:lnRef>
-          <a:fillRef idx="3">
-            <a:schemeClr val="accent1"/>
-          </a:fillRef>
-          <a:effectRef idx="2">
-            <a:schemeClr val="accent1"/>
-          </a:effectRef>
-          <a:fontRef idx="minor">
-            <a:schemeClr val="lt1"/>
-          </a:fontRef>
-        </p:style>
-        <p:txBody>
-          <a:bodyPr rtlCol="0" anchor="ctr"/>
-          <a:lstStyle/>
-          <a:p>
-            <a:pPr algn="ctr"/>
-          </a:p>
-        </p:txBody>
-      </p:sp>
-      <p:sp>
-        <p:nvSpPr>
-          <p:cNvPr id="17" name="TextBox 16"/>
-          <p:cNvSpPr txBox="1"/>
-          <p:nvPr/>
-        </p:nvSpPr>
-        <p:spPr>
-          <a:xfrm>
-            <a:off x="777240" y="3474720"/>
-            <a:ext cx="2011680" cy="320040"/>
-          </a:xfrm>
-          <a:prstGeom prst="rect">
-            <a:avLst/>
-          </a:prstGeom>
-          <a:noFill/>
-        </p:spPr>
-        <p:txBody>
-          <a:bodyPr wrap="none" lIns="0" rIns="0" tIns="0" bIns="0" anchor="t">
-            <a:spAutoFit/>
-          </a:bodyPr>
-          <a:lstStyle/>
-          <a:p>
-            <a:pPr algn="l">
-              <a:lnSpc>
-                <a:spcPts val="2160"/>
-              </a:lnSpc>
-            </a:pPr>
-            <a:r>
-              <a:rPr sz="1800" b="0" i="0">
-                <a:solidFill>
-                  <a:srgbClr val="FAFAFA"/>
-                </a:solidFill>
-                <a:latin typeface="Arial"/>
-              </a:rPr>
-              <a:t>CPU + GPU</a:t>
-            </a:r>
-          </a:p>
-        </p:txBody>
-      </p:sp>
-      <p:sp>
-        <p:nvSpPr>
-          <p:cNvPr id="18" name="TextBox 17"/>
-          <p:cNvSpPr txBox="1"/>
-          <p:nvPr/>
-        </p:nvSpPr>
-        <p:spPr>
-          <a:xfrm>
-            <a:off x="2788920" y="3474720"/>
-            <a:ext cx="3291840" cy="320040"/>
-          </a:xfrm>
-          <a:prstGeom prst="rect">
-            <a:avLst/>
-          </a:prstGeom>
-          <a:noFill/>
-        </p:spPr>
-        <p:txBody>
-          <a:bodyPr wrap="none" lIns="0" rIns="0" tIns="0" bIns="0" anchor="t">
-            <a:spAutoFit/>
-          </a:bodyPr>
-          <a:lstStyle/>
-          <a:p>
-            <a:pPr algn="l">
-              <a:lnSpc>
-                <a:spcPts val="2160"/>
-              </a:lnSpc>
-            </a:pPr>
-            <a:r>
-              <a:rPr sz="1800" b="0" i="0">
-                <a:solidFill>
-                  <a:srgbClr val="FAFAFA"/>
-                </a:solidFill>
-                <a:latin typeface="Arial"/>
-              </a:rPr>
-              <a:t>CVaR-QAOA, p = 2 (132)</a:t>
-            </a:r>
-          </a:p>
-        </p:txBody>
-      </p:sp>
-      <p:sp>
-        <p:nvSpPr>
-          <p:cNvPr id="19" name="TextBox 18"/>
-          <p:cNvSpPr txBox="1"/>
-          <p:nvPr/>
-        </p:nvSpPr>
-        <p:spPr>
-          <a:xfrm>
-            <a:off x="6080760" y="3474720"/>
-            <a:ext cx="1188720" cy="320040"/>
-          </a:xfrm>
-          <a:prstGeom prst="rect">
-            <a:avLst/>
-          </a:prstGeom>
-          <a:noFill/>
-        </p:spPr>
-        <p:txBody>
-          <a:bodyPr wrap="none" lIns="0" rIns="0" tIns="0" bIns="0" anchor="t">
-            <a:spAutoFit/>
-          </a:bodyPr>
-          <a:lstStyle/>
-          <a:p>
-            <a:pPr algn="l">
-              <a:lnSpc>
-                <a:spcPts val="2160"/>
-              </a:lnSpc>
-            </a:pPr>
-            <a:r>
-              <a:rPr sz="1800" b="0" i="0">
-                <a:solidFill>
-                  <a:srgbClr val="FAFAFA"/>
-                </a:solidFill>
-                <a:latin typeface="Arial"/>
-              </a:rPr>
-              <a:t>0.024 %</a:t>
-            </a:r>
-          </a:p>
-        </p:txBody>
-      </p:sp>
-      <p:sp>
-        <p:nvSpPr>
-          <p:cNvPr id="20" name="TextBox 19"/>
-          <p:cNvSpPr txBox="1"/>
-          <p:nvPr/>
-        </p:nvSpPr>
-        <p:spPr>
-          <a:xfrm>
-            <a:off x="7269480" y="3474720"/>
-            <a:ext cx="2331720" cy="320040"/>
-          </a:xfrm>
-          <a:prstGeom prst="rect">
-            <a:avLst/>
-          </a:prstGeom>
-          <a:noFill/>
-        </p:spPr>
-        <p:txBody>
-          <a:bodyPr wrap="none" lIns="0" rIns="0" tIns="0" bIns="0" anchor="t">
-            <a:spAutoFit/>
-          </a:bodyPr>
-          <a:lstStyle/>
-          <a:p>
-            <a:pPr algn="l">
-              <a:lnSpc>
-                <a:spcPts val="2160"/>
-              </a:lnSpc>
-            </a:pPr>
-            <a:r>
-              <a:rPr sz="1800" b="0" i="0">
-                <a:solidFill>
-                  <a:srgbClr val="FAFAFA"/>
-                </a:solidFill>
-                <a:latin typeface="Arial"/>
-              </a:rPr>
-              <a:t>0.58 %</a:t>
-            </a:r>
-          </a:p>
-        </p:txBody>
-      </p:sp>
-      <p:sp>
-        <p:nvSpPr>
-          <p:cNvPr id="21" name="TextBox 20"/>
-          <p:cNvSpPr txBox="1"/>
-          <p:nvPr/>
-        </p:nvSpPr>
-        <p:spPr>
-          <a:xfrm>
-            <a:off x="9646920" y="3474720"/>
-            <a:ext cx="1965960" cy="320040"/>
-          </a:xfrm>
-          <a:prstGeom prst="rect">
-            <a:avLst/>
-          </a:prstGeom>
-          <a:noFill/>
-        </p:spPr>
-        <p:txBody>
-          <a:bodyPr wrap="none" lIns="0" rIns="0" tIns="0" bIns="0" anchor="t">
-            <a:spAutoFit/>
-          </a:bodyPr>
-          <a:lstStyle/>
-          <a:p>
-            <a:pPr algn="l">
-              <a:lnSpc>
-                <a:spcPts val="2160"/>
-              </a:lnSpc>
-            </a:pPr>
-            <a:r>
-              <a:rPr sz="1800" b="0" i="0">
-                <a:solidFill>
-                  <a:srgbClr val="FAFAFA"/>
-                </a:solidFill>
-                <a:latin typeface="Arial"/>
-              </a:rPr>
-              <a:t>[pending]</a:t>
-            </a:r>
-          </a:p>
-        </p:txBody>
-      </p:sp>
-      <p:sp>
-        <p:nvSpPr>
-          <p:cNvPr id="22" name="Rounded Rectangle 21"/>
-          <p:cNvSpPr/>
-          <p:nvPr/>
-        </p:nvSpPr>
-        <p:spPr>
-          <a:xfrm>
-            <a:off x="548640" y="4178808"/>
-            <a:ext cx="11109960" cy="731520"/>
-          </a:xfrm>
-          <a:prstGeom prst="roundRect">
-            <a:avLst>
-              <a:gd name="adj" fmla="val 15000"/>
-            </a:avLst>
-          </a:prstGeom>
-          <a:solidFill>
-            <a:srgbClr val="1A242B"/>
-          </a:solidFill>
-          <a:ln>
-            <a:noFill/>
-          </a:ln>
-          <a:effectLst/>
-        </p:spPr>
-        <p:style>
-          <a:lnRef idx="1">
-            <a:schemeClr val="accent1"/>
-          </a:lnRef>
-          <a:fillRef idx="3">
-            <a:schemeClr val="accent1"/>
-          </a:fillRef>
-          <a:effectRef idx="2">
-            <a:schemeClr val="accent1"/>
-          </a:effectRef>
-          <a:fontRef idx="minor">
-            <a:schemeClr val="lt1"/>
-          </a:fontRef>
-        </p:style>
-        <p:txBody>
-          <a:bodyPr rtlCol="0" anchor="ctr"/>
-          <a:lstStyle/>
-          <a:p>
-            <a:pPr algn="ctr"/>
-          </a:p>
-        </p:txBody>
-      </p:sp>
-      <p:sp>
-        <p:nvSpPr>
-          <p:cNvPr id="23" name="TextBox 22"/>
-          <p:cNvSpPr txBox="1"/>
-          <p:nvPr/>
-        </p:nvSpPr>
-        <p:spPr>
-          <a:xfrm>
-            <a:off x="777240" y="4343400"/>
-            <a:ext cx="2011680" cy="320040"/>
-          </a:xfrm>
-          <a:prstGeom prst="rect">
-            <a:avLst/>
-          </a:prstGeom>
-          <a:noFill/>
-        </p:spPr>
-        <p:txBody>
-          <a:bodyPr wrap="none" lIns="0" rIns="0" tIns="0" bIns="0" anchor="t">
-            <a:spAutoFit/>
-          </a:bodyPr>
-          <a:lstStyle/>
-          <a:p>
-            <a:pPr algn="l">
-              <a:lnSpc>
-                <a:spcPts val="2160"/>
-              </a:lnSpc>
-            </a:pPr>
-            <a:r>
-              <a:rPr sz="1800" b="0" i="0">
-                <a:solidFill>
-                  <a:srgbClr val="FAFAFA"/>
-                </a:solidFill>
-                <a:latin typeface="Arial"/>
-              </a:rPr>
-              <a:t>CPU + GPU</a:t>
-            </a:r>
-          </a:p>
-        </p:txBody>
-      </p:sp>
-      <p:sp>
-        <p:nvSpPr>
-          <p:cNvPr id="24" name="TextBox 23"/>
-          <p:cNvSpPr txBox="1"/>
-          <p:nvPr/>
-        </p:nvSpPr>
-        <p:spPr>
-          <a:xfrm>
-            <a:off x="2788920" y="4343400"/>
-            <a:ext cx="3291840" cy="320040"/>
-          </a:xfrm>
-          <a:prstGeom prst="rect">
-            <a:avLst/>
-          </a:prstGeom>
-          <a:noFill/>
-        </p:spPr>
-        <p:txBody>
-          <a:bodyPr wrap="none" lIns="0" rIns="0" tIns="0" bIns="0" anchor="t">
-            <a:spAutoFit/>
-          </a:bodyPr>
-          <a:lstStyle/>
-          <a:p>
-            <a:pPr algn="l">
-              <a:lnSpc>
-                <a:spcPts val="2160"/>
-              </a:lnSpc>
-            </a:pPr>
-            <a:r>
-              <a:rPr sz="1800" b="0" i="0">
-                <a:solidFill>
-                  <a:srgbClr val="FAFAFA"/>
-                </a:solidFill>
-                <a:latin typeface="Arial"/>
-              </a:rPr>
-              <a:t>varQITE ZY (66)</a:t>
-            </a:r>
-          </a:p>
-        </p:txBody>
-      </p:sp>
-      <p:sp>
-        <p:nvSpPr>
-          <p:cNvPr id="25" name="TextBox 24"/>
-          <p:cNvSpPr txBox="1"/>
-          <p:nvPr/>
-        </p:nvSpPr>
-        <p:spPr>
-          <a:xfrm>
-            <a:off x="6080760" y="4343400"/>
-            <a:ext cx="1188720" cy="320040"/>
-          </a:xfrm>
-          <a:prstGeom prst="rect">
-            <a:avLst/>
-          </a:prstGeom>
-          <a:noFill/>
-        </p:spPr>
-        <p:txBody>
-          <a:bodyPr wrap="none" lIns="0" rIns="0" tIns="0" bIns="0" anchor="t">
-            <a:spAutoFit/>
-          </a:bodyPr>
-          <a:lstStyle/>
-          <a:p>
-            <a:pPr algn="l">
-              <a:lnSpc>
-                <a:spcPts val="2160"/>
-              </a:lnSpc>
-            </a:pPr>
-            <a:r>
-              <a:rPr sz="1800" b="0" i="0">
-                <a:solidFill>
-                  <a:srgbClr val="FAFAFA"/>
-                </a:solidFill>
-                <a:latin typeface="Arial"/>
-              </a:rPr>
-              <a:t>0.024 %</a:t>
-            </a:r>
-          </a:p>
-        </p:txBody>
-      </p:sp>
-      <p:sp>
-        <p:nvSpPr>
-          <p:cNvPr id="26" name="TextBox 25"/>
-          <p:cNvSpPr txBox="1"/>
-          <p:nvPr/>
-        </p:nvSpPr>
-        <p:spPr>
-          <a:xfrm>
-            <a:off x="7269480" y="4343400"/>
-            <a:ext cx="2331720" cy="320040"/>
-          </a:xfrm>
-          <a:prstGeom prst="rect">
-            <a:avLst/>
-          </a:prstGeom>
-          <a:noFill/>
-        </p:spPr>
-        <p:txBody>
-          <a:bodyPr wrap="none" lIns="0" rIns="0" tIns="0" bIns="0" anchor="t">
-            <a:spAutoFit/>
-          </a:bodyPr>
-          <a:lstStyle/>
-          <a:p>
-            <a:pPr algn="l">
-              <a:lnSpc>
-                <a:spcPts val="2160"/>
-              </a:lnSpc>
-            </a:pPr>
-            <a:r>
-              <a:rPr sz="1800" b="0" i="0">
-                <a:solidFill>
-                  <a:srgbClr val="FAFAFA"/>
-                </a:solidFill>
-                <a:latin typeface="Arial"/>
-              </a:rPr>
-              <a:t>0.00 % (cap proved)</a:t>
-            </a:r>
-          </a:p>
-        </p:txBody>
-      </p:sp>
-      <p:sp>
-        <p:nvSpPr>
-          <p:cNvPr id="27" name="TextBox 26"/>
-          <p:cNvSpPr txBox="1"/>
-          <p:nvPr/>
-        </p:nvSpPr>
-        <p:spPr>
-          <a:xfrm>
-            <a:off x="9646920" y="4343400"/>
-            <a:ext cx="1965960" cy="320040"/>
-          </a:xfrm>
-          <a:prstGeom prst="rect">
-            <a:avLst/>
-          </a:prstGeom>
-          <a:noFill/>
-        </p:spPr>
-        <p:txBody>
-          <a:bodyPr wrap="none" lIns="0" rIns="0" tIns="0" bIns="0" anchor="t">
-            <a:spAutoFit/>
-          </a:bodyPr>
-          <a:lstStyle/>
-          <a:p>
-            <a:pPr algn="l">
-              <a:lnSpc>
-                <a:spcPts val="2160"/>
-              </a:lnSpc>
-            </a:pPr>
-            <a:r>
-              <a:rPr sz="1800" b="0" i="0">
-                <a:solidFill>
-                  <a:srgbClr val="FAFAFA"/>
-                </a:solidFill>
-                <a:latin typeface="Arial"/>
-              </a:rPr>
-              <a:t>[pending]</a:t>
-            </a:r>
-          </a:p>
-        </p:txBody>
-      </p:sp>
-      <p:sp>
-        <p:nvSpPr>
-          <p:cNvPr id="28" name="TextBox 27"/>
-          <p:cNvSpPr txBox="1"/>
-          <p:nvPr/>
-        </p:nvSpPr>
-        <p:spPr>
-          <a:xfrm>
-            <a:off x="548640" y="5349240"/>
-            <a:ext cx="10972800" cy="320040"/>
-          </a:xfrm>
-          <a:prstGeom prst="rect">
-            <a:avLst/>
-          </a:prstGeom>
-          <a:noFill/>
-        </p:spPr>
-        <p:txBody>
-          <a:bodyPr wrap="none" lIns="0" rIns="0" tIns="0" bIns="0" anchor="t">
-            <a:spAutoFit/>
-          </a:bodyPr>
-          <a:lstStyle/>
-          <a:p>
-            <a:pPr algn="l">
-              <a:lnSpc>
-                <a:spcPts val="2160"/>
-              </a:lnSpc>
-            </a:pPr>
-            <a:r>
-              <a:rPr sz="1800" b="0" i="0">
+            <a:off x="4983480" y="5897880"/>
+            <a:ext cx="6858000" cy="472440"/>
+          </a:xfrm>
+          <a:prstGeom prst="rect">
+            <a:avLst/>
+          </a:prstGeom>
+          <a:noFill/>
+        </p:spPr>
+        <p:txBody>
+          <a:bodyPr wrap="none" lIns="0" rIns="0" tIns="0" bIns="0" anchor="t">
+            <a:spAutoFit/>
+          </a:bodyPr>
+          <a:lstStyle/>
+          <a:p>
+            <a:pPr algn="l">
+              <a:lnSpc>
+                <a:spcPts val="1680"/>
+              </a:lnSpc>
+            </a:pPr>
+            <a:r>
+              <a:rPr sz="1400" b="0" i="1">
                 <a:solidFill>
                   <a:srgbClr val="9AA3AA"/>
                 </a:solidFill>
                 <a:latin typeface="Arial"/>
               </a:rPr>
-              <a:t>Share of shots that are the exact best split. The noisy runs for CPU + GPU are still to be made.</a:t>
-            </a:r>
-          </a:p>
-        </p:txBody>
-      </p:sp>
-      <p:sp>
-        <p:nvSpPr>
-          <p:cNvPr id="29" name="TextBox 28"/>
-          <p:cNvSpPr txBox="1"/>
-          <p:nvPr/>
-        </p:nvSpPr>
-        <p:spPr>
-          <a:xfrm>
-            <a:off x="548640" y="5806440"/>
-            <a:ext cx="10972800" cy="259080"/>
-          </a:xfrm>
-          <a:prstGeom prst="rect">
-            <a:avLst/>
-          </a:prstGeom>
-          <a:noFill/>
-        </p:spPr>
-        <p:txBody>
-          <a:bodyPr wrap="none" lIns="0" rIns="0" tIns="0" bIns="0" anchor="t">
-            <a:spAutoFit/>
-          </a:bodyPr>
-          <a:lstStyle/>
+              <a:t>per shot, equal devices / CPU + GPU; noiseless simulation, HPC server, 11 Oct 2026;</a:t>
+            </a:r>
+          </a:p>
           <a:p>
             <a:pPr algn="l">
               <a:lnSpc>
@@ -9654,14 +10877,14 @@
                 </a:solidFill>
                 <a:latin typeface="Arial"/>
               </a:rPr>
-              <a:t>random, noiseless: noiseless simulation; last column: IonQ Forte 1 noise model (Qollab), 11 Oct 2026</a:t>
-            </a:r>
-          </a:p>
-        </p:txBody>
-      </p:sp>
-      <p:sp>
-        <p:nvSpPr>
-          <p:cNvPr id="30" name="TextBox 29"/>
+              <a:t>deeper circuits lose more under noise (0.5 % per gate estimate: best at 5 layers)</a:t>
+            </a:r>
+          </a:p>
+        </p:txBody>
+      </p:sp>
+      <p:sp>
+        <p:nvSpPr>
+          <p:cNvPr id="10" name="TextBox 9"/>
           <p:cNvSpPr txBox="1"/>
           <p:nvPr/>
         </p:nvSpPr>
@@ -9700,7 +10923,7 @@
       </p:sp>
       <p:sp>
         <p:nvSpPr>
-          <p:cNvPr id="31" name="TextBox 30"/>
+          <p:cNvPr id="11" name="TextBox 10"/>
           <p:cNvSpPr txBox="1"/>
           <p:nvPr/>
         </p:nvSpPr>

--- a/mesh/slides/mesh_ZollerQu.pptx
+++ b/mesh/slides/mesh_ZollerQu.pptx
@@ -10780,27 +10780,27 @@
         </p:nvSpPr>
         <p:spPr>
           <a:xfrm>
-            <a:off x="4983480" y="5230368"/>
-            <a:ext cx="6858000" cy="502920"/>
-          </a:xfrm>
-          <a:prstGeom prst="rect">
-            <a:avLst/>
-          </a:prstGeom>
-          <a:noFill/>
-        </p:spPr>
-        <p:txBody>
-          <a:bodyPr wrap="none" lIns="0" rIns="0" tIns="0" bIns="0" anchor="t">
-            <a:spAutoFit/>
-          </a:bodyPr>
-          <a:lstStyle/>
-          <a:p>
-            <a:pPr algn="l">
-              <a:lnSpc>
-                <a:spcPts val="1800"/>
-              </a:lnSpc>
-            </a:pPr>
-            <a:r>
-              <a:rPr sz="1500" b="0" i="0">
+            <a:off x="4983480" y="5074920"/>
+            <a:ext cx="6858000" cy="685800"/>
+          </a:xfrm>
+          <a:prstGeom prst="rect">
+            <a:avLst/>
+          </a:prstGeom>
+          <a:noFill/>
+        </p:spPr>
+        <p:txBody>
+          <a:bodyPr wrap="none" lIns="0" rIns="0" tIns="0" bIns="0" anchor="t">
+            <a:spAutoFit/>
+          </a:bodyPr>
+          <a:lstStyle/>
+          <a:p>
+            <a:pPr algn="l">
+              <a:lnSpc>
+                <a:spcPts val="1680"/>
+              </a:lnSpc>
+            </a:pPr>
+            <a:r>
+              <a:rPr sz="1400" b="0" i="0">
                 <a:solidFill>
                   <a:srgbClr val="FAFAFA"/>
                 </a:solidFill>
@@ -10812,17 +10812,33 @@
           <a:p>
             <a:pPr algn="l">
               <a:lnSpc>
-                <a:spcPts val="1800"/>
-              </a:lnSpc>
-            </a:pPr>
-            <a:r>
-              <a:rPr sz="1500" b="0" i="0">
+                <a:spcPts val="1680"/>
+              </a:lnSpc>
+            </a:pPr>
+            <a:r>
+              <a:rPr sz="1400" b="0" i="0">
                 <a:solidFill>
                   <a:srgbClr val="FAFAFA"/>
                 </a:solidFill>
                 <a:latin typeface="Arial"/>
               </a:rPr>
               <a:t>20 qubits, 6 layers: 0.62 % / 1.69 % (before 0.014 % / 0.035 %)</a:t>
+            </a:r>
+          </a:p>
+          <a:p>
+            <a:pPr algn="l">
+              <a:lnSpc>
+                <a:spcPts val="1680"/>
+              </a:lnSpc>
+            </a:pPr>
+            <a:r>
+              <a:rPr sz="1400" b="0" i="0">
+                <a:solidFill>
+                  <a:srgbClr val="FAFAFA"/>
+                </a:solidFill>
+                <a:latin typeface="Arial"/>
+              </a:rPr>
+              <a:t>29 qubits, 8 layers, found in 1,000 tries: 88 % / 100 % (spectral 50 % / 100 %)</a:t>
             </a:r>
           </a:p>
         </p:txBody>
